--- a/From_Idea_to_Working_App.pptx
+++ b/From_Idea_to_Working_App.pptx
@@ -4,25 +4,28 @@
   <p:sldMasterIdLst>
     <p:sldMasterId id="2147483648" r:id="rId1"/>
   </p:sldMasterIdLst>
+  <p:notesMasterIdLst>
+    <p:notesMasterId r:id="rId18"/>
+  </p:notesMasterIdLst>
   <p:sldIdLst>
-    <p:sldId id="256" r:id="rId7"/>
-    <p:sldId id="257" r:id="rId9"/>
-    <p:sldId id="258" r:id="rId10"/>
-    <p:sldId id="259" r:id="rId11"/>
-    <p:sldId id="260" r:id="rId12"/>
-    <p:sldId id="261" r:id="rId13"/>
-    <p:sldId id="262" r:id="rId14"/>
-    <p:sldId id="263" r:id="rId15"/>
-    <p:sldId id="264" r:id="rId16"/>
-    <p:sldId id="265" r:id="rId17"/>
-    <p:sldId id="266" r:id="rId18"/>
-    <p:sldId id="267" r:id="rId19"/>
-    <p:sldId id="268" r:id="rId20"/>
-    <p:sldId id="269" r:id="rId21"/>
-    <p:sldId id="270" r:id="rId22"/>
-    <p:sldId id="271" r:id="rId23"/>
+    <p:sldId id="256" r:id="rId2"/>
+    <p:sldId id="257" r:id="rId3"/>
+    <p:sldId id="258" r:id="rId4"/>
+    <p:sldId id="259" r:id="rId5"/>
+    <p:sldId id="260" r:id="rId6"/>
+    <p:sldId id="261" r:id="rId7"/>
+    <p:sldId id="262" r:id="rId8"/>
+    <p:sldId id="263" r:id="rId9"/>
+    <p:sldId id="264" r:id="rId10"/>
+    <p:sldId id="265" r:id="rId11"/>
+    <p:sldId id="266" r:id="rId12"/>
+    <p:sldId id="267" r:id="rId13"/>
+    <p:sldId id="268" r:id="rId14"/>
+    <p:sldId id="269" r:id="rId15"/>
+    <p:sldId id="270" r:id="rId16"/>
+    <p:sldId id="271" r:id="rId17"/>
   </p:sldIdLst>
-  <p:sldSz cx="12191695" cy="6858000" type="screen4x3"/>
+  <p:sldSz cx="12192000" cy="6858000"/>
   <p:notesSz cx="6858000" cy="9144000"/>
   <p:defaultTextStyle>
     <a:defPPr>
@@ -119,11 +122,27 @@
       </a:defRPr>
     </a:lvl9pPr>
   </p:defaultTextStyle>
+  <p:extLst>
+    <p:ext uri="{EFAFB233-063F-42B5-8137-9DF3F51BA10A}">
+      <p15:sldGuideLst xmlns:p15="http://schemas.microsoft.com/office/powerpoint/2012/main">
+        <p15:guide id="1" orient="horz" pos="2160">
+          <p15:clr>
+            <a:srgbClr val="A4A3A4"/>
+          </p15:clr>
+        </p15:guide>
+        <p15:guide id="2" pos="2880">
+          <p15:clr>
+            <a:srgbClr val="A4A3A4"/>
+          </p15:clr>
+        </p15:guide>
+      </p15:sldGuideLst>
+    </p:ext>
+  </p:extLst>
 </p:presentation>
 </file>
 
 <file path=ppt/notesMasters/notesMaster1.xml><?xml version="1.0" encoding="utf-8"?>
-<p:notesMaster xmlns:a="http://schemas.openxmlformats.org/drawingml/2006/main" xmlns:p="http://schemas.openxmlformats.org/presentationml/2006/main" xmlns:r="http://schemas.openxmlformats.org/officeDocument/2006/relationships">
+<p:notesMaster xmlns:a="http://schemas.openxmlformats.org/drawingml/2006/main" xmlns:r="http://schemas.openxmlformats.org/officeDocument/2006/relationships" xmlns:p="http://schemas.openxmlformats.org/presentationml/2006/main">
   <p:cSld>
     <p:bg>
       <p:bgRef idx="1001">
@@ -144,241 +163,16 @@
           <a:chExt cx="0" cy="0"/>
         </a:xfrm>
       </p:grpSpPr>
-      <p:sp>
-        <p:nvSpPr>
-          <p:cNvPr id="2" name="Header Placeholder 1"/>
-          <p:cNvSpPr>
-            <a:spLocks noGrp="1"/>
-          </p:cNvSpPr>
-          <p:nvPr>
-            <p:ph type="hdr" sz="quarter"/>
-          </p:nvPr>
-        </p:nvSpPr>
-        <p:spPr>
-          <a:xfrm>
-            <a:off x="0" y="0"/>
-            <a:ext cx="2971800" cy="457200"/>
-          </a:xfrm>
-          <a:prstGeom prst="rect">
-            <a:avLst/>
-          </a:prstGeom>
-        </p:spPr>
-        <p:txBody>
-          <a:bodyPr vert="horz" lIns="91440" tIns="45720" rIns="91440" bIns="45720" rtlCol="0"/>
-          <a:lstStyle>
-            <a:lvl1pPr algn="l">
-              <a:defRPr sz="1200"/>
-            </a:lvl1pPr>
-          </a:lstStyle>
-          <a:p>
-            <a:endParaRPr lang="en-US"/>
-          </a:p>
-        </p:txBody>
-      </p:sp>
-      <p:sp>
-        <p:nvSpPr>
-          <p:cNvPr id="3" name="Date Placeholder 2"/>
-          <p:cNvSpPr>
-            <a:spLocks noGrp="1"/>
-          </p:cNvSpPr>
-          <p:nvPr>
-            <p:ph type="dt" idx="1"/>
-          </p:nvPr>
-        </p:nvSpPr>
-        <p:spPr>
-          <a:xfrm>
-            <a:off x="3884613" y="0"/>
-            <a:ext cx="2971800" cy="457200"/>
-          </a:xfrm>
-          <a:prstGeom prst="rect">
-            <a:avLst/>
-          </a:prstGeom>
-        </p:spPr>
-        <p:txBody>
-          <a:bodyPr vert="horz" lIns="91440" tIns="45720" rIns="91440" bIns="45720" rtlCol="0"/>
-          <a:lstStyle>
-            <a:lvl1pPr algn="r">
-              <a:defRPr sz="1200"/>
-            </a:lvl1pPr>
-          </a:lstStyle>
-          <a:p>
-            <a:fld id="{0F89C1C7-3DCD-1040-A9CF-14679D8B5DDD}" type="datetimeFigureOut">
-              <a:rPr lang="en-US" smtClean="0"/>
-              <a:t>10/17/16</a:t>
-            </a:fld>
-            <a:endParaRPr lang="en-US"/>
-          </a:p>
-        </p:txBody>
-      </p:sp>
-      <p:sp>
-        <p:nvSpPr>
-          <p:cNvPr id="4" name="Slide Image Placeholder 3"/>
-          <p:cNvSpPr>
-            <a:spLocks noGrp="1" noRot="1" noChangeAspect="1"/>
-          </p:cNvSpPr>
-          <p:nvPr>
-            <p:ph type="sldImg" idx="2"/>
-          </p:nvPr>
-        </p:nvSpPr>
-        <p:spPr>
-          <a:xfrm>
-            <a:off x="1143000" y="685800"/>
-            <a:ext cx="4572000" cy="3429000"/>
-          </a:xfrm>
-          <a:prstGeom prst="rect">
-            <a:avLst/>
-          </a:prstGeom>
-          <a:noFill/>
-          <a:ln w="12700">
-            <a:solidFill>
-              <a:prstClr val="black"/>
-            </a:solidFill>
-          </a:ln>
-        </p:spPr>
-        <p:txBody>
-          <a:bodyPr vert="horz" lIns="91440" tIns="45720" rIns="91440" bIns="45720" rtlCol="0" anchor="ctr"/>
-          <a:lstStyle/>
-          <a:p>
-            <a:endParaRPr lang="en-US"/>
-          </a:p>
-        </p:txBody>
-      </p:sp>
-      <p:sp>
-        <p:nvSpPr>
-          <p:cNvPr id="5" name="Notes Placeholder 4"/>
-          <p:cNvSpPr>
-            <a:spLocks noGrp="1"/>
-          </p:cNvSpPr>
-          <p:nvPr>
-            <p:ph type="body" sz="quarter" idx="3"/>
-          </p:nvPr>
-        </p:nvSpPr>
-        <p:spPr>
-          <a:xfrm>
-            <a:off x="685800" y="4343400"/>
-            <a:ext cx="5486400" cy="4114800"/>
-          </a:xfrm>
-          <a:prstGeom prst="rect">
-            <a:avLst/>
-          </a:prstGeom>
-        </p:spPr>
-        <p:txBody>
-          <a:bodyPr vert="horz" lIns="91440" tIns="45720" rIns="91440" bIns="45720" rtlCol="0"/>
-          <a:lstStyle/>
-          <a:p>
-            <a:pPr lvl="0"/>
-            <a:r>
-              <a:rPr lang="en-US" smtClean="0"/>
-              <a:t>Click to edit Master text styles</a:t>
-            </a:r>
-          </a:p>
-          <a:p>
-            <a:pPr lvl="1"/>
-            <a:r>
-              <a:rPr lang="en-US" smtClean="0"/>
-              <a:t>Second level</a:t>
-            </a:r>
-          </a:p>
-          <a:p>
-            <a:pPr lvl="2"/>
-            <a:r>
-              <a:rPr lang="en-US" smtClean="0"/>
-              <a:t>Third level</a:t>
-            </a:r>
-          </a:p>
-          <a:p>
-            <a:pPr lvl="3"/>
-            <a:r>
-              <a:rPr lang="en-US" smtClean="0"/>
-              <a:t>Fourth level</a:t>
-            </a:r>
-          </a:p>
-          <a:p>
-            <a:pPr lvl="4"/>
-            <a:r>
-              <a:rPr lang="en-US" smtClean="0"/>
-              <a:t>Fifth level</a:t>
-            </a:r>
-            <a:endParaRPr lang="en-US"/>
-          </a:p>
-        </p:txBody>
-      </p:sp>
-      <p:sp>
-        <p:nvSpPr>
-          <p:cNvPr id="6" name="Footer Placeholder 5"/>
-          <p:cNvSpPr>
-            <a:spLocks noGrp="1"/>
-          </p:cNvSpPr>
-          <p:nvPr>
-            <p:ph type="ftr" sz="quarter" idx="4"/>
-          </p:nvPr>
-        </p:nvSpPr>
-        <p:spPr>
-          <a:xfrm>
-            <a:off x="0" y="8685213"/>
-            <a:ext cx="2971800" cy="457200"/>
-          </a:xfrm>
-          <a:prstGeom prst="rect">
-            <a:avLst/>
-          </a:prstGeom>
-        </p:spPr>
-        <p:txBody>
-          <a:bodyPr vert="horz" lIns="91440" tIns="45720" rIns="91440" bIns="45720" rtlCol="0" anchor="b"/>
-          <a:lstStyle>
-            <a:lvl1pPr algn="l">
-              <a:defRPr sz="1200"/>
-            </a:lvl1pPr>
-          </a:lstStyle>
-          <a:p>
-            <a:endParaRPr lang="en-US"/>
-          </a:p>
-        </p:txBody>
-      </p:sp>
-      <p:sp>
-        <p:nvSpPr>
-          <p:cNvPr id="7" name="Slide Number Placeholder 6"/>
-          <p:cNvSpPr>
-            <a:spLocks noGrp="1"/>
-          </p:cNvSpPr>
-          <p:nvPr>
-            <p:ph type="sldNum" sz="quarter" idx="5"/>
-          </p:nvPr>
-        </p:nvSpPr>
-        <p:spPr>
-          <a:xfrm>
-            <a:off x="3884613" y="8685213"/>
-            <a:ext cx="2971800" cy="457200"/>
-          </a:xfrm>
-          <a:prstGeom prst="rect">
-            <a:avLst/>
-          </a:prstGeom>
-        </p:spPr>
-        <p:txBody>
-          <a:bodyPr vert="horz" lIns="91440" tIns="45720" rIns="91440" bIns="45720" rtlCol="0" anchor="b"/>
-          <a:lstStyle>
-            <a:lvl1pPr algn="r">
-              <a:defRPr sz="1200"/>
-            </a:lvl1pPr>
-          </a:lstStyle>
-          <a:p>
-            <a:fld id="{BB5E49A5-4136-284D-997B-48E1D791AD67}" type="slidenum">
-              <a:rPr lang="en-US" smtClean="0"/>
-              <a:t>‹#›</a:t>
-            </a:fld>
-            <a:endParaRPr lang="en-US"/>
-          </a:p>
-        </p:txBody>
-      </p:sp>
     </p:spTree>
     <p:extLst>
       <p:ext uri="{BB962C8B-B14F-4D97-AF65-F5344CB8AC3E}">
-        <p14:creationId xmlns:p14="http://schemas.microsoft.com/office/powerpoint/2010/main" val="2623252185"/>
+        <p14:creationId xmlns:p14="http://schemas.microsoft.com/office/powerpoint/2010/main" val="2217618328"/>
       </p:ext>
     </p:extLst>
   </p:cSld>
   <p:clrMap bg1="lt1" tx1="dk1" bg2="lt2" tx2="dk2" accent1="accent1" accent2="accent2" accent3="accent3" accent4="accent4" accent5="accent5" accent6="accent6" hlink="hlink" folHlink="folHlink"/>
   <p:notesStyle>
-    <a:lvl1pPr marL="0" algn="l" defTabSz="457200" rtl="0" eaLnBrk="1" latinLnBrk="0" hangingPunct="1">
+    <a:lvl1pPr marL="0" algn="l" defTabSz="914400" rtl="0" eaLnBrk="1" latinLnBrk="0" hangingPunct="1">
       <a:defRPr sz="1200" kern="1200">
         <a:solidFill>
           <a:schemeClr val="tx1"/>
@@ -388,7 +182,7 @@
         <a:cs typeface="+mn-cs"/>
       </a:defRPr>
     </a:lvl1pPr>
-    <a:lvl2pPr marL="457200" algn="l" defTabSz="457200" rtl="0" eaLnBrk="1" latinLnBrk="0" hangingPunct="1">
+    <a:lvl2pPr marL="457200" algn="l" defTabSz="914400" rtl="0" eaLnBrk="1" latinLnBrk="0" hangingPunct="1">
       <a:defRPr sz="1200" kern="1200">
         <a:solidFill>
           <a:schemeClr val="tx1"/>
@@ -398,7 +192,7 @@
         <a:cs typeface="+mn-cs"/>
       </a:defRPr>
     </a:lvl2pPr>
-    <a:lvl3pPr marL="914400" algn="l" defTabSz="457200" rtl="0" eaLnBrk="1" latinLnBrk="0" hangingPunct="1">
+    <a:lvl3pPr marL="914400" algn="l" defTabSz="914400" rtl="0" eaLnBrk="1" latinLnBrk="0" hangingPunct="1">
       <a:defRPr sz="1200" kern="1200">
         <a:solidFill>
           <a:schemeClr val="tx1"/>
@@ -408,7 +202,7 @@
         <a:cs typeface="+mn-cs"/>
       </a:defRPr>
     </a:lvl3pPr>
-    <a:lvl4pPr marL="1371600" algn="l" defTabSz="457200" rtl="0" eaLnBrk="1" latinLnBrk="0" hangingPunct="1">
+    <a:lvl4pPr marL="1371600" algn="l" defTabSz="914400" rtl="0" eaLnBrk="1" latinLnBrk="0" hangingPunct="1">
       <a:defRPr sz="1200" kern="1200">
         <a:solidFill>
           <a:schemeClr val="tx1"/>
@@ -418,7 +212,7 @@
         <a:cs typeface="+mn-cs"/>
       </a:defRPr>
     </a:lvl4pPr>
-    <a:lvl5pPr marL="1828800" algn="l" defTabSz="457200" rtl="0" eaLnBrk="1" latinLnBrk="0" hangingPunct="1">
+    <a:lvl5pPr marL="1828800" algn="l" defTabSz="914400" rtl="0" eaLnBrk="1" latinLnBrk="0" hangingPunct="1">
       <a:defRPr sz="1200" kern="1200">
         <a:solidFill>
           <a:schemeClr val="tx1"/>
@@ -428,7 +222,7 @@
         <a:cs typeface="+mn-cs"/>
       </a:defRPr>
     </a:lvl5pPr>
-    <a:lvl6pPr marL="2286000" algn="l" defTabSz="457200" rtl="0" eaLnBrk="1" latinLnBrk="0" hangingPunct="1">
+    <a:lvl6pPr marL="2286000" algn="l" defTabSz="914400" rtl="0" eaLnBrk="1" latinLnBrk="0" hangingPunct="1">
       <a:defRPr sz="1200" kern="1200">
         <a:solidFill>
           <a:schemeClr val="tx1"/>
@@ -438,7 +232,7 @@
         <a:cs typeface="+mn-cs"/>
       </a:defRPr>
     </a:lvl6pPr>
-    <a:lvl7pPr marL="2743200" algn="l" defTabSz="457200" rtl="0" eaLnBrk="1" latinLnBrk="0" hangingPunct="1">
+    <a:lvl7pPr marL="2743200" algn="l" defTabSz="914400" rtl="0" eaLnBrk="1" latinLnBrk="0" hangingPunct="1">
       <a:defRPr sz="1200" kern="1200">
         <a:solidFill>
           <a:schemeClr val="tx1"/>
@@ -448,7 +242,7 @@
         <a:cs typeface="+mn-cs"/>
       </a:defRPr>
     </a:lvl7pPr>
-    <a:lvl8pPr marL="3200400" algn="l" defTabSz="457200" rtl="0" eaLnBrk="1" latinLnBrk="0" hangingPunct="1">
+    <a:lvl8pPr marL="3200400" algn="l" defTabSz="914400" rtl="0" eaLnBrk="1" latinLnBrk="0" hangingPunct="1">
       <a:defRPr sz="1200" kern="1200">
         <a:solidFill>
           <a:schemeClr val="tx1"/>
@@ -458,7 +252,7 @@
         <a:cs typeface="+mn-cs"/>
       </a:defRPr>
     </a:lvl8pPr>
-    <a:lvl9pPr marL="3657600" algn="l" defTabSz="457200" rtl="0" eaLnBrk="1" latinLnBrk="0" hangingPunct="1">
+    <a:lvl9pPr marL="3657600" algn="l" defTabSz="914400" rtl="0" eaLnBrk="1" latinLnBrk="0" hangingPunct="1">
       <a:defRPr sz="1200" kern="1200">
         <a:solidFill>
           <a:schemeClr val="tx1"/>
@@ -473,7 +267,7 @@
 </file>
 
 <file path=ppt/notesSlides/notesSlide1.xml><?xml version="1.0" encoding="utf-8"?>
-<p:notes xmlns:a="http://schemas.openxmlformats.org/drawingml/2006/main" xmlns:p="http://schemas.openxmlformats.org/presentationml/2006/main" xmlns:r="http://schemas.openxmlformats.org/officeDocument/2006/relationships">
+<p:notes xmlns:a="http://schemas.openxmlformats.org/drawingml/2006/main" xmlns:r="http://schemas.openxmlformats.org/officeDocument/2006/relationships" xmlns:p="http://schemas.openxmlformats.org/presentationml/2006/main">
   <p:cSld>
     <p:spTree>
       <p:nvGrpSpPr>
@@ -493,7 +287,7 @@
         <p:nvSpPr>
           <p:cNvPr id="2" name="Slide Image Placeholder 1"/>
           <p:cNvSpPr>
-            <a:spLocks noGrp="1"/>
+            <a:spLocks noGrp="1" noRot="1" noChangeAspect="1"/>
           </p:cNvSpPr>
           <p:nvPr>
             <p:ph type="sldImg" idx="2"/>
@@ -508,7 +302,7 @@
             <a:spLocks noGrp="1"/>
           </p:cNvSpPr>
           <p:nvPr>
-            <p:ph type="body" idx="3" sz="quarter"/>
+            <p:ph type="body" sz="quarter" idx="3"/>
           </p:nvPr>
         </p:nvSpPr>
         <p:spPr/>
@@ -517,6 +311,7 @@
           <a:lstStyle/>
           <a:p>
             <a:r>
+              <a:rPr dirty="0"/>
               <a:t>Welcome the audience. Frame the next 45 minutes: a candid walk-through of how a working web application was built from a single idea using AI coding tools. Set expectations: this is not a sales pitch for AI; it is a story about what worked, what broke, and what to take away. Mention that we will end with a live demo and Q&amp;A.</a:t>
             </a:r>
           </a:p>
@@ -529,7 +324,7 @@
             <a:spLocks noGrp="1"/>
           </p:cNvSpPr>
           <p:nvPr>
-            <p:ph type="sldNum" idx="5" sz="quarter"/>
+            <p:ph type="sldNum" sz="quarter" idx="5"/>
           </p:nvPr>
         </p:nvSpPr>
         <p:spPr/>
@@ -543,7 +338,7 @@
 </file>
 
 <file path=ppt/notesSlides/notesSlide10.xml><?xml version="1.0" encoding="utf-8"?>
-<p:notes xmlns:a="http://schemas.openxmlformats.org/drawingml/2006/main" xmlns:p="http://schemas.openxmlformats.org/presentationml/2006/main" xmlns:r="http://schemas.openxmlformats.org/officeDocument/2006/relationships">
+<p:notes xmlns:a="http://schemas.openxmlformats.org/drawingml/2006/main" xmlns:r="http://schemas.openxmlformats.org/officeDocument/2006/relationships" xmlns:p="http://schemas.openxmlformats.org/presentationml/2006/main">
   <p:cSld>
     <p:spTree>
       <p:nvGrpSpPr>
@@ -563,7 +358,7 @@
         <p:nvSpPr>
           <p:cNvPr id="2" name="Slide Image Placeholder 1"/>
           <p:cNvSpPr>
-            <a:spLocks noGrp="1"/>
+            <a:spLocks noGrp="1" noRot="1" noChangeAspect="1"/>
           </p:cNvSpPr>
           <p:nvPr>
             <p:ph type="sldImg" idx="2"/>
@@ -578,7 +373,7 @@
             <a:spLocks noGrp="1"/>
           </p:cNvSpPr>
           <p:nvPr>
-            <p:ph type="body" idx="3" sz="quarter"/>
+            <p:ph type="body" sz="quarter" idx="3"/>
           </p:nvPr>
         </p:nvSpPr>
         <p:spPr/>
@@ -599,7 +394,7 @@
             <a:spLocks noGrp="1"/>
           </p:cNvSpPr>
           <p:nvPr>
-            <p:ph type="sldNum" idx="5" sz="quarter"/>
+            <p:ph type="sldNum" sz="quarter" idx="5"/>
           </p:nvPr>
         </p:nvSpPr>
         <p:spPr/>
@@ -613,7 +408,7 @@
 </file>
 
 <file path=ppt/notesSlides/notesSlide11.xml><?xml version="1.0" encoding="utf-8"?>
-<p:notes xmlns:a="http://schemas.openxmlformats.org/drawingml/2006/main" xmlns:p="http://schemas.openxmlformats.org/presentationml/2006/main" xmlns:r="http://schemas.openxmlformats.org/officeDocument/2006/relationships">
+<p:notes xmlns:a="http://schemas.openxmlformats.org/drawingml/2006/main" xmlns:r="http://schemas.openxmlformats.org/officeDocument/2006/relationships" xmlns:p="http://schemas.openxmlformats.org/presentationml/2006/main">
   <p:cSld>
     <p:spTree>
       <p:nvGrpSpPr>
@@ -633,7 +428,7 @@
         <p:nvSpPr>
           <p:cNvPr id="2" name="Slide Image Placeholder 1"/>
           <p:cNvSpPr>
-            <a:spLocks noGrp="1"/>
+            <a:spLocks noGrp="1" noRot="1" noChangeAspect="1"/>
           </p:cNvSpPr>
           <p:nvPr>
             <p:ph type="sldImg" idx="2"/>
@@ -648,7 +443,7 @@
             <a:spLocks noGrp="1"/>
           </p:cNvSpPr>
           <p:nvPr>
-            <p:ph type="body" idx="3" sz="quarter"/>
+            <p:ph type="body" sz="quarter" idx="3"/>
           </p:nvPr>
         </p:nvSpPr>
         <p:spPr/>
@@ -669,7 +464,7 @@
             <a:spLocks noGrp="1"/>
           </p:cNvSpPr>
           <p:nvPr>
-            <p:ph type="sldNum" idx="5" sz="quarter"/>
+            <p:ph type="sldNum" sz="quarter" idx="5"/>
           </p:nvPr>
         </p:nvSpPr>
         <p:spPr/>
@@ -683,7 +478,7 @@
 </file>
 
 <file path=ppt/notesSlides/notesSlide12.xml><?xml version="1.0" encoding="utf-8"?>
-<p:notes xmlns:a="http://schemas.openxmlformats.org/drawingml/2006/main" xmlns:p="http://schemas.openxmlformats.org/presentationml/2006/main" xmlns:r="http://schemas.openxmlformats.org/officeDocument/2006/relationships">
+<p:notes xmlns:a="http://schemas.openxmlformats.org/drawingml/2006/main" xmlns:r="http://schemas.openxmlformats.org/officeDocument/2006/relationships" xmlns:p="http://schemas.openxmlformats.org/presentationml/2006/main">
   <p:cSld>
     <p:spTree>
       <p:nvGrpSpPr>
@@ -703,7 +498,7 @@
         <p:nvSpPr>
           <p:cNvPr id="2" name="Slide Image Placeholder 1"/>
           <p:cNvSpPr>
-            <a:spLocks noGrp="1"/>
+            <a:spLocks noGrp="1" noRot="1" noChangeAspect="1"/>
           </p:cNvSpPr>
           <p:nvPr>
             <p:ph type="sldImg" idx="2"/>
@@ -718,7 +513,7 @@
             <a:spLocks noGrp="1"/>
           </p:cNvSpPr>
           <p:nvPr>
-            <p:ph type="body" idx="3" sz="quarter"/>
+            <p:ph type="body" sz="quarter" idx="3"/>
           </p:nvPr>
         </p:nvSpPr>
         <p:spPr/>
@@ -739,7 +534,7 @@
             <a:spLocks noGrp="1"/>
           </p:cNvSpPr>
           <p:nvPr>
-            <p:ph type="sldNum" idx="5" sz="quarter"/>
+            <p:ph type="sldNum" sz="quarter" idx="5"/>
           </p:nvPr>
         </p:nvSpPr>
         <p:spPr/>
@@ -753,7 +548,7 @@
 </file>
 
 <file path=ppt/notesSlides/notesSlide13.xml><?xml version="1.0" encoding="utf-8"?>
-<p:notes xmlns:a="http://schemas.openxmlformats.org/drawingml/2006/main" xmlns:p="http://schemas.openxmlformats.org/presentationml/2006/main" xmlns:r="http://schemas.openxmlformats.org/officeDocument/2006/relationships">
+<p:notes xmlns:a="http://schemas.openxmlformats.org/drawingml/2006/main" xmlns:r="http://schemas.openxmlformats.org/officeDocument/2006/relationships" xmlns:p="http://schemas.openxmlformats.org/presentationml/2006/main">
   <p:cSld>
     <p:spTree>
       <p:nvGrpSpPr>
@@ -773,7 +568,7 @@
         <p:nvSpPr>
           <p:cNvPr id="2" name="Slide Image Placeholder 1"/>
           <p:cNvSpPr>
-            <a:spLocks noGrp="1"/>
+            <a:spLocks noGrp="1" noRot="1" noChangeAspect="1"/>
           </p:cNvSpPr>
           <p:nvPr>
             <p:ph type="sldImg" idx="2"/>
@@ -788,7 +583,7 @@
             <a:spLocks noGrp="1"/>
           </p:cNvSpPr>
           <p:nvPr>
-            <p:ph type="body" idx="3" sz="quarter"/>
+            <p:ph type="body" sz="quarter" idx="3"/>
           </p:nvPr>
         </p:nvSpPr>
         <p:spPr/>
@@ -809,7 +604,7 @@
             <a:spLocks noGrp="1"/>
           </p:cNvSpPr>
           <p:nvPr>
-            <p:ph type="sldNum" idx="5" sz="quarter"/>
+            <p:ph type="sldNum" sz="quarter" idx="5"/>
           </p:nvPr>
         </p:nvSpPr>
         <p:spPr/>
@@ -823,7 +618,7 @@
 </file>
 
 <file path=ppt/notesSlides/notesSlide14.xml><?xml version="1.0" encoding="utf-8"?>
-<p:notes xmlns:a="http://schemas.openxmlformats.org/drawingml/2006/main" xmlns:p="http://schemas.openxmlformats.org/presentationml/2006/main" xmlns:r="http://schemas.openxmlformats.org/officeDocument/2006/relationships">
+<p:notes xmlns:a="http://schemas.openxmlformats.org/drawingml/2006/main" xmlns:r="http://schemas.openxmlformats.org/officeDocument/2006/relationships" xmlns:p="http://schemas.openxmlformats.org/presentationml/2006/main">
   <p:cSld>
     <p:spTree>
       <p:nvGrpSpPr>
@@ -843,7 +638,7 @@
         <p:nvSpPr>
           <p:cNvPr id="2" name="Slide Image Placeholder 1"/>
           <p:cNvSpPr>
-            <a:spLocks noGrp="1"/>
+            <a:spLocks noGrp="1" noRot="1" noChangeAspect="1"/>
           </p:cNvSpPr>
           <p:nvPr>
             <p:ph type="sldImg" idx="2"/>
@@ -858,7 +653,7 @@
             <a:spLocks noGrp="1"/>
           </p:cNvSpPr>
           <p:nvPr>
-            <p:ph type="body" idx="3" sz="quarter"/>
+            <p:ph type="body" sz="quarter" idx="3"/>
           </p:nvPr>
         </p:nvSpPr>
         <p:spPr/>
@@ -879,7 +674,7 @@
             <a:spLocks noGrp="1"/>
           </p:cNvSpPr>
           <p:nvPr>
-            <p:ph type="sldNum" idx="5" sz="quarter"/>
+            <p:ph type="sldNum" sz="quarter" idx="5"/>
           </p:nvPr>
         </p:nvSpPr>
         <p:spPr/>
@@ -893,7 +688,7 @@
 </file>
 
 <file path=ppt/notesSlides/notesSlide15.xml><?xml version="1.0" encoding="utf-8"?>
-<p:notes xmlns:a="http://schemas.openxmlformats.org/drawingml/2006/main" xmlns:p="http://schemas.openxmlformats.org/presentationml/2006/main" xmlns:r="http://schemas.openxmlformats.org/officeDocument/2006/relationships">
+<p:notes xmlns:a="http://schemas.openxmlformats.org/drawingml/2006/main" xmlns:r="http://schemas.openxmlformats.org/officeDocument/2006/relationships" xmlns:p="http://schemas.openxmlformats.org/presentationml/2006/main">
   <p:cSld>
     <p:spTree>
       <p:nvGrpSpPr>
@@ -913,7 +708,7 @@
         <p:nvSpPr>
           <p:cNvPr id="2" name="Slide Image Placeholder 1"/>
           <p:cNvSpPr>
-            <a:spLocks noGrp="1"/>
+            <a:spLocks noGrp="1" noRot="1" noChangeAspect="1"/>
           </p:cNvSpPr>
           <p:nvPr>
             <p:ph type="sldImg" idx="2"/>
@@ -928,7 +723,7 @@
             <a:spLocks noGrp="1"/>
           </p:cNvSpPr>
           <p:nvPr>
-            <p:ph type="body" idx="3" sz="quarter"/>
+            <p:ph type="body" sz="quarter" idx="3"/>
           </p:nvPr>
         </p:nvSpPr>
         <p:spPr/>
@@ -949,7 +744,7 @@
             <a:spLocks noGrp="1"/>
           </p:cNvSpPr>
           <p:nvPr>
-            <p:ph type="sldNum" idx="5" sz="quarter"/>
+            <p:ph type="sldNum" sz="quarter" idx="5"/>
           </p:nvPr>
         </p:nvSpPr>
         <p:spPr/>
@@ -963,7 +758,7 @@
 </file>
 
 <file path=ppt/notesSlides/notesSlide16.xml><?xml version="1.0" encoding="utf-8"?>
-<p:notes xmlns:a="http://schemas.openxmlformats.org/drawingml/2006/main" xmlns:p="http://schemas.openxmlformats.org/presentationml/2006/main" xmlns:r="http://schemas.openxmlformats.org/officeDocument/2006/relationships">
+<p:notes xmlns:a="http://schemas.openxmlformats.org/drawingml/2006/main" xmlns:r="http://schemas.openxmlformats.org/officeDocument/2006/relationships" xmlns:p="http://schemas.openxmlformats.org/presentationml/2006/main">
   <p:cSld>
     <p:spTree>
       <p:nvGrpSpPr>
@@ -983,7 +778,7 @@
         <p:nvSpPr>
           <p:cNvPr id="2" name="Slide Image Placeholder 1"/>
           <p:cNvSpPr>
-            <a:spLocks noGrp="1"/>
+            <a:spLocks noGrp="1" noRot="1" noChangeAspect="1"/>
           </p:cNvSpPr>
           <p:nvPr>
             <p:ph type="sldImg" idx="2"/>
@@ -998,7 +793,7 @@
             <a:spLocks noGrp="1"/>
           </p:cNvSpPr>
           <p:nvPr>
-            <p:ph type="body" idx="3" sz="quarter"/>
+            <p:ph type="body" sz="quarter" idx="3"/>
           </p:nvPr>
         </p:nvSpPr>
         <p:spPr/>
@@ -1019,7 +814,7 @@
             <a:spLocks noGrp="1"/>
           </p:cNvSpPr>
           <p:nvPr>
-            <p:ph type="sldNum" idx="5" sz="quarter"/>
+            <p:ph type="sldNum" sz="quarter" idx="5"/>
           </p:nvPr>
         </p:nvSpPr>
         <p:spPr/>
@@ -1033,7 +828,7 @@
 </file>
 
 <file path=ppt/notesSlides/notesSlide2.xml><?xml version="1.0" encoding="utf-8"?>
-<p:notes xmlns:a="http://schemas.openxmlformats.org/drawingml/2006/main" xmlns:p="http://schemas.openxmlformats.org/presentationml/2006/main" xmlns:r="http://schemas.openxmlformats.org/officeDocument/2006/relationships">
+<p:notes xmlns:a="http://schemas.openxmlformats.org/drawingml/2006/main" xmlns:r="http://schemas.openxmlformats.org/officeDocument/2006/relationships" xmlns:p="http://schemas.openxmlformats.org/presentationml/2006/main">
   <p:cSld>
     <p:spTree>
       <p:nvGrpSpPr>
@@ -1053,7 +848,7 @@
         <p:nvSpPr>
           <p:cNvPr id="2" name="Slide Image Placeholder 1"/>
           <p:cNvSpPr>
-            <a:spLocks noGrp="1"/>
+            <a:spLocks noGrp="1" noRot="1" noChangeAspect="1"/>
           </p:cNvSpPr>
           <p:nvPr>
             <p:ph type="sldImg" idx="2"/>
@@ -1068,7 +863,7 @@
             <a:spLocks noGrp="1"/>
           </p:cNvSpPr>
           <p:nvPr>
-            <p:ph type="body" idx="3" sz="quarter"/>
+            <p:ph type="body" sz="quarter" idx="3"/>
           </p:nvPr>
         </p:nvSpPr>
         <p:spPr/>
@@ -1089,7 +884,7 @@
             <a:spLocks noGrp="1"/>
           </p:cNvSpPr>
           <p:nvPr>
-            <p:ph type="sldNum" idx="5" sz="quarter"/>
+            <p:ph type="sldNum" sz="quarter" idx="5"/>
           </p:nvPr>
         </p:nvSpPr>
         <p:spPr/>
@@ -1103,7 +898,7 @@
 </file>
 
 <file path=ppt/notesSlides/notesSlide3.xml><?xml version="1.0" encoding="utf-8"?>
-<p:notes xmlns:a="http://schemas.openxmlformats.org/drawingml/2006/main" xmlns:p="http://schemas.openxmlformats.org/presentationml/2006/main" xmlns:r="http://schemas.openxmlformats.org/officeDocument/2006/relationships">
+<p:notes xmlns:a="http://schemas.openxmlformats.org/drawingml/2006/main" xmlns:r="http://schemas.openxmlformats.org/officeDocument/2006/relationships" xmlns:p="http://schemas.openxmlformats.org/presentationml/2006/main">
   <p:cSld>
     <p:spTree>
       <p:nvGrpSpPr>
@@ -1123,7 +918,7 @@
         <p:nvSpPr>
           <p:cNvPr id="2" name="Slide Image Placeholder 1"/>
           <p:cNvSpPr>
-            <a:spLocks noGrp="1"/>
+            <a:spLocks noGrp="1" noRot="1" noChangeAspect="1"/>
           </p:cNvSpPr>
           <p:nvPr>
             <p:ph type="sldImg" idx="2"/>
@@ -1138,7 +933,7 @@
             <a:spLocks noGrp="1"/>
           </p:cNvSpPr>
           <p:nvPr>
-            <p:ph type="body" idx="3" sz="quarter"/>
+            <p:ph type="body" sz="quarter" idx="3"/>
           </p:nvPr>
         </p:nvSpPr>
         <p:spPr/>
@@ -1159,7 +954,7 @@
             <a:spLocks noGrp="1"/>
           </p:cNvSpPr>
           <p:nvPr>
-            <p:ph type="sldNum" idx="5" sz="quarter"/>
+            <p:ph type="sldNum" sz="quarter" idx="5"/>
           </p:nvPr>
         </p:nvSpPr>
         <p:spPr/>
@@ -1173,7 +968,7 @@
 </file>
 
 <file path=ppt/notesSlides/notesSlide4.xml><?xml version="1.0" encoding="utf-8"?>
-<p:notes xmlns:a="http://schemas.openxmlformats.org/drawingml/2006/main" xmlns:p="http://schemas.openxmlformats.org/presentationml/2006/main" xmlns:r="http://schemas.openxmlformats.org/officeDocument/2006/relationships">
+<p:notes xmlns:a="http://schemas.openxmlformats.org/drawingml/2006/main" xmlns:r="http://schemas.openxmlformats.org/officeDocument/2006/relationships" xmlns:p="http://schemas.openxmlformats.org/presentationml/2006/main">
   <p:cSld>
     <p:spTree>
       <p:nvGrpSpPr>
@@ -1193,7 +988,7 @@
         <p:nvSpPr>
           <p:cNvPr id="2" name="Slide Image Placeholder 1"/>
           <p:cNvSpPr>
-            <a:spLocks noGrp="1"/>
+            <a:spLocks noGrp="1" noRot="1" noChangeAspect="1"/>
           </p:cNvSpPr>
           <p:nvPr>
             <p:ph type="sldImg" idx="2"/>
@@ -1208,7 +1003,7 @@
             <a:spLocks noGrp="1"/>
           </p:cNvSpPr>
           <p:nvPr>
-            <p:ph type="body" idx="3" sz="quarter"/>
+            <p:ph type="body" sz="quarter" idx="3"/>
           </p:nvPr>
         </p:nvSpPr>
         <p:spPr/>
@@ -1229,7 +1024,7 @@
             <a:spLocks noGrp="1"/>
           </p:cNvSpPr>
           <p:nvPr>
-            <p:ph type="sldNum" idx="5" sz="quarter"/>
+            <p:ph type="sldNum" sz="quarter" idx="5"/>
           </p:nvPr>
         </p:nvSpPr>
         <p:spPr/>
@@ -1243,7 +1038,7 @@
 </file>
 
 <file path=ppt/notesSlides/notesSlide5.xml><?xml version="1.0" encoding="utf-8"?>
-<p:notes xmlns:a="http://schemas.openxmlformats.org/drawingml/2006/main" xmlns:p="http://schemas.openxmlformats.org/presentationml/2006/main" xmlns:r="http://schemas.openxmlformats.org/officeDocument/2006/relationships">
+<p:notes xmlns:a="http://schemas.openxmlformats.org/drawingml/2006/main" xmlns:r="http://schemas.openxmlformats.org/officeDocument/2006/relationships" xmlns:p="http://schemas.openxmlformats.org/presentationml/2006/main">
   <p:cSld>
     <p:spTree>
       <p:nvGrpSpPr>
@@ -1263,7 +1058,7 @@
         <p:nvSpPr>
           <p:cNvPr id="2" name="Slide Image Placeholder 1"/>
           <p:cNvSpPr>
-            <a:spLocks noGrp="1"/>
+            <a:spLocks noGrp="1" noRot="1" noChangeAspect="1"/>
           </p:cNvSpPr>
           <p:nvPr>
             <p:ph type="sldImg" idx="2"/>
@@ -1278,7 +1073,7 @@
             <a:spLocks noGrp="1"/>
           </p:cNvSpPr>
           <p:nvPr>
-            <p:ph type="body" idx="3" sz="quarter"/>
+            <p:ph type="body" sz="quarter" idx="3"/>
           </p:nvPr>
         </p:nvSpPr>
         <p:spPr/>
@@ -1299,7 +1094,7 @@
             <a:spLocks noGrp="1"/>
           </p:cNvSpPr>
           <p:nvPr>
-            <p:ph type="sldNum" idx="5" sz="quarter"/>
+            <p:ph type="sldNum" sz="quarter" idx="5"/>
           </p:nvPr>
         </p:nvSpPr>
         <p:spPr/>
@@ -1313,7 +1108,7 @@
 </file>
 
 <file path=ppt/notesSlides/notesSlide6.xml><?xml version="1.0" encoding="utf-8"?>
-<p:notes xmlns:a="http://schemas.openxmlformats.org/drawingml/2006/main" xmlns:p="http://schemas.openxmlformats.org/presentationml/2006/main" xmlns:r="http://schemas.openxmlformats.org/officeDocument/2006/relationships">
+<p:notes xmlns:a="http://schemas.openxmlformats.org/drawingml/2006/main" xmlns:r="http://schemas.openxmlformats.org/officeDocument/2006/relationships" xmlns:p="http://schemas.openxmlformats.org/presentationml/2006/main">
   <p:cSld>
     <p:spTree>
       <p:nvGrpSpPr>
@@ -1333,7 +1128,7 @@
         <p:nvSpPr>
           <p:cNvPr id="2" name="Slide Image Placeholder 1"/>
           <p:cNvSpPr>
-            <a:spLocks noGrp="1"/>
+            <a:spLocks noGrp="1" noRot="1" noChangeAspect="1"/>
           </p:cNvSpPr>
           <p:nvPr>
             <p:ph type="sldImg" idx="2"/>
@@ -1348,7 +1143,7 @@
             <a:spLocks noGrp="1"/>
           </p:cNvSpPr>
           <p:nvPr>
-            <p:ph type="body" idx="3" sz="quarter"/>
+            <p:ph type="body" sz="quarter" idx="3"/>
           </p:nvPr>
         </p:nvSpPr>
         <p:spPr/>
@@ -1369,7 +1164,7 @@
             <a:spLocks noGrp="1"/>
           </p:cNvSpPr>
           <p:nvPr>
-            <p:ph type="sldNum" idx="5" sz="quarter"/>
+            <p:ph type="sldNum" sz="quarter" idx="5"/>
           </p:nvPr>
         </p:nvSpPr>
         <p:spPr/>
@@ -1383,7 +1178,7 @@
 </file>
 
 <file path=ppt/notesSlides/notesSlide7.xml><?xml version="1.0" encoding="utf-8"?>
-<p:notes xmlns:a="http://schemas.openxmlformats.org/drawingml/2006/main" xmlns:p="http://schemas.openxmlformats.org/presentationml/2006/main" xmlns:r="http://schemas.openxmlformats.org/officeDocument/2006/relationships">
+<p:notes xmlns:a="http://schemas.openxmlformats.org/drawingml/2006/main" xmlns:r="http://schemas.openxmlformats.org/officeDocument/2006/relationships" xmlns:p="http://schemas.openxmlformats.org/presentationml/2006/main">
   <p:cSld>
     <p:spTree>
       <p:nvGrpSpPr>
@@ -1403,7 +1198,7 @@
         <p:nvSpPr>
           <p:cNvPr id="2" name="Slide Image Placeholder 1"/>
           <p:cNvSpPr>
-            <a:spLocks noGrp="1"/>
+            <a:spLocks noGrp="1" noRot="1" noChangeAspect="1"/>
           </p:cNvSpPr>
           <p:nvPr>
             <p:ph type="sldImg" idx="2"/>
@@ -1418,7 +1213,7 @@
             <a:spLocks noGrp="1"/>
           </p:cNvSpPr>
           <p:nvPr>
-            <p:ph type="body" idx="3" sz="quarter"/>
+            <p:ph type="body" sz="quarter" idx="3"/>
           </p:nvPr>
         </p:nvSpPr>
         <p:spPr/>
@@ -1439,7 +1234,7 @@
             <a:spLocks noGrp="1"/>
           </p:cNvSpPr>
           <p:nvPr>
-            <p:ph type="sldNum" idx="5" sz="quarter"/>
+            <p:ph type="sldNum" sz="quarter" idx="5"/>
           </p:nvPr>
         </p:nvSpPr>
         <p:spPr/>
@@ -1453,7 +1248,7 @@
 </file>
 
 <file path=ppt/notesSlides/notesSlide8.xml><?xml version="1.0" encoding="utf-8"?>
-<p:notes xmlns:a="http://schemas.openxmlformats.org/drawingml/2006/main" xmlns:p="http://schemas.openxmlformats.org/presentationml/2006/main" xmlns:r="http://schemas.openxmlformats.org/officeDocument/2006/relationships">
+<p:notes xmlns:a="http://schemas.openxmlformats.org/drawingml/2006/main" xmlns:r="http://schemas.openxmlformats.org/officeDocument/2006/relationships" xmlns:p="http://schemas.openxmlformats.org/presentationml/2006/main">
   <p:cSld>
     <p:spTree>
       <p:nvGrpSpPr>
@@ -1473,7 +1268,7 @@
         <p:nvSpPr>
           <p:cNvPr id="2" name="Slide Image Placeholder 1"/>
           <p:cNvSpPr>
-            <a:spLocks noGrp="1"/>
+            <a:spLocks noGrp="1" noRot="1" noChangeAspect="1"/>
           </p:cNvSpPr>
           <p:nvPr>
             <p:ph type="sldImg" idx="2"/>
@@ -1488,7 +1283,7 @@
             <a:spLocks noGrp="1"/>
           </p:cNvSpPr>
           <p:nvPr>
-            <p:ph type="body" idx="3" sz="quarter"/>
+            <p:ph type="body" sz="quarter" idx="3"/>
           </p:nvPr>
         </p:nvSpPr>
         <p:spPr/>
@@ -1509,7 +1304,7 @@
             <a:spLocks noGrp="1"/>
           </p:cNvSpPr>
           <p:nvPr>
-            <p:ph type="sldNum" idx="5" sz="quarter"/>
+            <p:ph type="sldNum" sz="quarter" idx="5"/>
           </p:nvPr>
         </p:nvSpPr>
         <p:spPr/>
@@ -1523,7 +1318,7 @@
 </file>
 
 <file path=ppt/notesSlides/notesSlide9.xml><?xml version="1.0" encoding="utf-8"?>
-<p:notes xmlns:a="http://schemas.openxmlformats.org/drawingml/2006/main" xmlns:p="http://schemas.openxmlformats.org/presentationml/2006/main" xmlns:r="http://schemas.openxmlformats.org/officeDocument/2006/relationships">
+<p:notes xmlns:a="http://schemas.openxmlformats.org/drawingml/2006/main" xmlns:r="http://schemas.openxmlformats.org/officeDocument/2006/relationships" xmlns:p="http://schemas.openxmlformats.org/presentationml/2006/main">
   <p:cSld>
     <p:spTree>
       <p:nvGrpSpPr>
@@ -1543,7 +1338,7 @@
         <p:nvSpPr>
           <p:cNvPr id="2" name="Slide Image Placeholder 1"/>
           <p:cNvSpPr>
-            <a:spLocks noGrp="1"/>
+            <a:spLocks noGrp="1" noRot="1" noChangeAspect="1"/>
           </p:cNvSpPr>
           <p:nvPr>
             <p:ph type="sldImg" idx="2"/>
@@ -1558,7 +1353,7 @@
             <a:spLocks noGrp="1"/>
           </p:cNvSpPr>
           <p:nvPr>
-            <p:ph type="body" idx="3" sz="quarter"/>
+            <p:ph type="body" sz="quarter" idx="3"/>
           </p:nvPr>
         </p:nvSpPr>
         <p:spPr/>
@@ -1579,7 +1374,7 @@
             <a:spLocks noGrp="1"/>
           </p:cNvSpPr>
           <p:nvPr>
-            <p:ph type="sldNum" idx="5" sz="quarter"/>
+            <p:ph type="sldNum" sz="quarter" idx="5"/>
           </p:nvPr>
         </p:nvSpPr>
         <p:spPr/>
@@ -1630,10 +1425,9 @@
           <a:lstStyle/>
           <a:p>
             <a:r>
-              <a:rPr lang="en-US" smtClean="0"/>
+              <a:rPr lang="en-US"/>
               <a:t>Click to edit Master title style</a:t>
             </a:r>
-            <a:endParaRPr lang="en-US"/>
           </a:p>
         </p:txBody>
       </p:sp>
@@ -1749,10 +1543,9 @@
           </a:lstStyle>
           <a:p>
             <a:r>
-              <a:rPr lang="en-US" smtClean="0"/>
+              <a:rPr lang="en-US"/>
               <a:t>Click to edit Master subtitle style</a:t>
             </a:r>
-            <a:endParaRPr lang="en-US"/>
           </a:p>
         </p:txBody>
       </p:sp>
@@ -1773,7 +1566,7 @@
           <a:p>
             <a:fld id="{5BCAD085-E8A6-8845-BD4E-CB4CCA059FC4}" type="datetimeFigureOut">
               <a:rPr lang="en-US" smtClean="0"/>
-              <a:t>1/27/13</a:t>
+              <a:t>4/27/26</a:t>
             </a:fld>
             <a:endParaRPr lang="en-US"/>
           </a:p>
@@ -1867,10 +1660,9 @@
           <a:lstStyle/>
           <a:p>
             <a:r>
-              <a:rPr lang="en-US" smtClean="0"/>
+              <a:rPr lang="en-US"/>
               <a:t>Click to edit Master title style</a:t>
             </a:r>
-            <a:endParaRPr lang="en-US"/>
           </a:p>
         </p:txBody>
       </p:sp>
@@ -1891,38 +1683,37 @@
           <a:p>
             <a:pPr lvl="0"/>
             <a:r>
-              <a:rPr lang="en-US" smtClean="0"/>
+              <a:rPr lang="en-US"/>
               <a:t>Click to edit Master text styles</a:t>
             </a:r>
           </a:p>
           <a:p>
             <a:pPr lvl="1"/>
             <a:r>
-              <a:rPr lang="en-US" smtClean="0"/>
+              <a:rPr lang="en-US"/>
               <a:t>Second level</a:t>
             </a:r>
           </a:p>
           <a:p>
             <a:pPr lvl="2"/>
             <a:r>
-              <a:rPr lang="en-US" smtClean="0"/>
+              <a:rPr lang="en-US"/>
               <a:t>Third level</a:t>
             </a:r>
           </a:p>
           <a:p>
             <a:pPr lvl="3"/>
             <a:r>
-              <a:rPr lang="en-US" smtClean="0"/>
+              <a:rPr lang="en-US"/>
               <a:t>Fourth level</a:t>
             </a:r>
           </a:p>
           <a:p>
             <a:pPr lvl="4"/>
             <a:r>
-              <a:rPr lang="en-US" smtClean="0"/>
+              <a:rPr lang="en-US"/>
               <a:t>Fifth level</a:t>
             </a:r>
-            <a:endParaRPr lang="en-US"/>
           </a:p>
         </p:txBody>
       </p:sp>
@@ -1943,7 +1734,7 @@
           <a:p>
             <a:fld id="{5BCAD085-E8A6-8845-BD4E-CB4CCA059FC4}" type="datetimeFigureOut">
               <a:rPr lang="en-US" smtClean="0"/>
-              <a:t>1/27/13</a:t>
+              <a:t>4/27/26</a:t>
             </a:fld>
             <a:endParaRPr lang="en-US"/>
           </a:p>
@@ -2042,10 +1833,9 @@
           <a:lstStyle/>
           <a:p>
             <a:r>
-              <a:rPr lang="en-US" smtClean="0"/>
+              <a:rPr lang="en-US"/>
               <a:t>Click to edit Master title style</a:t>
             </a:r>
-            <a:endParaRPr lang="en-US"/>
           </a:p>
         </p:txBody>
       </p:sp>
@@ -2071,38 +1861,37 @@
           <a:p>
             <a:pPr lvl="0"/>
             <a:r>
-              <a:rPr lang="en-US" smtClean="0"/>
+              <a:rPr lang="en-US"/>
               <a:t>Click to edit Master text styles</a:t>
             </a:r>
           </a:p>
           <a:p>
             <a:pPr lvl="1"/>
             <a:r>
-              <a:rPr lang="en-US" smtClean="0"/>
+              <a:rPr lang="en-US"/>
               <a:t>Second level</a:t>
             </a:r>
           </a:p>
           <a:p>
             <a:pPr lvl="2"/>
             <a:r>
-              <a:rPr lang="en-US" smtClean="0"/>
+              <a:rPr lang="en-US"/>
               <a:t>Third level</a:t>
             </a:r>
           </a:p>
           <a:p>
             <a:pPr lvl="3"/>
             <a:r>
-              <a:rPr lang="en-US" smtClean="0"/>
+              <a:rPr lang="en-US"/>
               <a:t>Fourth level</a:t>
             </a:r>
           </a:p>
           <a:p>
             <a:pPr lvl="4"/>
             <a:r>
-              <a:rPr lang="en-US" smtClean="0"/>
+              <a:rPr lang="en-US"/>
               <a:t>Fifth level</a:t>
             </a:r>
-            <a:endParaRPr lang="en-US"/>
           </a:p>
         </p:txBody>
       </p:sp>
@@ -2123,7 +1912,7 @@
           <a:p>
             <a:fld id="{5BCAD085-E8A6-8845-BD4E-CB4CCA059FC4}" type="datetimeFigureOut">
               <a:rPr lang="en-US" smtClean="0"/>
-              <a:t>1/27/13</a:t>
+              <a:t>4/27/26</a:t>
             </a:fld>
             <a:endParaRPr lang="en-US"/>
           </a:p>
@@ -2217,10 +2006,9 @@
           <a:lstStyle/>
           <a:p>
             <a:r>
-              <a:rPr lang="en-US" smtClean="0"/>
+              <a:rPr lang="en-US"/>
               <a:t>Click to edit Master title style</a:t>
             </a:r>
-            <a:endParaRPr lang="en-US"/>
           </a:p>
         </p:txBody>
       </p:sp>
@@ -2241,38 +2029,37 @@
           <a:p>
             <a:pPr lvl="0"/>
             <a:r>
-              <a:rPr lang="en-US" smtClean="0"/>
+              <a:rPr lang="en-US"/>
               <a:t>Click to edit Master text styles</a:t>
             </a:r>
           </a:p>
           <a:p>
             <a:pPr lvl="1"/>
             <a:r>
-              <a:rPr lang="en-US" smtClean="0"/>
+              <a:rPr lang="en-US"/>
               <a:t>Second level</a:t>
             </a:r>
           </a:p>
           <a:p>
             <a:pPr lvl="2"/>
             <a:r>
-              <a:rPr lang="en-US" smtClean="0"/>
+              <a:rPr lang="en-US"/>
               <a:t>Third level</a:t>
             </a:r>
           </a:p>
           <a:p>
             <a:pPr lvl="3"/>
             <a:r>
-              <a:rPr lang="en-US" smtClean="0"/>
+              <a:rPr lang="en-US"/>
               <a:t>Fourth level</a:t>
             </a:r>
           </a:p>
           <a:p>
             <a:pPr lvl="4"/>
             <a:r>
-              <a:rPr lang="en-US" smtClean="0"/>
+              <a:rPr lang="en-US"/>
               <a:t>Fifth level</a:t>
             </a:r>
-            <a:endParaRPr lang="en-US"/>
           </a:p>
         </p:txBody>
       </p:sp>
@@ -2293,7 +2080,7 @@
           <a:p>
             <a:fld id="{5BCAD085-E8A6-8845-BD4E-CB4CCA059FC4}" type="datetimeFigureOut">
               <a:rPr lang="en-US" smtClean="0"/>
-              <a:t>1/27/13</a:t>
+              <a:t>4/27/26</a:t>
             </a:fld>
             <a:endParaRPr lang="en-US"/>
           </a:p>
@@ -2396,10 +2183,9 @@
           </a:lstStyle>
           <a:p>
             <a:r>
-              <a:rPr lang="en-US" smtClean="0"/>
+              <a:rPr lang="en-US"/>
               <a:t>Click to edit Master title style</a:t>
             </a:r>
-            <a:endParaRPr lang="en-US"/>
           </a:p>
         </p:txBody>
       </p:sp>
@@ -2516,7 +2302,7 @@
           <a:p>
             <a:pPr lvl="0"/>
             <a:r>
-              <a:rPr lang="en-US" smtClean="0"/>
+              <a:rPr lang="en-US"/>
               <a:t>Click to edit Master text styles</a:t>
             </a:r>
           </a:p>
@@ -2539,7 +2325,7 @@
           <a:p>
             <a:fld id="{5BCAD085-E8A6-8845-BD4E-CB4CCA059FC4}" type="datetimeFigureOut">
               <a:rPr lang="en-US" smtClean="0"/>
-              <a:t>1/27/13</a:t>
+              <a:t>4/27/26</a:t>
             </a:fld>
             <a:endParaRPr lang="en-US"/>
           </a:p>
@@ -2633,10 +2419,9 @@
           <a:lstStyle/>
           <a:p>
             <a:r>
-              <a:rPr lang="en-US" smtClean="0"/>
+              <a:rPr lang="en-US"/>
               <a:t>Click to edit Master title style</a:t>
             </a:r>
-            <a:endParaRPr lang="en-US"/>
           </a:p>
         </p:txBody>
       </p:sp>
@@ -2690,38 +2475,37 @@
           <a:p>
             <a:pPr lvl="0"/>
             <a:r>
-              <a:rPr lang="en-US" smtClean="0"/>
+              <a:rPr lang="en-US"/>
               <a:t>Click to edit Master text styles</a:t>
             </a:r>
           </a:p>
           <a:p>
             <a:pPr lvl="1"/>
             <a:r>
-              <a:rPr lang="en-US" smtClean="0"/>
+              <a:rPr lang="en-US"/>
               <a:t>Second level</a:t>
             </a:r>
           </a:p>
           <a:p>
             <a:pPr lvl="2"/>
             <a:r>
-              <a:rPr lang="en-US" smtClean="0"/>
+              <a:rPr lang="en-US"/>
               <a:t>Third level</a:t>
             </a:r>
           </a:p>
           <a:p>
             <a:pPr lvl="3"/>
             <a:r>
-              <a:rPr lang="en-US" smtClean="0"/>
+              <a:rPr lang="en-US"/>
               <a:t>Fourth level</a:t>
             </a:r>
           </a:p>
           <a:p>
             <a:pPr lvl="4"/>
             <a:r>
-              <a:rPr lang="en-US" smtClean="0"/>
+              <a:rPr lang="en-US"/>
               <a:t>Fifth level</a:t>
             </a:r>
-            <a:endParaRPr lang="en-US"/>
           </a:p>
         </p:txBody>
       </p:sp>
@@ -2775,38 +2559,37 @@
           <a:p>
             <a:pPr lvl="0"/>
             <a:r>
-              <a:rPr lang="en-US" smtClean="0"/>
+              <a:rPr lang="en-US"/>
               <a:t>Click to edit Master text styles</a:t>
             </a:r>
           </a:p>
           <a:p>
             <a:pPr lvl="1"/>
             <a:r>
-              <a:rPr lang="en-US" smtClean="0"/>
+              <a:rPr lang="en-US"/>
               <a:t>Second level</a:t>
             </a:r>
           </a:p>
           <a:p>
             <a:pPr lvl="2"/>
             <a:r>
-              <a:rPr lang="en-US" smtClean="0"/>
+              <a:rPr lang="en-US"/>
               <a:t>Third level</a:t>
             </a:r>
           </a:p>
           <a:p>
             <a:pPr lvl="3"/>
             <a:r>
-              <a:rPr lang="en-US" smtClean="0"/>
+              <a:rPr lang="en-US"/>
               <a:t>Fourth level</a:t>
             </a:r>
           </a:p>
           <a:p>
             <a:pPr lvl="4"/>
             <a:r>
-              <a:rPr lang="en-US" smtClean="0"/>
+              <a:rPr lang="en-US"/>
               <a:t>Fifth level</a:t>
             </a:r>
-            <a:endParaRPr lang="en-US"/>
           </a:p>
         </p:txBody>
       </p:sp>
@@ -2827,7 +2610,7 @@
           <a:p>
             <a:fld id="{5BCAD085-E8A6-8845-BD4E-CB4CCA059FC4}" type="datetimeFigureOut">
               <a:rPr lang="en-US" smtClean="0"/>
-              <a:t>1/27/13</a:t>
+              <a:t>4/27/26</a:t>
             </a:fld>
             <a:endParaRPr lang="en-US"/>
           </a:p>
@@ -2925,10 +2708,9 @@
           </a:lstStyle>
           <a:p>
             <a:r>
-              <a:rPr lang="en-US" smtClean="0"/>
+              <a:rPr lang="en-US"/>
               <a:t>Click to edit Master title style</a:t>
             </a:r>
-            <a:endParaRPr lang="en-US"/>
           </a:p>
         </p:txBody>
       </p:sp>
@@ -2991,7 +2773,7 @@
           <a:p>
             <a:pPr lvl="0"/>
             <a:r>
-              <a:rPr lang="en-US" smtClean="0"/>
+              <a:rPr lang="en-US"/>
               <a:t>Click to edit Master text styles</a:t>
             </a:r>
           </a:p>
@@ -3047,38 +2829,37 @@
           <a:p>
             <a:pPr lvl="0"/>
             <a:r>
-              <a:rPr lang="en-US" smtClean="0"/>
+              <a:rPr lang="en-US"/>
               <a:t>Click to edit Master text styles</a:t>
             </a:r>
           </a:p>
           <a:p>
             <a:pPr lvl="1"/>
             <a:r>
-              <a:rPr lang="en-US" smtClean="0"/>
+              <a:rPr lang="en-US"/>
               <a:t>Second level</a:t>
             </a:r>
           </a:p>
           <a:p>
             <a:pPr lvl="2"/>
             <a:r>
-              <a:rPr lang="en-US" smtClean="0"/>
+              <a:rPr lang="en-US"/>
               <a:t>Third level</a:t>
             </a:r>
           </a:p>
           <a:p>
             <a:pPr lvl="3"/>
             <a:r>
-              <a:rPr lang="en-US" smtClean="0"/>
+              <a:rPr lang="en-US"/>
               <a:t>Fourth level</a:t>
             </a:r>
           </a:p>
           <a:p>
             <a:pPr lvl="4"/>
             <a:r>
-              <a:rPr lang="en-US" smtClean="0"/>
+              <a:rPr lang="en-US"/>
               <a:t>Fifth level</a:t>
             </a:r>
-            <a:endParaRPr lang="en-US"/>
           </a:p>
         </p:txBody>
       </p:sp>
@@ -3141,7 +2922,7 @@
           <a:p>
             <a:pPr lvl="0"/>
             <a:r>
-              <a:rPr lang="en-US" smtClean="0"/>
+              <a:rPr lang="en-US"/>
               <a:t>Click to edit Master text styles</a:t>
             </a:r>
           </a:p>
@@ -3197,38 +2978,37 @@
           <a:p>
             <a:pPr lvl="0"/>
             <a:r>
-              <a:rPr lang="en-US" smtClean="0"/>
+              <a:rPr lang="en-US"/>
               <a:t>Click to edit Master text styles</a:t>
             </a:r>
           </a:p>
           <a:p>
             <a:pPr lvl="1"/>
             <a:r>
-              <a:rPr lang="en-US" smtClean="0"/>
+              <a:rPr lang="en-US"/>
               <a:t>Second level</a:t>
             </a:r>
           </a:p>
           <a:p>
             <a:pPr lvl="2"/>
             <a:r>
-              <a:rPr lang="en-US" smtClean="0"/>
+              <a:rPr lang="en-US"/>
               <a:t>Third level</a:t>
             </a:r>
           </a:p>
           <a:p>
             <a:pPr lvl="3"/>
             <a:r>
-              <a:rPr lang="en-US" smtClean="0"/>
+              <a:rPr lang="en-US"/>
               <a:t>Fourth level</a:t>
             </a:r>
           </a:p>
           <a:p>
             <a:pPr lvl="4"/>
             <a:r>
-              <a:rPr lang="en-US" smtClean="0"/>
+              <a:rPr lang="en-US"/>
               <a:t>Fifth level</a:t>
             </a:r>
-            <a:endParaRPr lang="en-US"/>
           </a:p>
         </p:txBody>
       </p:sp>
@@ -3249,7 +3029,7 @@
           <a:p>
             <a:fld id="{5BCAD085-E8A6-8845-BD4E-CB4CCA059FC4}" type="datetimeFigureOut">
               <a:rPr lang="en-US" smtClean="0"/>
-              <a:t>1/27/13</a:t>
+              <a:t>4/27/26</a:t>
             </a:fld>
             <a:endParaRPr lang="en-US"/>
           </a:p>
@@ -3343,10 +3123,9 @@
           <a:lstStyle/>
           <a:p>
             <a:r>
-              <a:rPr lang="en-US" smtClean="0"/>
+              <a:rPr lang="en-US"/>
               <a:t>Click to edit Master title style</a:t>
             </a:r>
-            <a:endParaRPr lang="en-US"/>
           </a:p>
         </p:txBody>
       </p:sp>
@@ -3367,7 +3146,7 @@
           <a:p>
             <a:fld id="{5BCAD085-E8A6-8845-BD4E-CB4CCA059FC4}" type="datetimeFigureOut">
               <a:rPr lang="en-US" smtClean="0"/>
-              <a:t>1/27/13</a:t>
+              <a:t>4/27/26</a:t>
             </a:fld>
             <a:endParaRPr lang="en-US"/>
           </a:p>
@@ -3462,7 +3241,7 @@
           <a:p>
             <a:fld id="{5BCAD085-E8A6-8845-BD4E-CB4CCA059FC4}" type="datetimeFigureOut">
               <a:rPr lang="en-US" smtClean="0"/>
-              <a:t>1/27/13</a:t>
+              <a:t>4/27/26</a:t>
             </a:fld>
             <a:endParaRPr lang="en-US"/>
           </a:p>
@@ -3565,10 +3344,9 @@
           </a:lstStyle>
           <a:p>
             <a:r>
-              <a:rPr lang="en-US" smtClean="0"/>
+              <a:rPr lang="en-US"/>
               <a:t>Click to edit Master title style</a:t>
             </a:r>
-            <a:endParaRPr lang="en-US"/>
           </a:p>
         </p:txBody>
       </p:sp>
@@ -3622,38 +3400,37 @@
           <a:p>
             <a:pPr lvl="0"/>
             <a:r>
-              <a:rPr lang="en-US" smtClean="0"/>
+              <a:rPr lang="en-US"/>
               <a:t>Click to edit Master text styles</a:t>
             </a:r>
           </a:p>
           <a:p>
             <a:pPr lvl="1"/>
             <a:r>
-              <a:rPr lang="en-US" smtClean="0"/>
+              <a:rPr lang="en-US"/>
               <a:t>Second level</a:t>
             </a:r>
           </a:p>
           <a:p>
             <a:pPr lvl="2"/>
             <a:r>
-              <a:rPr lang="en-US" smtClean="0"/>
+              <a:rPr lang="en-US"/>
               <a:t>Third level</a:t>
             </a:r>
           </a:p>
           <a:p>
             <a:pPr lvl="3"/>
             <a:r>
-              <a:rPr lang="en-US" smtClean="0"/>
+              <a:rPr lang="en-US"/>
               <a:t>Fourth level</a:t>
             </a:r>
           </a:p>
           <a:p>
             <a:pPr lvl="4"/>
             <a:r>
-              <a:rPr lang="en-US" smtClean="0"/>
+              <a:rPr lang="en-US"/>
               <a:t>Fifth level</a:t>
             </a:r>
-            <a:endParaRPr lang="en-US"/>
           </a:p>
         </p:txBody>
       </p:sp>
@@ -3716,7 +3493,7 @@
           <a:p>
             <a:pPr lvl="0"/>
             <a:r>
-              <a:rPr lang="en-US" smtClean="0"/>
+              <a:rPr lang="en-US"/>
               <a:t>Click to edit Master text styles</a:t>
             </a:r>
           </a:p>
@@ -3739,7 +3516,7 @@
           <a:p>
             <a:fld id="{5BCAD085-E8A6-8845-BD4E-CB4CCA059FC4}" type="datetimeFigureOut">
               <a:rPr lang="en-US" smtClean="0"/>
-              <a:t>1/27/13</a:t>
+              <a:t>4/27/26</a:t>
             </a:fld>
             <a:endParaRPr lang="en-US"/>
           </a:p>
@@ -3842,10 +3619,9 @@
           </a:lstStyle>
           <a:p>
             <a:r>
-              <a:rPr lang="en-US" smtClean="0"/>
+              <a:rPr lang="en-US"/>
               <a:t>Click to edit Master title style</a:t>
             </a:r>
-            <a:endParaRPr lang="en-US"/>
           </a:p>
         </p:txBody>
       </p:sp>
@@ -3969,7 +3745,7 @@
           <a:p>
             <a:pPr lvl="0"/>
             <a:r>
-              <a:rPr lang="en-US" smtClean="0"/>
+              <a:rPr lang="en-US"/>
               <a:t>Click to edit Master text styles</a:t>
             </a:r>
           </a:p>
@@ -3992,7 +3768,7 @@
           <a:p>
             <a:fld id="{5BCAD085-E8A6-8845-BD4E-CB4CCA059FC4}" type="datetimeFigureOut">
               <a:rPr lang="en-US" smtClean="0"/>
-              <a:t>1/27/13</a:t>
+              <a:t>4/27/26</a:t>
             </a:fld>
             <a:endParaRPr lang="en-US"/>
           </a:p>
@@ -4101,10 +3877,9 @@
           <a:lstStyle/>
           <a:p>
             <a:r>
-              <a:rPr lang="en-US" smtClean="0"/>
+              <a:rPr lang="en-US"/>
               <a:t>Click to edit Master title style</a:t>
             </a:r>
-            <a:endParaRPr lang="en-US"/>
           </a:p>
         </p:txBody>
       </p:sp>
@@ -4135,38 +3910,37 @@
           <a:p>
             <a:pPr lvl="0"/>
             <a:r>
-              <a:rPr lang="en-US" smtClean="0"/>
+              <a:rPr lang="en-US"/>
               <a:t>Click to edit Master text styles</a:t>
             </a:r>
           </a:p>
           <a:p>
             <a:pPr lvl="1"/>
             <a:r>
-              <a:rPr lang="en-US" smtClean="0"/>
+              <a:rPr lang="en-US"/>
               <a:t>Second level</a:t>
             </a:r>
           </a:p>
           <a:p>
             <a:pPr lvl="2"/>
             <a:r>
-              <a:rPr lang="en-US" smtClean="0"/>
+              <a:rPr lang="en-US"/>
               <a:t>Third level</a:t>
             </a:r>
           </a:p>
           <a:p>
             <a:pPr lvl="3"/>
             <a:r>
-              <a:rPr lang="en-US" smtClean="0"/>
+              <a:rPr lang="en-US"/>
               <a:t>Fourth level</a:t>
             </a:r>
           </a:p>
           <a:p>
             <a:pPr lvl="4"/>
             <a:r>
-              <a:rPr lang="en-US" smtClean="0"/>
+              <a:rPr lang="en-US"/>
               <a:t>Fifth level</a:t>
             </a:r>
-            <a:endParaRPr lang="en-US"/>
           </a:p>
         </p:txBody>
       </p:sp>
@@ -4205,7 +3979,7 @@
           <a:p>
             <a:fld id="{5BCAD085-E8A6-8845-BD4E-CB4CCA059FC4}" type="datetimeFigureOut">
               <a:rPr lang="en-US" smtClean="0"/>
-              <a:t>1/27/13</a:t>
+              <a:t>4/27/26</a:t>
             </a:fld>
             <a:endParaRPr lang="en-US"/>
           </a:p>
@@ -4564,7 +4338,7 @@
 </file>
 
 <file path=ppt/slides/slide1.xml><?xml version="1.0" encoding="utf-8"?>
-<p:sld xmlns:a="http://schemas.openxmlformats.org/drawingml/2006/main" xmlns:p="http://schemas.openxmlformats.org/presentationml/2006/main" xmlns:r="http://schemas.openxmlformats.org/officeDocument/2006/relationships">
+<p:sld xmlns:a="http://schemas.openxmlformats.org/drawingml/2006/main" xmlns:r="http://schemas.openxmlformats.org/officeDocument/2006/relationships" xmlns:p="http://schemas.openxmlformats.org/presentationml/2006/main">
   <p:cSld>
     <p:spTree>
       <p:nvGrpSpPr>
@@ -4572,7 +4346,14 @@
         <p:cNvGrpSpPr/>
         <p:nvPr/>
       </p:nvGrpSpPr>
-      <p:grpSpPr/>
+      <p:grpSpPr>
+        <a:xfrm>
+          <a:off x="0" y="0"/>
+          <a:ext cx="0" cy="0"/>
+          <a:chOff x="0" y="0"/>
+          <a:chExt cx="0" cy="0"/>
+        </a:xfrm>
+      </p:grpSpPr>
       <p:sp>
         <p:nvSpPr>
           <p:cNvPr id="2" name="Rectangle 1"/>
@@ -4612,7 +4393,9 @@
         <p:txBody>
           <a:bodyPr rtlCol="0" anchor="ctr"/>
           <a:lstStyle/>
-          <a:p/>
+          <a:p>
+            <a:endParaRPr/>
+          </a:p>
         </p:txBody>
       </p:sp>
       <p:sp>
@@ -4654,7 +4437,9 @@
         <p:txBody>
           <a:bodyPr rtlCol="0" anchor="ctr"/>
           <a:lstStyle/>
-          <a:p/>
+          <a:p>
+            <a:endParaRPr/>
+          </a:p>
         </p:txBody>
       </p:sp>
       <p:sp>
@@ -4696,7 +4481,9 @@
         <p:txBody>
           <a:bodyPr rtlCol="0" anchor="ctr"/>
           <a:lstStyle/>
-          <a:p/>
+          <a:p>
+            <a:endParaRPr/>
+          </a:p>
         </p:txBody>
       </p:sp>
       <p:sp>
@@ -4716,7 +4503,7 @@
           <a:noFill/>
         </p:spPr>
         <p:txBody>
-          <a:bodyPr wrap="square" lIns="45720" rIns="45720" tIns="18288" bIns="18288" anchor="t">
+          <a:bodyPr wrap="square" lIns="45720" tIns="18288" rIns="45720" bIns="18288" anchor="t">
             <a:spAutoFit/>
           </a:bodyPr>
           <a:lstStyle/>
@@ -4758,7 +4545,7 @@
           <a:noFill/>
         </p:spPr>
         <p:txBody>
-          <a:bodyPr wrap="square" lIns="45720" rIns="45720" tIns="18288" bIns="18288" anchor="t">
+          <a:bodyPr wrap="square" lIns="45720" tIns="18288" rIns="45720" bIns="18288" anchor="t">
             <a:spAutoFit/>
           </a:bodyPr>
           <a:lstStyle/>
@@ -4801,7 +4588,7 @@
           <a:noFill/>
         </p:spPr>
         <p:txBody>
-          <a:bodyPr wrap="square" lIns="45720" rIns="45720" tIns="18288" bIns="18288" anchor="t">
+          <a:bodyPr wrap="square" lIns="45720" tIns="18288" rIns="45720" bIns="18288" anchor="t">
             <a:spAutoFit/>
           </a:bodyPr>
           <a:lstStyle/>
@@ -4865,7 +4652,9 @@
         <p:txBody>
           <a:bodyPr rtlCol="0" anchor="ctr"/>
           <a:lstStyle/>
-          <a:p/>
+          <a:p>
+            <a:endParaRPr/>
+          </a:p>
         </p:txBody>
       </p:sp>
       <p:sp>
@@ -4877,15 +4666,15 @@
         <p:spPr>
           <a:xfrm>
             <a:off x="960120" y="5120640"/>
-            <a:ext cx="5486400" cy="365760"/>
-          </a:xfrm>
-          <a:prstGeom prst="rect">
-            <a:avLst/>
-          </a:prstGeom>
-          <a:noFill/>
-        </p:spPr>
-        <p:txBody>
-          <a:bodyPr wrap="square" lIns="45720" rIns="45720" tIns="18288" bIns="18288" anchor="t">
+            <a:ext cx="5486400" cy="303416"/>
+          </a:xfrm>
+          <a:prstGeom prst="rect">
+            <a:avLst/>
+          </a:prstGeom>
+          <a:noFill/>
+        </p:spPr>
+        <p:txBody>
+          <a:bodyPr wrap="square" lIns="45720" tIns="18288" rIns="45720" bIns="18288" anchor="t">
             <a:spAutoFit/>
           </a:bodyPr>
           <a:lstStyle/>
@@ -4899,14 +4688,20 @@
               </a:spcAft>
             </a:pPr>
             <a:r>
-              <a:rPr sz="1600" b="1" i="0">
+              <a:rPr lang="en-US" sz="1600" b="1" dirty="0">
                 <a:solidFill>
                   <a:srgbClr val="FFFFFF"/>
                 </a:solidFill>
                 <a:latin typeface="Calibri"/>
               </a:rPr>
-              <a:t>[Speaker Name]</a:t>
-            </a:r>
+              <a:t>Terry Tompkins</a:t>
+            </a:r>
+            <a:endParaRPr sz="1600" b="1" i="0" dirty="0">
+              <a:solidFill>
+                <a:srgbClr val="FFFFFF"/>
+              </a:solidFill>
+              <a:latin typeface="Calibri"/>
+            </a:endParaRPr>
           </a:p>
         </p:txBody>
       </p:sp>
@@ -4919,15 +4714,15 @@
         <p:spPr>
           <a:xfrm>
             <a:off x="960120" y="5440680"/>
-            <a:ext cx="5486400" cy="365760"/>
-          </a:xfrm>
-          <a:prstGeom prst="rect">
-            <a:avLst/>
-          </a:prstGeom>
-          <a:noFill/>
-        </p:spPr>
-        <p:txBody>
-          <a:bodyPr wrap="square" lIns="45720" rIns="45720" tIns="18288" bIns="18288" anchor="t">
+            <a:ext cx="5486400" cy="236796"/>
+          </a:xfrm>
+          <a:prstGeom prst="rect">
+            <a:avLst/>
+          </a:prstGeom>
+          <a:noFill/>
+        </p:spPr>
+        <p:txBody>
+          <a:bodyPr wrap="square" lIns="45720" tIns="18288" rIns="45720" bIns="18288" anchor="t">
             <a:spAutoFit/>
           </a:bodyPr>
           <a:lstStyle/>
@@ -4941,14 +4736,20 @@
               </a:spcAft>
             </a:pPr>
             <a:r>
-              <a:rPr sz="1200" b="0" i="0">
+              <a:rPr lang="en-US" sz="1200" dirty="0">
                 <a:solidFill>
                   <a:srgbClr val="F5E6B8"/>
                 </a:solidFill>
                 <a:latin typeface="Calibri"/>
               </a:rPr>
-              <a:t>[Title  ·  Organization]</a:t>
-            </a:r>
+              <a:t>Principal AI Architect, Assoc. Dir.</a:t>
+            </a:r>
+            <a:endParaRPr sz="1200" b="0" i="0" dirty="0">
+              <a:solidFill>
+                <a:srgbClr val="F5E6B8"/>
+              </a:solidFill>
+              <a:latin typeface="Calibri"/>
+            </a:endParaRPr>
           </a:p>
         </p:txBody>
       </p:sp>
@@ -4961,15 +4762,15 @@
         <p:spPr>
           <a:xfrm>
             <a:off x="960120" y="5760720"/>
-            <a:ext cx="5486400" cy="274320"/>
-          </a:xfrm>
-          <a:prstGeom prst="rect">
-            <a:avLst/>
-          </a:prstGeom>
-          <a:noFill/>
-        </p:spPr>
-        <p:txBody>
-          <a:bodyPr wrap="square" lIns="45720" rIns="45720" tIns="18288" bIns="18288" anchor="t">
+            <a:ext cx="5486400" cy="220125"/>
+          </a:xfrm>
+          <a:prstGeom prst="rect">
+            <a:avLst/>
+          </a:prstGeom>
+          <a:noFill/>
+        </p:spPr>
+        <p:txBody>
+          <a:bodyPr wrap="square" lIns="45720" tIns="18288" rIns="45720" bIns="18288" anchor="t">
             <a:spAutoFit/>
           </a:bodyPr>
           <a:lstStyle/>
@@ -4983,13 +4784,49 @@
               </a:spcAft>
             </a:pPr>
             <a:r>
-              <a:rPr sz="1100" b="0" i="0">
+              <a:rPr sz="1100" b="0" i="0" dirty="0">
                 <a:solidFill>
                   <a:srgbClr val="E3EAF6"/>
                 </a:solidFill>
                 <a:latin typeface="Calibri"/>
               </a:rPr>
-              <a:t>April 2026  ·  45-minute talk</a:t>
+              <a:t>April</a:t>
+            </a:r>
+            <a:r>
+              <a:rPr lang="en-US" sz="1100" b="0" i="0" dirty="0">
+                <a:solidFill>
+                  <a:srgbClr val="E3EAF6"/>
+                </a:solidFill>
+                <a:latin typeface="Calibri"/>
+              </a:rPr>
+              <a:t> 28</a:t>
+            </a:r>
+            <a:r>
+              <a:rPr lang="en-US" sz="1100" b="0" i="0" baseline="30000" dirty="0">
+                <a:solidFill>
+                  <a:srgbClr val="E3EAF6"/>
+                </a:solidFill>
+                <a:latin typeface="Calibri"/>
+              </a:rPr>
+              <a:t>th</a:t>
+            </a:r>
+            <a:r>
+              <a:rPr lang="en-US" sz="1100" b="0" i="0" dirty="0">
+                <a:solidFill>
+                  <a:srgbClr val="E3EAF6"/>
+                </a:solidFill>
+                <a:latin typeface="Calibri"/>
+              </a:rPr>
+              <a:t>,</a:t>
+            </a:r>
+            <a:r>
+              <a:rPr sz="1100" b="0" i="0" dirty="0">
+                <a:solidFill>
+                  <a:srgbClr val="E3EAF6"/>
+                </a:solidFill>
+                <a:latin typeface="Calibri"/>
+              </a:rPr>
+              <a:t> 2026</a:t>
             </a:r>
           </a:p>
         </p:txBody>
@@ -5011,7 +4848,7 @@
           <a:noFill/>
         </p:spPr>
         <p:txBody>
-          <a:bodyPr wrap="square" lIns="45720" rIns="45720" tIns="18288" bIns="18288" anchor="t">
+          <a:bodyPr wrap="square" lIns="45720" tIns="18288" rIns="45720" bIns="18288" anchor="t">
             <a:spAutoFit/>
           </a:bodyPr>
           <a:lstStyle/>
@@ -5079,6 +4916,7 @@
           <a:lstStyle/>
           <a:p>
             <a:pPr algn="ctr"/>
+            <a:endParaRPr/>
           </a:p>
         </p:txBody>
       </p:sp>
@@ -5099,7 +4937,7 @@
           <a:noFill/>
         </p:spPr>
         <p:txBody>
-          <a:bodyPr wrap="square" lIns="45720" rIns="45720" tIns="18288" bIns="18288" anchor="t">
+          <a:bodyPr wrap="square" lIns="45720" tIns="18288" rIns="45720" bIns="18288" anchor="t">
             <a:spAutoFit/>
           </a:bodyPr>
           <a:lstStyle/>
@@ -5166,6 +5004,7 @@
           <a:lstStyle/>
           <a:p>
             <a:pPr algn="ctr"/>
+            <a:endParaRPr/>
           </a:p>
         </p:txBody>
       </p:sp>
@@ -5186,7 +5025,7 @@
           <a:noFill/>
         </p:spPr>
         <p:txBody>
-          <a:bodyPr wrap="square" lIns="45720" rIns="45720" tIns="18288" bIns="18288" anchor="t">
+          <a:bodyPr wrap="square" lIns="45720" tIns="18288" rIns="45720" bIns="18288" anchor="t">
             <a:spAutoFit/>
           </a:bodyPr>
           <a:lstStyle/>
@@ -5254,6 +5093,7 @@
           <a:lstStyle/>
           <a:p>
             <a:pPr algn="ctr"/>
+            <a:endParaRPr/>
           </a:p>
         </p:txBody>
       </p:sp>
@@ -5296,7 +5136,9 @@
         <p:txBody>
           <a:bodyPr rtlCol="0" anchor="ctr"/>
           <a:lstStyle/>
-          <a:p/>
+          <a:p>
+            <a:endParaRPr/>
+          </a:p>
         </p:txBody>
       </p:sp>
       <p:sp>
@@ -5338,7 +5180,9 @@
         <p:txBody>
           <a:bodyPr rtlCol="0" anchor="ctr"/>
           <a:lstStyle/>
-          <a:p/>
+          <a:p>
+            <a:endParaRPr/>
+          </a:p>
         </p:txBody>
       </p:sp>
       <p:sp>
@@ -5380,7 +5224,9 @@
         <p:txBody>
           <a:bodyPr rtlCol="0" anchor="ctr"/>
           <a:lstStyle/>
-          <a:p/>
+          <a:p>
+            <a:endParaRPr/>
+          </a:p>
         </p:txBody>
       </p:sp>
       <p:sp>
@@ -5422,7 +5268,9 @@
         <p:txBody>
           <a:bodyPr rtlCol="0" anchor="ctr"/>
           <a:lstStyle/>
-          <a:p/>
+          <a:p>
+            <a:endParaRPr/>
+          </a:p>
         </p:txBody>
       </p:sp>
       <p:sp>
@@ -5442,7 +5290,7 @@
           <a:noFill/>
         </p:spPr>
         <p:txBody>
-          <a:bodyPr wrap="square" lIns="45720" rIns="45720" tIns="18288" bIns="18288" anchor="t">
+          <a:bodyPr wrap="square" lIns="45720" tIns="18288" rIns="45720" bIns="18288" anchor="t">
             <a:spAutoFit/>
           </a:bodyPr>
           <a:lstStyle/>
@@ -5479,7 +5327,7 @@
 </file>
 
 <file path=ppt/slides/slide10.xml><?xml version="1.0" encoding="utf-8"?>
-<p:sld xmlns:a="http://schemas.openxmlformats.org/drawingml/2006/main" xmlns:p="http://schemas.openxmlformats.org/presentationml/2006/main" xmlns:r="http://schemas.openxmlformats.org/officeDocument/2006/relationships">
+<p:sld xmlns:a="http://schemas.openxmlformats.org/drawingml/2006/main" xmlns:r="http://schemas.openxmlformats.org/officeDocument/2006/relationships" xmlns:p="http://schemas.openxmlformats.org/presentationml/2006/main">
   <p:cSld>
     <p:spTree>
       <p:nvGrpSpPr>
@@ -5487,7 +5335,14 @@
         <p:cNvGrpSpPr/>
         <p:nvPr/>
       </p:nvGrpSpPr>
-      <p:grpSpPr/>
+      <p:grpSpPr>
+        <a:xfrm>
+          <a:off x="0" y="0"/>
+          <a:ext cx="0" cy="0"/>
+          <a:chOff x="0" y="0"/>
+          <a:chExt cx="0" cy="0"/>
+        </a:xfrm>
+      </p:grpSpPr>
       <p:sp>
         <p:nvSpPr>
           <p:cNvPr id="2" name="Rectangle 1"/>
@@ -5527,7 +5382,9 @@
         <p:txBody>
           <a:bodyPr rtlCol="0" anchor="ctr"/>
           <a:lstStyle/>
-          <a:p/>
+          <a:p>
+            <a:endParaRPr/>
+          </a:p>
         </p:txBody>
       </p:sp>
       <p:sp>
@@ -5547,7 +5404,7 @@
           <a:noFill/>
         </p:spPr>
         <p:txBody>
-          <a:bodyPr wrap="square" lIns="45720" rIns="45720" tIns="18288" bIns="18288" anchor="t">
+          <a:bodyPr wrap="square" lIns="45720" tIns="18288" rIns="45720" bIns="18288" anchor="t">
             <a:spAutoFit/>
           </a:bodyPr>
           <a:lstStyle/>
@@ -5589,7 +5446,7 @@
           <a:noFill/>
         </p:spPr>
         <p:txBody>
-          <a:bodyPr wrap="square" lIns="45720" rIns="45720" tIns="18288" bIns="18288" anchor="t">
+          <a:bodyPr wrap="square" lIns="45720" tIns="18288" rIns="45720" bIns="18288" anchor="t">
             <a:spAutoFit/>
           </a:bodyPr>
           <a:lstStyle/>
@@ -5631,7 +5488,7 @@
           <a:noFill/>
         </p:spPr>
         <p:txBody>
-          <a:bodyPr wrap="square" lIns="45720" rIns="45720" tIns="18288" bIns="18288" anchor="t">
+          <a:bodyPr wrap="square" lIns="45720" tIns="18288" rIns="45720" bIns="18288" anchor="t">
             <a:spAutoFit/>
           </a:bodyPr>
           <a:lstStyle/>
@@ -5699,6 +5556,7 @@
           <a:lstStyle/>
           <a:p>
             <a:pPr algn="ctr"/>
+            <a:endParaRPr/>
           </a:p>
         </p:txBody>
       </p:sp>
@@ -5741,7 +5599,9 @@
         <p:txBody>
           <a:bodyPr rtlCol="0" anchor="ctr"/>
           <a:lstStyle/>
-          <a:p/>
+          <a:p>
+            <a:endParaRPr/>
+          </a:p>
         </p:txBody>
       </p:sp>
       <p:sp>
@@ -5789,6 +5649,7 @@
           <a:lstStyle/>
           <a:p>
             <a:pPr algn="ctr"/>
+            <a:endParaRPr/>
           </a:p>
         </p:txBody>
       </p:sp>
@@ -5831,7 +5692,9 @@
         <p:txBody>
           <a:bodyPr rtlCol="0" anchor="ctr"/>
           <a:lstStyle/>
-          <a:p/>
+          <a:p>
+            <a:endParaRPr/>
+          </a:p>
         </p:txBody>
       </p:sp>
       <p:sp>
@@ -5873,7 +5736,9 @@
         <p:txBody>
           <a:bodyPr rtlCol="0" anchor="ctr"/>
           <a:lstStyle/>
-          <a:p/>
+          <a:p>
+            <a:endParaRPr/>
+          </a:p>
         </p:txBody>
       </p:sp>
       <p:sp>
@@ -5915,7 +5780,9 @@
         <p:txBody>
           <a:bodyPr rtlCol="0" anchor="ctr"/>
           <a:lstStyle/>
-          <a:p/>
+          <a:p>
+            <a:endParaRPr/>
+          </a:p>
         </p:txBody>
       </p:sp>
       <p:sp>
@@ -5957,7 +5824,9 @@
         <p:txBody>
           <a:bodyPr rtlCol="0" anchor="ctr"/>
           <a:lstStyle/>
-          <a:p/>
+          <a:p>
+            <a:endParaRPr/>
+          </a:p>
         </p:txBody>
       </p:sp>
       <p:sp>
@@ -5977,7 +5846,7 @@
           <a:noFill/>
         </p:spPr>
         <p:txBody>
-          <a:bodyPr wrap="square" lIns="45720" rIns="45720" tIns="18288" bIns="18288" anchor="t">
+          <a:bodyPr wrap="square" lIns="45720" tIns="18288" rIns="45720" bIns="18288" anchor="t">
             <a:spAutoFit/>
           </a:bodyPr>
           <a:lstStyle/>
@@ -6019,7 +5888,7 @@
           <a:noFill/>
         </p:spPr>
         <p:txBody>
-          <a:bodyPr wrap="square" lIns="45720" rIns="45720" tIns="18288" bIns="18288" anchor="t">
+          <a:bodyPr wrap="square" lIns="45720" tIns="18288" rIns="45720" bIns="18288" anchor="t">
             <a:spAutoFit/>
           </a:bodyPr>
           <a:lstStyle/>
@@ -6083,7 +5952,9 @@
         <p:txBody>
           <a:bodyPr rtlCol="0" anchor="ctr"/>
           <a:lstStyle/>
-          <a:p/>
+          <a:p>
+            <a:endParaRPr/>
+          </a:p>
         </p:txBody>
       </p:sp>
       <p:sp>
@@ -6103,7 +5974,7 @@
           <a:noFill/>
         </p:spPr>
         <p:txBody>
-          <a:bodyPr wrap="square" lIns="45720" rIns="45720" tIns="18288" bIns="18288" anchor="t">
+          <a:bodyPr wrap="square" lIns="45720" tIns="18288" rIns="45720" bIns="18288" anchor="t">
             <a:spAutoFit/>
           </a:bodyPr>
           <a:lstStyle/>
@@ -6145,7 +6016,7 @@
           <a:noFill/>
         </p:spPr>
         <p:txBody>
-          <a:bodyPr wrap="square" lIns="45720" rIns="45720" tIns="18288" bIns="18288" anchor="t">
+          <a:bodyPr wrap="square" lIns="45720" tIns="18288" rIns="45720" bIns="18288" anchor="t">
             <a:spAutoFit/>
           </a:bodyPr>
           <a:lstStyle/>
@@ -6213,6 +6084,7 @@
           <a:lstStyle/>
           <a:p>
             <a:pPr algn="ctr"/>
+            <a:endParaRPr/>
           </a:p>
         </p:txBody>
       </p:sp>
@@ -6255,7 +6127,9 @@
         <p:txBody>
           <a:bodyPr rtlCol="0" anchor="ctr"/>
           <a:lstStyle/>
-          <a:p/>
+          <a:p>
+            <a:endParaRPr/>
+          </a:p>
         </p:txBody>
       </p:sp>
       <p:sp>
@@ -6303,6 +6177,7 @@
           <a:lstStyle/>
           <a:p>
             <a:pPr algn="ctr"/>
+            <a:endParaRPr/>
           </a:p>
         </p:txBody>
       </p:sp>
@@ -6345,7 +6220,9 @@
         <p:txBody>
           <a:bodyPr rtlCol="0" anchor="ctr"/>
           <a:lstStyle/>
-          <a:p/>
+          <a:p>
+            <a:endParaRPr/>
+          </a:p>
         </p:txBody>
       </p:sp>
       <p:sp>
@@ -6387,7 +6264,9 @@
         <p:txBody>
           <a:bodyPr rtlCol="0" anchor="ctr"/>
           <a:lstStyle/>
-          <a:p/>
+          <a:p>
+            <a:endParaRPr/>
+          </a:p>
         </p:txBody>
       </p:sp>
       <p:sp>
@@ -6429,7 +6308,9 @@
         <p:txBody>
           <a:bodyPr rtlCol="0" anchor="ctr"/>
           <a:lstStyle/>
-          <a:p/>
+          <a:p>
+            <a:endParaRPr/>
+          </a:p>
         </p:txBody>
       </p:sp>
       <p:sp>
@@ -6471,7 +6352,9 @@
         <p:txBody>
           <a:bodyPr rtlCol="0" anchor="ctr"/>
           <a:lstStyle/>
-          <a:p/>
+          <a:p>
+            <a:endParaRPr/>
+          </a:p>
         </p:txBody>
       </p:sp>
       <p:sp>
@@ -6491,7 +6374,7 @@
           <a:noFill/>
         </p:spPr>
         <p:txBody>
-          <a:bodyPr wrap="square" lIns="45720" rIns="45720" tIns="18288" bIns="18288" anchor="t">
+          <a:bodyPr wrap="square" lIns="45720" tIns="18288" rIns="45720" bIns="18288" anchor="t">
             <a:spAutoFit/>
           </a:bodyPr>
           <a:lstStyle/>
@@ -6533,7 +6416,7 @@
           <a:noFill/>
         </p:spPr>
         <p:txBody>
-          <a:bodyPr wrap="square" lIns="45720" rIns="45720" tIns="18288" bIns="18288" anchor="t">
+          <a:bodyPr wrap="square" lIns="45720" tIns="18288" rIns="45720" bIns="18288" anchor="t">
             <a:spAutoFit/>
           </a:bodyPr>
           <a:lstStyle/>
@@ -6597,7 +6480,9 @@
         <p:txBody>
           <a:bodyPr rtlCol="0" anchor="ctr"/>
           <a:lstStyle/>
-          <a:p/>
+          <a:p>
+            <a:endParaRPr/>
+          </a:p>
         </p:txBody>
       </p:sp>
       <p:sp>
@@ -6617,7 +6502,7 @@
           <a:noFill/>
         </p:spPr>
         <p:txBody>
-          <a:bodyPr wrap="square" lIns="45720" rIns="45720" tIns="18288" bIns="18288" anchor="t">
+          <a:bodyPr wrap="square" lIns="45720" tIns="18288" rIns="45720" bIns="18288" anchor="t">
             <a:spAutoFit/>
           </a:bodyPr>
           <a:lstStyle/>
@@ -6659,7 +6544,7 @@
           <a:noFill/>
         </p:spPr>
         <p:txBody>
-          <a:bodyPr wrap="square" lIns="45720" rIns="45720" tIns="18288" bIns="18288" anchor="t">
+          <a:bodyPr wrap="square" lIns="45720" tIns="18288" rIns="45720" bIns="18288" anchor="t">
             <a:spAutoFit/>
           </a:bodyPr>
           <a:lstStyle/>
@@ -6727,6 +6612,7 @@
           <a:lstStyle/>
           <a:p>
             <a:pPr algn="ctr"/>
+            <a:endParaRPr/>
           </a:p>
         </p:txBody>
       </p:sp>
@@ -6769,7 +6655,9 @@
         <p:txBody>
           <a:bodyPr rtlCol="0" anchor="ctr"/>
           <a:lstStyle/>
-          <a:p/>
+          <a:p>
+            <a:endParaRPr/>
+          </a:p>
         </p:txBody>
       </p:sp>
       <p:sp>
@@ -6817,6 +6705,7 @@
           <a:lstStyle/>
           <a:p>
             <a:pPr algn="ctr"/>
+            <a:endParaRPr/>
           </a:p>
         </p:txBody>
       </p:sp>
@@ -6859,7 +6748,9 @@
         <p:txBody>
           <a:bodyPr rtlCol="0" anchor="ctr"/>
           <a:lstStyle/>
-          <a:p/>
+          <a:p>
+            <a:endParaRPr/>
+          </a:p>
         </p:txBody>
       </p:sp>
       <p:sp>
@@ -6901,7 +6792,9 @@
         <p:txBody>
           <a:bodyPr rtlCol="0" anchor="ctr"/>
           <a:lstStyle/>
-          <a:p/>
+          <a:p>
+            <a:endParaRPr/>
+          </a:p>
         </p:txBody>
       </p:sp>
       <p:sp>
@@ -6943,7 +6836,9 @@
         <p:txBody>
           <a:bodyPr rtlCol="0" anchor="ctr"/>
           <a:lstStyle/>
-          <a:p/>
+          <a:p>
+            <a:endParaRPr/>
+          </a:p>
         </p:txBody>
       </p:sp>
       <p:sp>
@@ -6985,7 +6880,9 @@
         <p:txBody>
           <a:bodyPr rtlCol="0" anchor="ctr"/>
           <a:lstStyle/>
-          <a:p/>
+          <a:p>
+            <a:endParaRPr/>
+          </a:p>
         </p:txBody>
       </p:sp>
       <p:sp>
@@ -7005,7 +6902,7 @@
           <a:noFill/>
         </p:spPr>
         <p:txBody>
-          <a:bodyPr wrap="square" lIns="45720" rIns="45720" tIns="18288" bIns="18288" anchor="t">
+          <a:bodyPr wrap="square" lIns="45720" tIns="18288" rIns="45720" bIns="18288" anchor="t">
             <a:spAutoFit/>
           </a:bodyPr>
           <a:lstStyle/>
@@ -7047,7 +6944,7 @@
           <a:noFill/>
         </p:spPr>
         <p:txBody>
-          <a:bodyPr wrap="square" lIns="45720" rIns="45720" tIns="18288" bIns="18288" anchor="t">
+          <a:bodyPr wrap="square" lIns="45720" tIns="18288" rIns="45720" bIns="18288" anchor="t">
             <a:spAutoFit/>
           </a:bodyPr>
           <a:lstStyle/>
@@ -7111,7 +7008,9 @@
         <p:txBody>
           <a:bodyPr rtlCol="0" anchor="ctr"/>
           <a:lstStyle/>
-          <a:p/>
+          <a:p>
+            <a:endParaRPr/>
+          </a:p>
         </p:txBody>
       </p:sp>
       <p:sp>
@@ -7131,7 +7030,7 @@
           <a:noFill/>
         </p:spPr>
         <p:txBody>
-          <a:bodyPr wrap="square" lIns="45720" rIns="45720" tIns="18288" bIns="18288" anchor="t">
+          <a:bodyPr wrap="square" lIns="45720" tIns="18288" rIns="45720" bIns="18288" anchor="t">
             <a:spAutoFit/>
           </a:bodyPr>
           <a:lstStyle/>
@@ -7173,7 +7072,7 @@
           <a:noFill/>
         </p:spPr>
         <p:txBody>
-          <a:bodyPr wrap="square" lIns="45720" rIns="45720" tIns="18288" bIns="18288" anchor="t">
+          <a:bodyPr wrap="square" lIns="45720" tIns="18288" rIns="45720" bIns="18288" anchor="t">
             <a:spAutoFit/>
           </a:bodyPr>
           <a:lstStyle/>
@@ -7241,6 +7140,7 @@
           <a:lstStyle/>
           <a:p>
             <a:pPr algn="ctr"/>
+            <a:endParaRPr/>
           </a:p>
         </p:txBody>
       </p:sp>
@@ -7261,7 +7161,7 @@
           <a:noFill/>
         </p:spPr>
         <p:txBody>
-          <a:bodyPr wrap="square" lIns="45720" rIns="45720" tIns="18288" bIns="18288" anchor="t">
+          <a:bodyPr wrap="square" lIns="45720" tIns="18288" rIns="45720" bIns="18288" anchor="t">
             <a:spAutoFit/>
           </a:bodyPr>
           <a:lstStyle/>
@@ -7325,7 +7225,9 @@
         <p:txBody>
           <a:bodyPr rtlCol="0" anchor="ctr"/>
           <a:lstStyle/>
-          <a:p/>
+          <a:p>
+            <a:endParaRPr/>
+          </a:p>
         </p:txBody>
       </p:sp>
       <p:sp>
@@ -7345,7 +7247,7 @@
           <a:noFill/>
         </p:spPr>
         <p:txBody>
-          <a:bodyPr wrap="square" lIns="45720" rIns="45720" tIns="18288" bIns="18288" anchor="t">
+          <a:bodyPr wrap="square" lIns="45720" tIns="18288" rIns="45720" bIns="18288" anchor="t">
             <a:spAutoFit/>
           </a:bodyPr>
           <a:lstStyle/>
@@ -7387,7 +7289,7 @@
           <a:noFill/>
         </p:spPr>
         <p:txBody>
-          <a:bodyPr wrap="square" lIns="45720" rIns="45720" tIns="18288" bIns="18288" anchor="t">
+          <a:bodyPr wrap="square" lIns="45720" tIns="18288" rIns="45720" bIns="18288" anchor="t">
             <a:spAutoFit/>
           </a:bodyPr>
           <a:lstStyle/>
@@ -7421,7 +7323,7 @@
 </file>
 
 <file path=ppt/slides/slide11.xml><?xml version="1.0" encoding="utf-8"?>
-<p:sld xmlns:a="http://schemas.openxmlformats.org/drawingml/2006/main" xmlns:p="http://schemas.openxmlformats.org/presentationml/2006/main" xmlns:r="http://schemas.openxmlformats.org/officeDocument/2006/relationships">
+<p:sld xmlns:a="http://schemas.openxmlformats.org/drawingml/2006/main" xmlns:r="http://schemas.openxmlformats.org/officeDocument/2006/relationships" xmlns:p="http://schemas.openxmlformats.org/presentationml/2006/main">
   <p:cSld>
     <p:spTree>
       <p:nvGrpSpPr>
@@ -7429,7 +7331,14 @@
         <p:cNvGrpSpPr/>
         <p:nvPr/>
       </p:nvGrpSpPr>
-      <p:grpSpPr/>
+      <p:grpSpPr>
+        <a:xfrm>
+          <a:off x="0" y="0"/>
+          <a:ext cx="0" cy="0"/>
+          <a:chOff x="0" y="0"/>
+          <a:chExt cx="0" cy="0"/>
+        </a:xfrm>
+      </p:grpSpPr>
       <p:sp>
         <p:nvSpPr>
           <p:cNvPr id="2" name="Rectangle 1"/>
@@ -7469,7 +7378,9 @@
         <p:txBody>
           <a:bodyPr rtlCol="0" anchor="ctr"/>
           <a:lstStyle/>
-          <a:p/>
+          <a:p>
+            <a:endParaRPr/>
+          </a:p>
         </p:txBody>
       </p:sp>
       <p:sp>
@@ -7489,7 +7400,7 @@
           <a:noFill/>
         </p:spPr>
         <p:txBody>
-          <a:bodyPr wrap="square" lIns="45720" rIns="45720" tIns="18288" bIns="18288" anchor="t">
+          <a:bodyPr wrap="square" lIns="45720" tIns="18288" rIns="45720" bIns="18288" anchor="t">
             <a:spAutoFit/>
           </a:bodyPr>
           <a:lstStyle/>
@@ -7531,7 +7442,7 @@
           <a:noFill/>
         </p:spPr>
         <p:txBody>
-          <a:bodyPr wrap="square" lIns="45720" rIns="45720" tIns="18288" bIns="18288" anchor="t">
+          <a:bodyPr wrap="square" lIns="45720" tIns="18288" rIns="45720" bIns="18288" anchor="t">
             <a:spAutoFit/>
           </a:bodyPr>
           <a:lstStyle/>
@@ -7601,6 +7512,7 @@
           <a:lstStyle/>
           <a:p>
             <a:pPr algn="ctr"/>
+            <a:endParaRPr/>
           </a:p>
         </p:txBody>
       </p:sp>
@@ -7643,7 +7555,9 @@
         <p:txBody>
           <a:bodyPr rtlCol="0" anchor="ctr"/>
           <a:lstStyle/>
-          <a:p/>
+          <a:p>
+            <a:endParaRPr/>
+          </a:p>
         </p:txBody>
       </p:sp>
       <p:sp>
@@ -7686,6 +7600,7 @@
           <a:lstStyle/>
           <a:p>
             <a:pPr algn="ctr"/>
+            <a:endParaRPr/>
           </a:p>
         </p:txBody>
       </p:sp>
@@ -7729,6 +7644,7 @@
           <a:lstStyle/>
           <a:p>
             <a:pPr algn="ctr"/>
+            <a:endParaRPr/>
           </a:p>
         </p:txBody>
       </p:sp>
@@ -7772,6 +7688,7 @@
           <a:lstStyle/>
           <a:p>
             <a:pPr algn="ctr"/>
+            <a:endParaRPr/>
           </a:p>
         </p:txBody>
       </p:sp>
@@ -7792,7 +7709,7 @@
           <a:noFill/>
         </p:spPr>
         <p:txBody>
-          <a:bodyPr wrap="square" lIns="45720" rIns="45720" tIns="18288" bIns="18288" anchor="t">
+          <a:bodyPr wrap="square" lIns="45720" tIns="18288" rIns="45720" bIns="18288" anchor="t">
             <a:spAutoFit/>
           </a:bodyPr>
           <a:lstStyle/>
@@ -7856,7 +7773,9 @@
         <p:txBody>
           <a:bodyPr rtlCol="0" anchor="ctr"/>
           <a:lstStyle/>
-          <a:p/>
+          <a:p>
+            <a:endParaRPr/>
+          </a:p>
         </p:txBody>
       </p:sp>
       <p:sp>
@@ -7898,7 +7817,9 @@
         <p:txBody>
           <a:bodyPr rtlCol="0" anchor="ctr"/>
           <a:lstStyle/>
-          <a:p/>
+          <a:p>
+            <a:endParaRPr/>
+          </a:p>
         </p:txBody>
       </p:sp>
       <p:sp>
@@ -7918,7 +7839,7 @@
           <a:noFill/>
         </p:spPr>
         <p:txBody>
-          <a:bodyPr wrap="square" lIns="45720" rIns="45720" tIns="18288" bIns="18288" anchor="t">
+          <a:bodyPr wrap="square" lIns="45720" tIns="18288" rIns="45720" bIns="18288" anchor="t">
             <a:spAutoFit/>
           </a:bodyPr>
           <a:lstStyle/>
@@ -7960,7 +7881,7 @@
           <a:noFill/>
         </p:spPr>
         <p:txBody>
-          <a:bodyPr wrap="square" lIns="45720" rIns="45720" tIns="18288" bIns="18288" anchor="t">
+          <a:bodyPr wrap="square" lIns="45720" tIns="18288" rIns="45720" bIns="18288" anchor="t">
             <a:spAutoFit/>
           </a:bodyPr>
           <a:lstStyle/>
@@ -8030,6 +7951,7 @@
           <a:lstStyle/>
           <a:p>
             <a:pPr algn="ctr"/>
+            <a:endParaRPr/>
           </a:p>
         </p:txBody>
       </p:sp>
@@ -8050,7 +7972,7 @@
           <a:noFill/>
         </p:spPr>
         <p:txBody>
-          <a:bodyPr wrap="square" lIns="45720" rIns="45720" tIns="18288" bIns="18288" anchor="t">
+          <a:bodyPr wrap="square" lIns="45720" tIns="18288" rIns="45720" bIns="18288" anchor="t">
             <a:spAutoFit/>
           </a:bodyPr>
           <a:lstStyle/>
@@ -8092,7 +8014,7 @@
           <a:noFill/>
         </p:spPr>
         <p:txBody>
-          <a:bodyPr wrap="square" lIns="45720" rIns="45720" tIns="18288" bIns="18288" anchor="t">
+          <a:bodyPr wrap="square" lIns="45720" tIns="18288" rIns="45720" bIns="18288" anchor="t">
             <a:spAutoFit/>
           </a:bodyPr>
           <a:lstStyle/>
@@ -8162,6 +8084,7 @@
           <a:lstStyle/>
           <a:p>
             <a:pPr algn="ctr"/>
+            <a:endParaRPr/>
           </a:p>
         </p:txBody>
       </p:sp>
@@ -8182,7 +8105,7 @@
           <a:noFill/>
         </p:spPr>
         <p:txBody>
-          <a:bodyPr wrap="square" lIns="45720" rIns="45720" tIns="18288" bIns="18288" anchor="t">
+          <a:bodyPr wrap="square" lIns="45720" tIns="18288" rIns="45720" bIns="18288" anchor="t">
             <a:spAutoFit/>
           </a:bodyPr>
           <a:lstStyle/>
@@ -8224,7 +8147,7 @@
           <a:noFill/>
         </p:spPr>
         <p:txBody>
-          <a:bodyPr wrap="square" lIns="45720" rIns="45720" tIns="18288" bIns="18288" anchor="t">
+          <a:bodyPr wrap="square" lIns="45720" tIns="18288" rIns="45720" bIns="18288" anchor="t">
             <a:spAutoFit/>
           </a:bodyPr>
           <a:lstStyle/>
@@ -8294,6 +8217,7 @@
           <a:lstStyle/>
           <a:p>
             <a:pPr algn="ctr"/>
+            <a:endParaRPr/>
           </a:p>
         </p:txBody>
       </p:sp>
@@ -8314,7 +8238,7 @@
           <a:noFill/>
         </p:spPr>
         <p:txBody>
-          <a:bodyPr wrap="square" lIns="45720" rIns="45720" tIns="18288" bIns="18288" anchor="t">
+          <a:bodyPr wrap="square" lIns="45720" tIns="18288" rIns="45720" bIns="18288" anchor="t">
             <a:spAutoFit/>
           </a:bodyPr>
           <a:lstStyle/>
@@ -8356,7 +8280,7 @@
           <a:noFill/>
         </p:spPr>
         <p:txBody>
-          <a:bodyPr wrap="square" lIns="45720" rIns="45720" tIns="18288" bIns="18288" anchor="t">
+          <a:bodyPr wrap="square" lIns="45720" tIns="18288" rIns="45720" bIns="18288" anchor="t">
             <a:spAutoFit/>
           </a:bodyPr>
           <a:lstStyle/>
@@ -8426,6 +8350,7 @@
           <a:lstStyle/>
           <a:p>
             <a:pPr algn="ctr"/>
+            <a:endParaRPr/>
           </a:p>
         </p:txBody>
       </p:sp>
@@ -8469,6 +8394,7 @@
           <a:lstStyle/>
           <a:p>
             <a:pPr algn="ctr"/>
+            <a:endParaRPr/>
           </a:p>
         </p:txBody>
       </p:sp>
@@ -8489,7 +8415,7 @@
           <a:noFill/>
         </p:spPr>
         <p:txBody>
-          <a:bodyPr wrap="square" lIns="45720" rIns="45720" tIns="18288" bIns="18288" anchor="t">
+          <a:bodyPr wrap="square" lIns="45720" tIns="18288" rIns="45720" bIns="18288" anchor="t">
             <a:spAutoFit/>
           </a:bodyPr>
           <a:lstStyle/>
@@ -8531,7 +8457,7 @@
           <a:noFill/>
         </p:spPr>
         <p:txBody>
-          <a:bodyPr wrap="square" lIns="45720" rIns="45720" tIns="18288" bIns="18288" anchor="t">
+          <a:bodyPr wrap="square" lIns="45720" tIns="18288" rIns="45720" bIns="18288" anchor="t">
             <a:spAutoFit/>
           </a:bodyPr>
           <a:lstStyle/>
@@ -8573,7 +8499,7 @@
           <a:noFill/>
         </p:spPr>
         <p:txBody>
-          <a:bodyPr wrap="square" lIns="45720" rIns="45720" tIns="18288" bIns="18288" anchor="t">
+          <a:bodyPr wrap="square" lIns="45720" tIns="18288" rIns="45720" bIns="18288" anchor="t">
             <a:spAutoFit/>
           </a:bodyPr>
           <a:lstStyle/>
@@ -8637,7 +8563,9 @@
         <p:txBody>
           <a:bodyPr rtlCol="0" anchor="ctr"/>
           <a:lstStyle/>
-          <a:p/>
+          <a:p>
+            <a:endParaRPr/>
+          </a:p>
         </p:txBody>
       </p:sp>
       <p:sp>
@@ -8683,6 +8611,7 @@
           <a:lstStyle/>
           <a:p>
             <a:pPr algn="ctr"/>
+            <a:endParaRPr/>
           </a:p>
         </p:txBody>
       </p:sp>
@@ -8725,7 +8654,9 @@
         <p:txBody>
           <a:bodyPr rtlCol="0" anchor="ctr"/>
           <a:lstStyle/>
-          <a:p/>
+          <a:p>
+            <a:endParaRPr/>
+          </a:p>
         </p:txBody>
       </p:sp>
       <p:sp>
@@ -8745,7 +8676,7 @@
           <a:noFill/>
         </p:spPr>
         <p:txBody>
-          <a:bodyPr wrap="square" lIns="45720" rIns="45720" tIns="18288" bIns="18288" anchor="t">
+          <a:bodyPr wrap="square" lIns="45720" tIns="18288" rIns="45720" bIns="18288" anchor="t">
             <a:spAutoFit/>
           </a:bodyPr>
           <a:lstStyle/>
@@ -8787,7 +8718,7 @@
           <a:noFill/>
         </p:spPr>
         <p:txBody>
-          <a:bodyPr wrap="square" lIns="45720" rIns="45720" tIns="18288" bIns="18288" anchor="t">
+          <a:bodyPr wrap="square" lIns="45720" tIns="18288" rIns="45720" bIns="18288" anchor="t">
             <a:spAutoFit/>
           </a:bodyPr>
           <a:lstStyle/>
@@ -8940,6 +8871,7 @@
           <a:lstStyle/>
           <a:p>
             <a:pPr algn="ctr"/>
+            <a:endParaRPr/>
           </a:p>
         </p:txBody>
       </p:sp>
@@ -8960,7 +8892,7 @@
           <a:noFill/>
         </p:spPr>
         <p:txBody>
-          <a:bodyPr wrap="square" lIns="45720" rIns="45720" tIns="18288" bIns="18288" anchor="t">
+          <a:bodyPr wrap="square" lIns="45720" tIns="18288" rIns="45720" bIns="18288" anchor="t">
             <a:spAutoFit/>
           </a:bodyPr>
           <a:lstStyle/>
@@ -9030,6 +8962,7 @@
           <a:lstStyle/>
           <a:p>
             <a:pPr algn="ctr"/>
+            <a:endParaRPr/>
           </a:p>
         </p:txBody>
       </p:sp>
@@ -9050,7 +8983,7 @@
           <a:noFill/>
         </p:spPr>
         <p:txBody>
-          <a:bodyPr wrap="square" lIns="45720" rIns="45720" tIns="18288" bIns="18288" anchor="t">
+          <a:bodyPr wrap="square" lIns="45720" tIns="18288" rIns="45720" bIns="18288" anchor="t">
             <a:spAutoFit/>
           </a:bodyPr>
           <a:lstStyle/>
@@ -9118,6 +9051,7 @@
           <a:lstStyle/>
           <a:p>
             <a:pPr algn="ctr"/>
+            <a:endParaRPr/>
           </a:p>
         </p:txBody>
       </p:sp>
@@ -9138,7 +9072,7 @@
           <a:noFill/>
         </p:spPr>
         <p:txBody>
-          <a:bodyPr wrap="square" lIns="45720" rIns="45720" tIns="18288" bIns="18288" anchor="t">
+          <a:bodyPr wrap="square" lIns="45720" tIns="18288" rIns="45720" bIns="18288" anchor="t">
             <a:spAutoFit/>
           </a:bodyPr>
           <a:lstStyle/>
@@ -9180,7 +9114,7 @@
           <a:noFill/>
         </p:spPr>
         <p:txBody>
-          <a:bodyPr wrap="square" lIns="45720" rIns="45720" tIns="18288" bIns="18288" anchor="t">
+          <a:bodyPr wrap="square" lIns="45720" tIns="18288" rIns="45720" bIns="18288" anchor="t">
             <a:spAutoFit/>
           </a:bodyPr>
           <a:lstStyle/>
@@ -9222,7 +9156,7 @@
           <a:noFill/>
         </p:spPr>
         <p:txBody>
-          <a:bodyPr wrap="square" lIns="45720" rIns="45720" tIns="18288" bIns="18288" anchor="t">
+          <a:bodyPr wrap="square" lIns="45720" tIns="18288" rIns="45720" bIns="18288" anchor="t">
             <a:spAutoFit/>
           </a:bodyPr>
           <a:lstStyle/>
@@ -9286,7 +9220,9 @@
         <p:txBody>
           <a:bodyPr rtlCol="0" anchor="ctr"/>
           <a:lstStyle/>
-          <a:p/>
+          <a:p>
+            <a:endParaRPr/>
+          </a:p>
         </p:txBody>
       </p:sp>
       <p:sp>
@@ -9306,7 +9242,7 @@
           <a:noFill/>
         </p:spPr>
         <p:txBody>
-          <a:bodyPr wrap="square" lIns="45720" rIns="45720" tIns="18288" bIns="18288" anchor="t">
+          <a:bodyPr wrap="square" lIns="45720" tIns="18288" rIns="45720" bIns="18288" anchor="t">
             <a:spAutoFit/>
           </a:bodyPr>
           <a:lstStyle/>
@@ -9348,7 +9284,7 @@
           <a:noFill/>
         </p:spPr>
         <p:txBody>
-          <a:bodyPr wrap="square" lIns="45720" rIns="45720" tIns="18288" bIns="18288" anchor="t">
+          <a:bodyPr wrap="square" lIns="45720" tIns="18288" rIns="45720" bIns="18288" anchor="t">
             <a:spAutoFit/>
           </a:bodyPr>
           <a:lstStyle/>
@@ -9382,7 +9318,7 @@
 </file>
 
 <file path=ppt/slides/slide12.xml><?xml version="1.0" encoding="utf-8"?>
-<p:sld xmlns:a="http://schemas.openxmlformats.org/drawingml/2006/main" xmlns:p="http://schemas.openxmlformats.org/presentationml/2006/main" xmlns:r="http://schemas.openxmlformats.org/officeDocument/2006/relationships">
+<p:sld xmlns:a="http://schemas.openxmlformats.org/drawingml/2006/main" xmlns:r="http://schemas.openxmlformats.org/officeDocument/2006/relationships" xmlns:p="http://schemas.openxmlformats.org/presentationml/2006/main">
   <p:cSld>
     <p:spTree>
       <p:nvGrpSpPr>
@@ -9390,7 +9326,14 @@
         <p:cNvGrpSpPr/>
         <p:nvPr/>
       </p:nvGrpSpPr>
-      <p:grpSpPr/>
+      <p:grpSpPr>
+        <a:xfrm>
+          <a:off x="0" y="0"/>
+          <a:ext cx="0" cy="0"/>
+          <a:chOff x="0" y="0"/>
+          <a:chExt cx="0" cy="0"/>
+        </a:xfrm>
+      </p:grpSpPr>
       <p:sp>
         <p:nvSpPr>
           <p:cNvPr id="2" name="Rectangle 1"/>
@@ -9430,7 +9373,9 @@
         <p:txBody>
           <a:bodyPr rtlCol="0" anchor="ctr"/>
           <a:lstStyle/>
-          <a:p/>
+          <a:p>
+            <a:endParaRPr/>
+          </a:p>
         </p:txBody>
       </p:sp>
       <p:sp>
@@ -9450,7 +9395,7 @@
           <a:noFill/>
         </p:spPr>
         <p:txBody>
-          <a:bodyPr wrap="square" lIns="45720" rIns="45720" tIns="18288" bIns="18288" anchor="t">
+          <a:bodyPr wrap="square" lIns="45720" tIns="18288" rIns="45720" bIns="18288" anchor="t">
             <a:spAutoFit/>
           </a:bodyPr>
           <a:lstStyle/>
@@ -9492,7 +9437,7 @@
           <a:noFill/>
         </p:spPr>
         <p:txBody>
-          <a:bodyPr wrap="square" lIns="45720" rIns="45720" tIns="18288" bIns="18288" anchor="t">
+          <a:bodyPr wrap="square" lIns="45720" tIns="18288" rIns="45720" bIns="18288" anchor="t">
             <a:spAutoFit/>
           </a:bodyPr>
           <a:lstStyle/>
@@ -9560,6 +9505,7 @@
           <a:lstStyle/>
           <a:p>
             <a:pPr algn="ctr"/>
+            <a:endParaRPr/>
           </a:p>
         </p:txBody>
       </p:sp>
@@ -9602,7 +9548,9 @@
         <p:txBody>
           <a:bodyPr rtlCol="0" anchor="ctr"/>
           <a:lstStyle/>
-          <a:p/>
+          <a:p>
+            <a:endParaRPr/>
+          </a:p>
         </p:txBody>
       </p:sp>
       <p:sp>
@@ -9645,6 +9593,7 @@
           <a:lstStyle/>
           <a:p>
             <a:pPr algn="ctr"/>
+            <a:endParaRPr/>
           </a:p>
         </p:txBody>
       </p:sp>
@@ -9665,7 +9614,7 @@
           <a:noFill/>
         </p:spPr>
         <p:txBody>
-          <a:bodyPr wrap="square" lIns="45720" rIns="45720" tIns="18288" bIns="18288" anchor="t">
+          <a:bodyPr wrap="square" lIns="45720" tIns="18288" rIns="45720" bIns="18288" anchor="t">
             <a:spAutoFit/>
           </a:bodyPr>
           <a:lstStyle/>
@@ -9707,7 +9656,7 @@
           <a:noFill/>
         </p:spPr>
         <p:txBody>
-          <a:bodyPr wrap="square" lIns="45720" rIns="45720" tIns="18288" bIns="18288" anchor="ctr">
+          <a:bodyPr wrap="square" lIns="45720" tIns="18288" rIns="45720" bIns="18288" anchor="ctr">
             <a:spAutoFit/>
           </a:bodyPr>
           <a:lstStyle/>
@@ -9771,7 +9720,9 @@
         <p:txBody>
           <a:bodyPr rtlCol="0" anchor="ctr"/>
           <a:lstStyle/>
-          <a:p/>
+          <a:p>
+            <a:endParaRPr/>
+          </a:p>
         </p:txBody>
       </p:sp>
       <p:sp>
@@ -9791,7 +9742,7 @@
           <a:noFill/>
         </p:spPr>
         <p:txBody>
-          <a:bodyPr wrap="square" lIns="45720" rIns="45720" tIns="18288" bIns="18288" anchor="ctr">
+          <a:bodyPr wrap="square" lIns="45720" tIns="18288" rIns="45720" bIns="18288" anchor="ctr">
             <a:spAutoFit/>
           </a:bodyPr>
           <a:lstStyle/>
@@ -9859,6 +9810,7 @@
           <a:lstStyle/>
           <a:p>
             <a:pPr algn="ctr"/>
+            <a:endParaRPr/>
           </a:p>
         </p:txBody>
       </p:sp>
@@ -9901,7 +9853,9 @@
         <p:txBody>
           <a:bodyPr rtlCol="0" anchor="ctr"/>
           <a:lstStyle/>
-          <a:p/>
+          <a:p>
+            <a:endParaRPr/>
+          </a:p>
         </p:txBody>
       </p:sp>
       <p:sp>
@@ -9944,6 +9898,7 @@
           <a:lstStyle/>
           <a:p>
             <a:pPr algn="ctr"/>
+            <a:endParaRPr/>
           </a:p>
         </p:txBody>
       </p:sp>
@@ -9964,7 +9919,7 @@
           <a:noFill/>
         </p:spPr>
         <p:txBody>
-          <a:bodyPr wrap="square" lIns="45720" rIns="45720" tIns="18288" bIns="18288" anchor="t">
+          <a:bodyPr wrap="square" lIns="45720" tIns="18288" rIns="45720" bIns="18288" anchor="t">
             <a:spAutoFit/>
           </a:bodyPr>
           <a:lstStyle/>
@@ -10006,7 +9961,7 @@
           <a:noFill/>
         </p:spPr>
         <p:txBody>
-          <a:bodyPr wrap="square" lIns="45720" rIns="45720" tIns="18288" bIns="18288" anchor="ctr">
+          <a:bodyPr wrap="square" lIns="45720" tIns="18288" rIns="45720" bIns="18288" anchor="ctr">
             <a:spAutoFit/>
           </a:bodyPr>
           <a:lstStyle/>
@@ -10070,7 +10025,9 @@
         <p:txBody>
           <a:bodyPr rtlCol="0" anchor="ctr"/>
           <a:lstStyle/>
-          <a:p/>
+          <a:p>
+            <a:endParaRPr/>
+          </a:p>
         </p:txBody>
       </p:sp>
       <p:sp>
@@ -10090,7 +10047,7 @@
           <a:noFill/>
         </p:spPr>
         <p:txBody>
-          <a:bodyPr wrap="square" lIns="45720" rIns="45720" tIns="18288" bIns="18288" anchor="ctr">
+          <a:bodyPr wrap="square" lIns="45720" tIns="18288" rIns="45720" bIns="18288" anchor="ctr">
             <a:spAutoFit/>
           </a:bodyPr>
           <a:lstStyle/>
@@ -10158,6 +10115,7 @@
           <a:lstStyle/>
           <a:p>
             <a:pPr algn="ctr"/>
+            <a:endParaRPr/>
           </a:p>
         </p:txBody>
       </p:sp>
@@ -10200,7 +10158,9 @@
         <p:txBody>
           <a:bodyPr rtlCol="0" anchor="ctr"/>
           <a:lstStyle/>
-          <a:p/>
+          <a:p>
+            <a:endParaRPr/>
+          </a:p>
         </p:txBody>
       </p:sp>
       <p:sp>
@@ -10243,6 +10203,7 @@
           <a:lstStyle/>
           <a:p>
             <a:pPr algn="ctr"/>
+            <a:endParaRPr/>
           </a:p>
         </p:txBody>
       </p:sp>
@@ -10263,7 +10224,7 @@
           <a:noFill/>
         </p:spPr>
         <p:txBody>
-          <a:bodyPr wrap="square" lIns="45720" rIns="45720" tIns="18288" bIns="18288" anchor="t">
+          <a:bodyPr wrap="square" lIns="45720" tIns="18288" rIns="45720" bIns="18288" anchor="t">
             <a:spAutoFit/>
           </a:bodyPr>
           <a:lstStyle/>
@@ -10305,7 +10266,7 @@
           <a:noFill/>
         </p:spPr>
         <p:txBody>
-          <a:bodyPr wrap="square" lIns="45720" rIns="45720" tIns="18288" bIns="18288" anchor="ctr">
+          <a:bodyPr wrap="square" lIns="45720" tIns="18288" rIns="45720" bIns="18288" anchor="ctr">
             <a:spAutoFit/>
           </a:bodyPr>
           <a:lstStyle/>
@@ -10369,7 +10330,9 @@
         <p:txBody>
           <a:bodyPr rtlCol="0" anchor="ctr"/>
           <a:lstStyle/>
-          <a:p/>
+          <a:p>
+            <a:endParaRPr/>
+          </a:p>
         </p:txBody>
       </p:sp>
       <p:sp>
@@ -10389,7 +10352,7 @@
           <a:noFill/>
         </p:spPr>
         <p:txBody>
-          <a:bodyPr wrap="square" lIns="45720" rIns="45720" tIns="18288" bIns="18288" anchor="ctr">
+          <a:bodyPr wrap="square" lIns="45720" tIns="18288" rIns="45720" bIns="18288" anchor="ctr">
             <a:spAutoFit/>
           </a:bodyPr>
           <a:lstStyle/>
@@ -10457,6 +10420,7 @@
           <a:lstStyle/>
           <a:p>
             <a:pPr algn="ctr"/>
+            <a:endParaRPr/>
           </a:p>
         </p:txBody>
       </p:sp>
@@ -10499,7 +10463,9 @@
         <p:txBody>
           <a:bodyPr rtlCol="0" anchor="ctr"/>
           <a:lstStyle/>
-          <a:p/>
+          <a:p>
+            <a:endParaRPr/>
+          </a:p>
         </p:txBody>
       </p:sp>
       <p:sp>
@@ -10542,6 +10508,7 @@
           <a:lstStyle/>
           <a:p>
             <a:pPr algn="ctr"/>
+            <a:endParaRPr/>
           </a:p>
         </p:txBody>
       </p:sp>
@@ -10562,7 +10529,7 @@
           <a:noFill/>
         </p:spPr>
         <p:txBody>
-          <a:bodyPr wrap="square" lIns="45720" rIns="45720" tIns="18288" bIns="18288" anchor="t">
+          <a:bodyPr wrap="square" lIns="45720" tIns="18288" rIns="45720" bIns="18288" anchor="t">
             <a:spAutoFit/>
           </a:bodyPr>
           <a:lstStyle/>
@@ -10604,7 +10571,7 @@
           <a:noFill/>
         </p:spPr>
         <p:txBody>
-          <a:bodyPr wrap="square" lIns="45720" rIns="45720" tIns="18288" bIns="18288" anchor="ctr">
+          <a:bodyPr wrap="square" lIns="45720" tIns="18288" rIns="45720" bIns="18288" anchor="ctr">
             <a:spAutoFit/>
           </a:bodyPr>
           <a:lstStyle/>
@@ -10668,7 +10635,9 @@
         <p:txBody>
           <a:bodyPr rtlCol="0" anchor="ctr"/>
           <a:lstStyle/>
-          <a:p/>
+          <a:p>
+            <a:endParaRPr/>
+          </a:p>
         </p:txBody>
       </p:sp>
       <p:sp>
@@ -10688,7 +10657,7 @@
           <a:noFill/>
         </p:spPr>
         <p:txBody>
-          <a:bodyPr wrap="square" lIns="45720" rIns="45720" tIns="18288" bIns="18288" anchor="ctr">
+          <a:bodyPr wrap="square" lIns="45720" tIns="18288" rIns="45720" bIns="18288" anchor="ctr">
             <a:spAutoFit/>
           </a:bodyPr>
           <a:lstStyle/>
@@ -10756,6 +10725,7 @@
           <a:lstStyle/>
           <a:p>
             <a:pPr algn="ctr"/>
+            <a:endParaRPr/>
           </a:p>
         </p:txBody>
       </p:sp>
@@ -10798,7 +10768,9 @@
         <p:txBody>
           <a:bodyPr rtlCol="0" anchor="ctr"/>
           <a:lstStyle/>
-          <a:p/>
+          <a:p>
+            <a:endParaRPr/>
+          </a:p>
         </p:txBody>
       </p:sp>
       <p:sp>
@@ -10841,6 +10813,7 @@
           <a:lstStyle/>
           <a:p>
             <a:pPr algn="ctr"/>
+            <a:endParaRPr/>
           </a:p>
         </p:txBody>
       </p:sp>
@@ -10861,7 +10834,7 @@
           <a:noFill/>
         </p:spPr>
         <p:txBody>
-          <a:bodyPr wrap="square" lIns="45720" rIns="45720" tIns="18288" bIns="18288" anchor="t">
+          <a:bodyPr wrap="square" lIns="45720" tIns="18288" rIns="45720" bIns="18288" anchor="t">
             <a:spAutoFit/>
           </a:bodyPr>
           <a:lstStyle/>
@@ -10903,7 +10876,7 @@
           <a:noFill/>
         </p:spPr>
         <p:txBody>
-          <a:bodyPr wrap="square" lIns="45720" rIns="45720" tIns="18288" bIns="18288" anchor="ctr">
+          <a:bodyPr wrap="square" lIns="45720" tIns="18288" rIns="45720" bIns="18288" anchor="ctr">
             <a:spAutoFit/>
           </a:bodyPr>
           <a:lstStyle/>
@@ -10967,7 +10940,9 @@
         <p:txBody>
           <a:bodyPr rtlCol="0" anchor="ctr"/>
           <a:lstStyle/>
-          <a:p/>
+          <a:p>
+            <a:endParaRPr/>
+          </a:p>
         </p:txBody>
       </p:sp>
       <p:sp>
@@ -10987,7 +10962,7 @@
           <a:noFill/>
         </p:spPr>
         <p:txBody>
-          <a:bodyPr wrap="square" lIns="45720" rIns="45720" tIns="18288" bIns="18288" anchor="ctr">
+          <a:bodyPr wrap="square" lIns="45720" tIns="18288" rIns="45720" bIns="18288" anchor="ctr">
             <a:spAutoFit/>
           </a:bodyPr>
           <a:lstStyle/>
@@ -11051,7 +11026,9 @@
         <p:txBody>
           <a:bodyPr rtlCol="0" anchor="ctr"/>
           <a:lstStyle/>
-          <a:p/>
+          <a:p>
+            <a:endParaRPr/>
+          </a:p>
         </p:txBody>
       </p:sp>
       <p:sp>
@@ -11071,7 +11048,7 @@
           <a:noFill/>
         </p:spPr>
         <p:txBody>
-          <a:bodyPr wrap="square" lIns="45720" rIns="45720" tIns="18288" bIns="18288" anchor="t">
+          <a:bodyPr wrap="square" lIns="45720" tIns="18288" rIns="45720" bIns="18288" anchor="t">
             <a:spAutoFit/>
           </a:bodyPr>
           <a:lstStyle/>
@@ -11113,7 +11090,7 @@
           <a:noFill/>
         </p:spPr>
         <p:txBody>
-          <a:bodyPr wrap="square" lIns="45720" rIns="45720" tIns="18288" bIns="18288" anchor="t">
+          <a:bodyPr wrap="square" lIns="45720" tIns="18288" rIns="45720" bIns="18288" anchor="t">
             <a:spAutoFit/>
           </a:bodyPr>
           <a:lstStyle/>
@@ -11147,7 +11124,7 @@
 </file>
 
 <file path=ppt/slides/slide13.xml><?xml version="1.0" encoding="utf-8"?>
-<p:sld xmlns:a="http://schemas.openxmlformats.org/drawingml/2006/main" xmlns:p="http://schemas.openxmlformats.org/presentationml/2006/main" xmlns:r="http://schemas.openxmlformats.org/officeDocument/2006/relationships">
+<p:sld xmlns:a="http://schemas.openxmlformats.org/drawingml/2006/main" xmlns:r="http://schemas.openxmlformats.org/officeDocument/2006/relationships" xmlns:p="http://schemas.openxmlformats.org/presentationml/2006/main">
   <p:cSld>
     <p:spTree>
       <p:nvGrpSpPr>
@@ -11155,7 +11132,14 @@
         <p:cNvGrpSpPr/>
         <p:nvPr/>
       </p:nvGrpSpPr>
-      <p:grpSpPr/>
+      <p:grpSpPr>
+        <a:xfrm>
+          <a:off x="0" y="0"/>
+          <a:ext cx="0" cy="0"/>
+          <a:chOff x="0" y="0"/>
+          <a:chExt cx="0" cy="0"/>
+        </a:xfrm>
+      </p:grpSpPr>
       <p:sp>
         <p:nvSpPr>
           <p:cNvPr id="2" name="Rectangle 1"/>
@@ -11195,7 +11179,9 @@
         <p:txBody>
           <a:bodyPr rtlCol="0" anchor="ctr"/>
           <a:lstStyle/>
-          <a:p/>
+          <a:p>
+            <a:endParaRPr/>
+          </a:p>
         </p:txBody>
       </p:sp>
       <p:sp>
@@ -11215,7 +11201,7 @@
           <a:noFill/>
         </p:spPr>
         <p:txBody>
-          <a:bodyPr wrap="square" lIns="45720" rIns="45720" tIns="18288" bIns="18288" anchor="t">
+          <a:bodyPr wrap="square" lIns="45720" tIns="18288" rIns="45720" bIns="18288" anchor="t">
             <a:spAutoFit/>
           </a:bodyPr>
           <a:lstStyle/>
@@ -11257,7 +11243,7 @@
           <a:noFill/>
         </p:spPr>
         <p:txBody>
-          <a:bodyPr wrap="square" lIns="45720" rIns="45720" tIns="18288" bIns="18288" anchor="t">
+          <a:bodyPr wrap="square" lIns="45720" tIns="18288" rIns="45720" bIns="18288" anchor="t">
             <a:spAutoFit/>
           </a:bodyPr>
           <a:lstStyle/>
@@ -11327,6 +11313,7 @@
           <a:lstStyle/>
           <a:p>
             <a:pPr algn="ctr"/>
+            <a:endParaRPr/>
           </a:p>
         </p:txBody>
       </p:sp>
@@ -11369,7 +11356,9 @@
         <p:txBody>
           <a:bodyPr rtlCol="0" anchor="ctr"/>
           <a:lstStyle/>
-          <a:p/>
+          <a:p>
+            <a:endParaRPr/>
+          </a:p>
         </p:txBody>
       </p:sp>
       <p:sp>
@@ -11389,7 +11378,7 @@
           <a:noFill/>
         </p:spPr>
         <p:txBody>
-          <a:bodyPr wrap="square" lIns="45720" rIns="45720" tIns="18288" bIns="18288" anchor="t">
+          <a:bodyPr wrap="square" lIns="45720" tIns="18288" rIns="45720" bIns="18288" anchor="t">
             <a:spAutoFit/>
           </a:bodyPr>
           <a:lstStyle/>
@@ -11453,7 +11442,9 @@
         <p:txBody>
           <a:bodyPr rtlCol="0" anchor="ctr"/>
           <a:lstStyle/>
-          <a:p/>
+          <a:p>
+            <a:endParaRPr/>
+          </a:p>
         </p:txBody>
       </p:sp>
       <p:sp>
@@ -11473,7 +11464,7 @@
           <a:noFill/>
         </p:spPr>
         <p:txBody>
-          <a:bodyPr wrap="square" lIns="45720" rIns="45720" tIns="18288" bIns="18288" anchor="t">
+          <a:bodyPr wrap="square" lIns="45720" tIns="18288" rIns="45720" bIns="18288" anchor="t">
             <a:spAutoFit/>
           </a:bodyPr>
           <a:lstStyle/>
@@ -11537,7 +11528,9 @@
         <p:txBody>
           <a:bodyPr rtlCol="0" anchor="ctr"/>
           <a:lstStyle/>
-          <a:p/>
+          <a:p>
+            <a:endParaRPr/>
+          </a:p>
         </p:txBody>
       </p:sp>
       <p:sp>
@@ -11557,7 +11550,7 @@
           <a:noFill/>
         </p:spPr>
         <p:txBody>
-          <a:bodyPr wrap="square" lIns="45720" rIns="45720" tIns="18288" bIns="18288" anchor="t">
+          <a:bodyPr wrap="square" lIns="45720" tIns="18288" rIns="45720" bIns="18288" anchor="t">
             <a:spAutoFit/>
           </a:bodyPr>
           <a:lstStyle/>
@@ -11621,7 +11614,9 @@
         <p:txBody>
           <a:bodyPr rtlCol="0" anchor="ctr"/>
           <a:lstStyle/>
-          <a:p/>
+          <a:p>
+            <a:endParaRPr/>
+          </a:p>
         </p:txBody>
       </p:sp>
       <p:sp>
@@ -11641,7 +11636,7 @@
           <a:noFill/>
         </p:spPr>
         <p:txBody>
-          <a:bodyPr wrap="square" lIns="45720" rIns="45720" tIns="18288" bIns="18288" anchor="t">
+          <a:bodyPr wrap="square" lIns="45720" tIns="18288" rIns="45720" bIns="18288" anchor="t">
             <a:spAutoFit/>
           </a:bodyPr>
           <a:lstStyle/>
@@ -11711,6 +11706,7 @@
           <a:lstStyle/>
           <a:p>
             <a:pPr algn="ctr"/>
+            <a:endParaRPr/>
           </a:p>
         </p:txBody>
       </p:sp>
@@ -11753,7 +11749,9 @@
         <p:txBody>
           <a:bodyPr rtlCol="0" anchor="ctr"/>
           <a:lstStyle/>
-          <a:p/>
+          <a:p>
+            <a:endParaRPr/>
+          </a:p>
         </p:txBody>
       </p:sp>
       <p:sp>
@@ -11773,7 +11771,7 @@
           <a:noFill/>
         </p:spPr>
         <p:txBody>
-          <a:bodyPr wrap="square" lIns="45720" rIns="45720" tIns="18288" bIns="18288" anchor="t">
+          <a:bodyPr wrap="square" lIns="45720" tIns="18288" rIns="45720" bIns="18288" anchor="t">
             <a:spAutoFit/>
           </a:bodyPr>
           <a:lstStyle/>
@@ -11837,7 +11835,9 @@
         <p:txBody>
           <a:bodyPr rtlCol="0" anchor="ctr"/>
           <a:lstStyle/>
-          <a:p/>
+          <a:p>
+            <a:endParaRPr/>
+          </a:p>
         </p:txBody>
       </p:sp>
       <p:sp>
@@ -11857,7 +11857,7 @@
           <a:noFill/>
         </p:spPr>
         <p:txBody>
-          <a:bodyPr wrap="square" lIns="45720" rIns="45720" tIns="18288" bIns="18288" anchor="t">
+          <a:bodyPr wrap="square" lIns="45720" tIns="18288" rIns="45720" bIns="18288" anchor="t">
             <a:spAutoFit/>
           </a:bodyPr>
           <a:lstStyle/>
@@ -11921,7 +11921,9 @@
         <p:txBody>
           <a:bodyPr rtlCol="0" anchor="ctr"/>
           <a:lstStyle/>
-          <a:p/>
+          <a:p>
+            <a:endParaRPr/>
+          </a:p>
         </p:txBody>
       </p:sp>
       <p:sp>
@@ -11941,7 +11943,7 @@
           <a:noFill/>
         </p:spPr>
         <p:txBody>
-          <a:bodyPr wrap="square" lIns="45720" rIns="45720" tIns="18288" bIns="18288" anchor="t">
+          <a:bodyPr wrap="square" lIns="45720" tIns="18288" rIns="45720" bIns="18288" anchor="t">
             <a:spAutoFit/>
           </a:bodyPr>
           <a:lstStyle/>
@@ -12005,7 +12007,9 @@
         <p:txBody>
           <a:bodyPr rtlCol="0" anchor="ctr"/>
           <a:lstStyle/>
-          <a:p/>
+          <a:p>
+            <a:endParaRPr/>
+          </a:p>
         </p:txBody>
       </p:sp>
       <p:sp>
@@ -12025,7 +12029,7 @@
           <a:noFill/>
         </p:spPr>
         <p:txBody>
-          <a:bodyPr wrap="square" lIns="45720" rIns="45720" tIns="18288" bIns="18288" anchor="t">
+          <a:bodyPr wrap="square" lIns="45720" tIns="18288" rIns="45720" bIns="18288" anchor="t">
             <a:spAutoFit/>
           </a:bodyPr>
           <a:lstStyle/>
@@ -12095,6 +12099,7 @@
           <a:lstStyle/>
           <a:p>
             <a:pPr algn="ctr"/>
+            <a:endParaRPr/>
           </a:p>
         </p:txBody>
       </p:sp>
@@ -12137,7 +12142,9 @@
         <p:txBody>
           <a:bodyPr rtlCol="0" anchor="ctr"/>
           <a:lstStyle/>
-          <a:p/>
+          <a:p>
+            <a:endParaRPr/>
+          </a:p>
         </p:txBody>
       </p:sp>
       <p:sp>
@@ -12157,7 +12164,7 @@
           <a:noFill/>
         </p:spPr>
         <p:txBody>
-          <a:bodyPr wrap="square" lIns="45720" rIns="45720" tIns="18288" bIns="18288" anchor="t">
+          <a:bodyPr wrap="square" lIns="45720" tIns="18288" rIns="45720" bIns="18288" anchor="t">
             <a:spAutoFit/>
           </a:bodyPr>
           <a:lstStyle/>
@@ -12221,7 +12228,9 @@
         <p:txBody>
           <a:bodyPr rtlCol="0" anchor="ctr"/>
           <a:lstStyle/>
-          <a:p/>
+          <a:p>
+            <a:endParaRPr/>
+          </a:p>
         </p:txBody>
       </p:sp>
       <p:sp>
@@ -12241,7 +12250,7 @@
           <a:noFill/>
         </p:spPr>
         <p:txBody>
-          <a:bodyPr wrap="square" lIns="45720" rIns="45720" tIns="18288" bIns="18288" anchor="t">
+          <a:bodyPr wrap="square" lIns="45720" tIns="18288" rIns="45720" bIns="18288" anchor="t">
             <a:spAutoFit/>
           </a:bodyPr>
           <a:lstStyle/>
@@ -12305,7 +12314,9 @@
         <p:txBody>
           <a:bodyPr rtlCol="0" anchor="ctr"/>
           <a:lstStyle/>
-          <a:p/>
+          <a:p>
+            <a:endParaRPr/>
+          </a:p>
         </p:txBody>
       </p:sp>
       <p:sp>
@@ -12325,7 +12336,7 @@
           <a:noFill/>
         </p:spPr>
         <p:txBody>
-          <a:bodyPr wrap="square" lIns="45720" rIns="45720" tIns="18288" bIns="18288" anchor="t">
+          <a:bodyPr wrap="square" lIns="45720" tIns="18288" rIns="45720" bIns="18288" anchor="t">
             <a:spAutoFit/>
           </a:bodyPr>
           <a:lstStyle/>
@@ -12389,7 +12400,9 @@
         <p:txBody>
           <a:bodyPr rtlCol="0" anchor="ctr"/>
           <a:lstStyle/>
-          <a:p/>
+          <a:p>
+            <a:endParaRPr/>
+          </a:p>
         </p:txBody>
       </p:sp>
       <p:sp>
@@ -12409,7 +12422,7 @@
           <a:noFill/>
         </p:spPr>
         <p:txBody>
-          <a:bodyPr wrap="square" lIns="45720" rIns="45720" tIns="18288" bIns="18288" anchor="t">
+          <a:bodyPr wrap="square" lIns="45720" tIns="18288" rIns="45720" bIns="18288" anchor="t">
             <a:spAutoFit/>
           </a:bodyPr>
           <a:lstStyle/>
@@ -12473,7 +12486,9 @@
         <p:txBody>
           <a:bodyPr rtlCol="0" anchor="ctr"/>
           <a:lstStyle/>
-          <a:p/>
+          <a:p>
+            <a:endParaRPr/>
+          </a:p>
         </p:txBody>
       </p:sp>
       <p:sp>
@@ -12493,7 +12508,7 @@
           <a:noFill/>
         </p:spPr>
         <p:txBody>
-          <a:bodyPr wrap="square" lIns="45720" rIns="45720" tIns="18288" bIns="18288" anchor="t">
+          <a:bodyPr wrap="square" lIns="45720" tIns="18288" rIns="45720" bIns="18288" anchor="t">
             <a:spAutoFit/>
           </a:bodyPr>
           <a:lstStyle/>
@@ -12535,7 +12550,7 @@
           <a:noFill/>
         </p:spPr>
         <p:txBody>
-          <a:bodyPr wrap="square" lIns="45720" rIns="45720" tIns="18288" bIns="18288" anchor="t">
+          <a:bodyPr wrap="square" lIns="45720" tIns="18288" rIns="45720" bIns="18288" anchor="t">
             <a:spAutoFit/>
           </a:bodyPr>
           <a:lstStyle/>
@@ -12569,7 +12584,7 @@
 </file>
 
 <file path=ppt/slides/slide14.xml><?xml version="1.0" encoding="utf-8"?>
-<p:sld xmlns:a="http://schemas.openxmlformats.org/drawingml/2006/main" xmlns:p="http://schemas.openxmlformats.org/presentationml/2006/main" xmlns:r="http://schemas.openxmlformats.org/officeDocument/2006/relationships">
+<p:sld xmlns:a="http://schemas.openxmlformats.org/drawingml/2006/main" xmlns:r="http://schemas.openxmlformats.org/officeDocument/2006/relationships" xmlns:p="http://schemas.openxmlformats.org/presentationml/2006/main">
   <p:cSld>
     <p:spTree>
       <p:nvGrpSpPr>
@@ -12577,7 +12592,14 @@
         <p:cNvGrpSpPr/>
         <p:nvPr/>
       </p:nvGrpSpPr>
-      <p:grpSpPr/>
+      <p:grpSpPr>
+        <a:xfrm>
+          <a:off x="0" y="0"/>
+          <a:ext cx="0" cy="0"/>
+          <a:chOff x="0" y="0"/>
+          <a:chExt cx="0" cy="0"/>
+        </a:xfrm>
+      </p:grpSpPr>
       <p:sp>
         <p:nvSpPr>
           <p:cNvPr id="2" name="Rectangle 1"/>
@@ -12617,7 +12639,9 @@
         <p:txBody>
           <a:bodyPr rtlCol="0" anchor="ctr"/>
           <a:lstStyle/>
-          <a:p/>
+          <a:p>
+            <a:endParaRPr/>
+          </a:p>
         </p:txBody>
       </p:sp>
       <p:sp>
@@ -12659,7 +12683,9 @@
         <p:txBody>
           <a:bodyPr rtlCol="0" anchor="ctr"/>
           <a:lstStyle/>
-          <a:p/>
+          <a:p>
+            <a:endParaRPr/>
+          </a:p>
         </p:txBody>
       </p:sp>
       <p:sp>
@@ -12679,7 +12705,7 @@
           <a:noFill/>
         </p:spPr>
         <p:txBody>
-          <a:bodyPr wrap="square" lIns="45720" rIns="45720" tIns="18288" bIns="18288" anchor="t">
+          <a:bodyPr wrap="square" lIns="45720" tIns="18288" rIns="45720" bIns="18288" anchor="t">
             <a:spAutoFit/>
           </a:bodyPr>
           <a:lstStyle/>
@@ -12721,7 +12747,7 @@
           <a:noFill/>
         </p:spPr>
         <p:txBody>
-          <a:bodyPr wrap="square" lIns="45720" rIns="45720" tIns="18288" bIns="18288" anchor="t">
+          <a:bodyPr wrap="square" lIns="45720" tIns="18288" rIns="45720" bIns="18288" anchor="t">
             <a:spAutoFit/>
           </a:bodyPr>
           <a:lstStyle/>
@@ -12763,7 +12789,7 @@
           <a:noFill/>
         </p:spPr>
         <p:txBody>
-          <a:bodyPr wrap="square" lIns="45720" rIns="45720" tIns="18288" bIns="18288" anchor="t">
+          <a:bodyPr wrap="square" lIns="45720" tIns="18288" rIns="45720" bIns="18288" anchor="t">
             <a:spAutoFit/>
           </a:bodyPr>
           <a:lstStyle/>
@@ -12805,7 +12831,7 @@
           <a:noFill/>
         </p:spPr>
         <p:txBody>
-          <a:bodyPr wrap="square" lIns="45720" rIns="45720" tIns="18288" bIns="18288" anchor="t">
+          <a:bodyPr wrap="square" lIns="45720" tIns="18288" rIns="45720" bIns="18288" anchor="t">
             <a:spAutoFit/>
           </a:bodyPr>
           <a:lstStyle/>
@@ -12839,7 +12865,7 @@
 </file>
 
 <file path=ppt/slides/slide15.xml><?xml version="1.0" encoding="utf-8"?>
-<p:sld xmlns:a="http://schemas.openxmlformats.org/drawingml/2006/main" xmlns:p="http://schemas.openxmlformats.org/presentationml/2006/main" xmlns:r="http://schemas.openxmlformats.org/officeDocument/2006/relationships">
+<p:sld xmlns:a="http://schemas.openxmlformats.org/drawingml/2006/main" xmlns:r="http://schemas.openxmlformats.org/officeDocument/2006/relationships" xmlns:p="http://schemas.openxmlformats.org/presentationml/2006/main">
   <p:cSld>
     <p:spTree>
       <p:nvGrpSpPr>
@@ -12847,7 +12873,14 @@
         <p:cNvGrpSpPr/>
         <p:nvPr/>
       </p:nvGrpSpPr>
-      <p:grpSpPr/>
+      <p:grpSpPr>
+        <a:xfrm>
+          <a:off x="0" y="0"/>
+          <a:ext cx="0" cy="0"/>
+          <a:chOff x="0" y="0"/>
+          <a:chExt cx="0" cy="0"/>
+        </a:xfrm>
+      </p:grpSpPr>
       <p:sp>
         <p:nvSpPr>
           <p:cNvPr id="2" name="Rectangle 1"/>
@@ -12887,7 +12920,9 @@
         <p:txBody>
           <a:bodyPr rtlCol="0" anchor="ctr"/>
           <a:lstStyle/>
-          <a:p/>
+          <a:p>
+            <a:endParaRPr/>
+          </a:p>
         </p:txBody>
       </p:sp>
       <p:sp>
@@ -12907,7 +12942,7 @@
           <a:noFill/>
         </p:spPr>
         <p:txBody>
-          <a:bodyPr wrap="square" lIns="45720" rIns="45720" tIns="18288" bIns="18288" anchor="t">
+          <a:bodyPr wrap="square" lIns="45720" tIns="18288" rIns="45720" bIns="18288" anchor="t">
             <a:spAutoFit/>
           </a:bodyPr>
           <a:lstStyle/>
@@ -12949,7 +12984,7 @@
           <a:noFill/>
         </p:spPr>
         <p:txBody>
-          <a:bodyPr wrap="square" lIns="45720" rIns="45720" tIns="18288" bIns="18288" anchor="t">
+          <a:bodyPr wrap="square" lIns="45720" tIns="18288" rIns="45720" bIns="18288" anchor="t">
             <a:spAutoFit/>
           </a:bodyPr>
           <a:lstStyle/>
@@ -13017,6 +13052,7 @@
           <a:lstStyle/>
           <a:p>
             <a:pPr algn="ctr"/>
+            <a:endParaRPr/>
           </a:p>
         </p:txBody>
       </p:sp>
@@ -13059,7 +13095,9 @@
         <p:txBody>
           <a:bodyPr rtlCol="0" anchor="ctr"/>
           <a:lstStyle/>
-          <a:p/>
+          <a:p>
+            <a:endParaRPr/>
+          </a:p>
         </p:txBody>
       </p:sp>
       <p:sp>
@@ -13079,7 +13117,7 @@
           <a:noFill/>
         </p:spPr>
         <p:txBody>
-          <a:bodyPr wrap="square" lIns="45720" rIns="45720" tIns="18288" bIns="18288" anchor="t">
+          <a:bodyPr wrap="square" lIns="45720" tIns="18288" rIns="45720" bIns="18288" anchor="t">
             <a:spAutoFit/>
           </a:bodyPr>
           <a:lstStyle/>
@@ -13121,7 +13159,7 @@
           <a:noFill/>
         </p:spPr>
         <p:txBody>
-          <a:bodyPr wrap="square" lIns="45720" rIns="45720" tIns="18288" bIns="18288" anchor="t">
+          <a:bodyPr wrap="square" lIns="45720" tIns="18288" rIns="45720" bIns="18288" anchor="t">
             <a:spAutoFit/>
           </a:bodyPr>
           <a:lstStyle/>
@@ -13163,7 +13201,7 @@
           <a:noFill/>
         </p:spPr>
         <p:txBody>
-          <a:bodyPr wrap="square" lIns="45720" rIns="45720" tIns="18288" bIns="18288" anchor="t">
+          <a:bodyPr wrap="square" lIns="45720" tIns="18288" rIns="45720" bIns="18288" anchor="t">
             <a:spAutoFit/>
           </a:bodyPr>
           <a:lstStyle/>
@@ -13227,7 +13265,9 @@
         <p:txBody>
           <a:bodyPr rtlCol="0" anchor="ctr"/>
           <a:lstStyle/>
-          <a:p/>
+          <a:p>
+            <a:endParaRPr/>
+          </a:p>
         </p:txBody>
       </p:sp>
       <p:sp>
@@ -13247,7 +13287,7 @@
           <a:noFill/>
         </p:spPr>
         <p:txBody>
-          <a:bodyPr wrap="square" lIns="45720" rIns="45720" tIns="18288" bIns="18288" anchor="t">
+          <a:bodyPr wrap="square" lIns="45720" tIns="18288" rIns="45720" bIns="18288" anchor="t">
             <a:spAutoFit/>
           </a:bodyPr>
           <a:lstStyle/>
@@ -13315,6 +13355,7 @@
           <a:lstStyle/>
           <a:p>
             <a:pPr algn="ctr"/>
+            <a:endParaRPr/>
           </a:p>
         </p:txBody>
       </p:sp>
@@ -13357,7 +13398,9 @@
         <p:txBody>
           <a:bodyPr rtlCol="0" anchor="ctr"/>
           <a:lstStyle/>
-          <a:p/>
+          <a:p>
+            <a:endParaRPr/>
+          </a:p>
         </p:txBody>
       </p:sp>
       <p:sp>
@@ -13377,7 +13420,7 @@
           <a:noFill/>
         </p:spPr>
         <p:txBody>
-          <a:bodyPr wrap="square" lIns="45720" rIns="45720" tIns="18288" bIns="18288" anchor="t">
+          <a:bodyPr wrap="square" lIns="45720" tIns="18288" rIns="45720" bIns="18288" anchor="t">
             <a:spAutoFit/>
           </a:bodyPr>
           <a:lstStyle/>
@@ -13419,7 +13462,7 @@
           <a:noFill/>
         </p:spPr>
         <p:txBody>
-          <a:bodyPr wrap="square" lIns="45720" rIns="45720" tIns="18288" bIns="18288" anchor="t">
+          <a:bodyPr wrap="square" lIns="45720" tIns="18288" rIns="45720" bIns="18288" anchor="t">
             <a:spAutoFit/>
           </a:bodyPr>
           <a:lstStyle/>
@@ -13461,7 +13504,7 @@
           <a:noFill/>
         </p:spPr>
         <p:txBody>
-          <a:bodyPr wrap="square" lIns="45720" rIns="45720" tIns="18288" bIns="18288" anchor="t">
+          <a:bodyPr wrap="square" lIns="45720" tIns="18288" rIns="45720" bIns="18288" anchor="t">
             <a:spAutoFit/>
           </a:bodyPr>
           <a:lstStyle/>
@@ -13525,7 +13568,9 @@
         <p:txBody>
           <a:bodyPr rtlCol="0" anchor="ctr"/>
           <a:lstStyle/>
-          <a:p/>
+          <a:p>
+            <a:endParaRPr/>
+          </a:p>
         </p:txBody>
       </p:sp>
       <p:sp>
@@ -13545,7 +13590,7 @@
           <a:noFill/>
         </p:spPr>
         <p:txBody>
-          <a:bodyPr wrap="square" lIns="45720" rIns="45720" tIns="18288" bIns="18288" anchor="t">
+          <a:bodyPr wrap="square" lIns="45720" tIns="18288" rIns="45720" bIns="18288" anchor="t">
             <a:spAutoFit/>
           </a:bodyPr>
           <a:lstStyle/>
@@ -13613,6 +13658,7 @@
           <a:lstStyle/>
           <a:p>
             <a:pPr algn="ctr"/>
+            <a:endParaRPr/>
           </a:p>
         </p:txBody>
       </p:sp>
@@ -13655,7 +13701,9 @@
         <p:txBody>
           <a:bodyPr rtlCol="0" anchor="ctr"/>
           <a:lstStyle/>
-          <a:p/>
+          <a:p>
+            <a:endParaRPr/>
+          </a:p>
         </p:txBody>
       </p:sp>
       <p:sp>
@@ -13675,7 +13723,7 @@
           <a:noFill/>
         </p:spPr>
         <p:txBody>
-          <a:bodyPr wrap="square" lIns="45720" rIns="45720" tIns="18288" bIns="18288" anchor="t">
+          <a:bodyPr wrap="square" lIns="45720" tIns="18288" rIns="45720" bIns="18288" anchor="t">
             <a:spAutoFit/>
           </a:bodyPr>
           <a:lstStyle/>
@@ -13717,7 +13765,7 @@
           <a:noFill/>
         </p:spPr>
         <p:txBody>
-          <a:bodyPr wrap="square" lIns="45720" rIns="45720" tIns="18288" bIns="18288" anchor="t">
+          <a:bodyPr wrap="square" lIns="45720" tIns="18288" rIns="45720" bIns="18288" anchor="t">
             <a:spAutoFit/>
           </a:bodyPr>
           <a:lstStyle/>
@@ -13759,7 +13807,7 @@
           <a:noFill/>
         </p:spPr>
         <p:txBody>
-          <a:bodyPr wrap="square" lIns="45720" rIns="45720" tIns="18288" bIns="18288" anchor="t">
+          <a:bodyPr wrap="square" lIns="45720" tIns="18288" rIns="45720" bIns="18288" anchor="t">
             <a:spAutoFit/>
           </a:bodyPr>
           <a:lstStyle/>
@@ -13823,7 +13871,9 @@
         <p:txBody>
           <a:bodyPr rtlCol="0" anchor="ctr"/>
           <a:lstStyle/>
-          <a:p/>
+          <a:p>
+            <a:endParaRPr/>
+          </a:p>
         </p:txBody>
       </p:sp>
       <p:sp>
@@ -13843,7 +13893,7 @@
           <a:noFill/>
         </p:spPr>
         <p:txBody>
-          <a:bodyPr wrap="square" lIns="45720" rIns="45720" tIns="18288" bIns="18288" anchor="t">
+          <a:bodyPr wrap="square" lIns="45720" tIns="18288" rIns="45720" bIns="18288" anchor="t">
             <a:spAutoFit/>
           </a:bodyPr>
           <a:lstStyle/>
@@ -13911,6 +13961,7 @@
           <a:lstStyle/>
           <a:p>
             <a:pPr algn="ctr"/>
+            <a:endParaRPr/>
           </a:p>
         </p:txBody>
       </p:sp>
@@ -13953,7 +14004,9 @@
         <p:txBody>
           <a:bodyPr rtlCol="0" anchor="ctr"/>
           <a:lstStyle/>
-          <a:p/>
+          <a:p>
+            <a:endParaRPr/>
+          </a:p>
         </p:txBody>
       </p:sp>
       <p:sp>
@@ -13973,7 +14026,7 @@
           <a:noFill/>
         </p:spPr>
         <p:txBody>
-          <a:bodyPr wrap="square" lIns="45720" rIns="45720" tIns="18288" bIns="18288" anchor="t">
+          <a:bodyPr wrap="square" lIns="45720" tIns="18288" rIns="45720" bIns="18288" anchor="t">
             <a:spAutoFit/>
           </a:bodyPr>
           <a:lstStyle/>
@@ -14015,7 +14068,7 @@
           <a:noFill/>
         </p:spPr>
         <p:txBody>
-          <a:bodyPr wrap="square" lIns="45720" rIns="45720" tIns="18288" bIns="18288" anchor="t">
+          <a:bodyPr wrap="square" lIns="45720" tIns="18288" rIns="45720" bIns="18288" anchor="t">
             <a:spAutoFit/>
           </a:bodyPr>
           <a:lstStyle/>
@@ -14057,7 +14110,7 @@
           <a:noFill/>
         </p:spPr>
         <p:txBody>
-          <a:bodyPr wrap="square" lIns="45720" rIns="45720" tIns="18288" bIns="18288" anchor="t">
+          <a:bodyPr wrap="square" lIns="45720" tIns="18288" rIns="45720" bIns="18288" anchor="t">
             <a:spAutoFit/>
           </a:bodyPr>
           <a:lstStyle/>
@@ -14121,7 +14174,9 @@
         <p:txBody>
           <a:bodyPr rtlCol="0" anchor="ctr"/>
           <a:lstStyle/>
-          <a:p/>
+          <a:p>
+            <a:endParaRPr/>
+          </a:p>
         </p:txBody>
       </p:sp>
       <p:sp>
@@ -14141,7 +14196,7 @@
           <a:noFill/>
         </p:spPr>
         <p:txBody>
-          <a:bodyPr wrap="square" lIns="45720" rIns="45720" tIns="18288" bIns="18288" anchor="t">
+          <a:bodyPr wrap="square" lIns="45720" tIns="18288" rIns="45720" bIns="18288" anchor="t">
             <a:spAutoFit/>
           </a:bodyPr>
           <a:lstStyle/>
@@ -14209,6 +14264,7 @@
           <a:lstStyle/>
           <a:p>
             <a:pPr algn="ctr"/>
+            <a:endParaRPr/>
           </a:p>
         </p:txBody>
       </p:sp>
@@ -14251,7 +14307,9 @@
         <p:txBody>
           <a:bodyPr rtlCol="0" anchor="ctr"/>
           <a:lstStyle/>
-          <a:p/>
+          <a:p>
+            <a:endParaRPr/>
+          </a:p>
         </p:txBody>
       </p:sp>
       <p:sp>
@@ -14271,7 +14329,7 @@
           <a:noFill/>
         </p:spPr>
         <p:txBody>
-          <a:bodyPr wrap="square" lIns="45720" rIns="45720" tIns="18288" bIns="18288" anchor="t">
+          <a:bodyPr wrap="square" lIns="45720" tIns="18288" rIns="45720" bIns="18288" anchor="t">
             <a:spAutoFit/>
           </a:bodyPr>
           <a:lstStyle/>
@@ -14313,7 +14371,7 @@
           <a:noFill/>
         </p:spPr>
         <p:txBody>
-          <a:bodyPr wrap="square" lIns="45720" rIns="45720" tIns="18288" bIns="18288" anchor="t">
+          <a:bodyPr wrap="square" lIns="45720" tIns="18288" rIns="45720" bIns="18288" anchor="t">
             <a:spAutoFit/>
           </a:bodyPr>
           <a:lstStyle/>
@@ -14355,7 +14413,7 @@
           <a:noFill/>
         </p:spPr>
         <p:txBody>
-          <a:bodyPr wrap="square" lIns="45720" rIns="45720" tIns="18288" bIns="18288" anchor="t">
+          <a:bodyPr wrap="square" lIns="45720" tIns="18288" rIns="45720" bIns="18288" anchor="t">
             <a:spAutoFit/>
           </a:bodyPr>
           <a:lstStyle/>
@@ -14419,7 +14477,9 @@
         <p:txBody>
           <a:bodyPr rtlCol="0" anchor="ctr"/>
           <a:lstStyle/>
-          <a:p/>
+          <a:p>
+            <a:endParaRPr/>
+          </a:p>
         </p:txBody>
       </p:sp>
       <p:sp>
@@ -14439,7 +14499,7 @@
           <a:noFill/>
         </p:spPr>
         <p:txBody>
-          <a:bodyPr wrap="square" lIns="45720" rIns="45720" tIns="18288" bIns="18288" anchor="t">
+          <a:bodyPr wrap="square" lIns="45720" tIns="18288" rIns="45720" bIns="18288" anchor="t">
             <a:spAutoFit/>
           </a:bodyPr>
           <a:lstStyle/>
@@ -14507,6 +14567,7 @@
           <a:lstStyle/>
           <a:p>
             <a:pPr algn="ctr"/>
+            <a:endParaRPr/>
           </a:p>
         </p:txBody>
       </p:sp>
@@ -14549,7 +14610,9 @@
         <p:txBody>
           <a:bodyPr rtlCol="0" anchor="ctr"/>
           <a:lstStyle/>
-          <a:p/>
+          <a:p>
+            <a:endParaRPr/>
+          </a:p>
         </p:txBody>
       </p:sp>
       <p:sp>
@@ -14569,7 +14632,7 @@
           <a:noFill/>
         </p:spPr>
         <p:txBody>
-          <a:bodyPr wrap="square" lIns="45720" rIns="45720" tIns="18288" bIns="18288" anchor="t">
+          <a:bodyPr wrap="square" lIns="45720" tIns="18288" rIns="45720" bIns="18288" anchor="t">
             <a:spAutoFit/>
           </a:bodyPr>
           <a:lstStyle/>
@@ -14611,7 +14674,7 @@
           <a:noFill/>
         </p:spPr>
         <p:txBody>
-          <a:bodyPr wrap="square" lIns="45720" rIns="45720" tIns="18288" bIns="18288" anchor="t">
+          <a:bodyPr wrap="square" lIns="45720" tIns="18288" rIns="45720" bIns="18288" anchor="t">
             <a:spAutoFit/>
           </a:bodyPr>
           <a:lstStyle/>
@@ -14653,7 +14716,7 @@
           <a:noFill/>
         </p:spPr>
         <p:txBody>
-          <a:bodyPr wrap="square" lIns="45720" rIns="45720" tIns="18288" bIns="18288" anchor="t">
+          <a:bodyPr wrap="square" lIns="45720" tIns="18288" rIns="45720" bIns="18288" anchor="t">
             <a:spAutoFit/>
           </a:bodyPr>
           <a:lstStyle/>
@@ -14717,7 +14780,9 @@
         <p:txBody>
           <a:bodyPr rtlCol="0" anchor="ctr"/>
           <a:lstStyle/>
-          <a:p/>
+          <a:p>
+            <a:endParaRPr/>
+          </a:p>
         </p:txBody>
       </p:sp>
       <p:sp>
@@ -14737,7 +14802,7 @@
           <a:noFill/>
         </p:spPr>
         <p:txBody>
-          <a:bodyPr wrap="square" lIns="45720" rIns="45720" tIns="18288" bIns="18288" anchor="t">
+          <a:bodyPr wrap="square" lIns="45720" tIns="18288" rIns="45720" bIns="18288" anchor="t">
             <a:spAutoFit/>
           </a:bodyPr>
           <a:lstStyle/>
@@ -14805,6 +14870,7 @@
           <a:lstStyle/>
           <a:p>
             <a:pPr algn="ctr"/>
+            <a:endParaRPr/>
           </a:p>
         </p:txBody>
       </p:sp>
@@ -14825,7 +14891,7 @@
           <a:noFill/>
         </p:spPr>
         <p:txBody>
-          <a:bodyPr wrap="square" lIns="45720" rIns="45720" tIns="18288" bIns="18288" anchor="t">
+          <a:bodyPr wrap="square" lIns="45720" tIns="18288" rIns="45720" bIns="18288" anchor="t">
             <a:spAutoFit/>
           </a:bodyPr>
           <a:lstStyle/>
@@ -14889,7 +14955,9 @@
         <p:txBody>
           <a:bodyPr rtlCol="0" anchor="ctr"/>
           <a:lstStyle/>
-          <a:p/>
+          <a:p>
+            <a:endParaRPr/>
+          </a:p>
         </p:txBody>
       </p:sp>
       <p:sp>
@@ -14909,7 +14977,7 @@
           <a:noFill/>
         </p:spPr>
         <p:txBody>
-          <a:bodyPr wrap="square" lIns="45720" rIns="45720" tIns="18288" bIns="18288" anchor="t">
+          <a:bodyPr wrap="square" lIns="45720" tIns="18288" rIns="45720" bIns="18288" anchor="t">
             <a:spAutoFit/>
           </a:bodyPr>
           <a:lstStyle/>
@@ -14951,7 +15019,7 @@
           <a:noFill/>
         </p:spPr>
         <p:txBody>
-          <a:bodyPr wrap="square" lIns="45720" rIns="45720" tIns="18288" bIns="18288" anchor="t">
+          <a:bodyPr wrap="square" lIns="45720" tIns="18288" rIns="45720" bIns="18288" anchor="t">
             <a:spAutoFit/>
           </a:bodyPr>
           <a:lstStyle/>
@@ -14985,7 +15053,7 @@
 </file>
 
 <file path=ppt/slides/slide16.xml><?xml version="1.0" encoding="utf-8"?>
-<p:sld xmlns:a="http://schemas.openxmlformats.org/drawingml/2006/main" xmlns:p="http://schemas.openxmlformats.org/presentationml/2006/main" xmlns:r="http://schemas.openxmlformats.org/officeDocument/2006/relationships">
+<p:sld xmlns:a="http://schemas.openxmlformats.org/drawingml/2006/main" xmlns:r="http://schemas.openxmlformats.org/officeDocument/2006/relationships" xmlns:p="http://schemas.openxmlformats.org/presentationml/2006/main">
   <p:cSld>
     <p:spTree>
       <p:nvGrpSpPr>
@@ -14993,7 +15061,14 @@
         <p:cNvGrpSpPr/>
         <p:nvPr/>
       </p:nvGrpSpPr>
-      <p:grpSpPr/>
+      <p:grpSpPr>
+        <a:xfrm>
+          <a:off x="0" y="0"/>
+          <a:ext cx="0" cy="0"/>
+          <a:chOff x="0" y="0"/>
+          <a:chExt cx="0" cy="0"/>
+        </a:xfrm>
+      </p:grpSpPr>
       <p:sp>
         <p:nvSpPr>
           <p:cNvPr id="2" name="Rectangle 1"/>
@@ -15033,7 +15108,9 @@
         <p:txBody>
           <a:bodyPr rtlCol="0" anchor="ctr"/>
           <a:lstStyle/>
-          <a:p/>
+          <a:p>
+            <a:endParaRPr/>
+          </a:p>
         </p:txBody>
       </p:sp>
       <p:sp>
@@ -15075,7 +15152,9 @@
         <p:txBody>
           <a:bodyPr rtlCol="0" anchor="ctr"/>
           <a:lstStyle/>
-          <a:p/>
+          <a:p>
+            <a:endParaRPr/>
+          </a:p>
         </p:txBody>
       </p:sp>
       <p:sp>
@@ -15117,7 +15196,9 @@
         <p:txBody>
           <a:bodyPr rtlCol="0" anchor="ctr"/>
           <a:lstStyle/>
-          <a:p/>
+          <a:p>
+            <a:endParaRPr/>
+          </a:p>
         </p:txBody>
       </p:sp>
       <p:sp>
@@ -15137,7 +15218,7 @@
           <a:noFill/>
         </p:spPr>
         <p:txBody>
-          <a:bodyPr wrap="square" lIns="45720" rIns="45720" tIns="18288" bIns="18288" anchor="t">
+          <a:bodyPr wrap="square" lIns="45720" tIns="18288" rIns="45720" bIns="18288" anchor="t">
             <a:spAutoFit/>
           </a:bodyPr>
           <a:lstStyle/>
@@ -15179,7 +15260,7 @@
           <a:noFill/>
         </p:spPr>
         <p:txBody>
-          <a:bodyPr wrap="square" lIns="45720" rIns="45720" tIns="18288" bIns="18288" anchor="t">
+          <a:bodyPr wrap="square" lIns="45720" tIns="18288" rIns="45720" bIns="18288" anchor="t">
             <a:spAutoFit/>
           </a:bodyPr>
           <a:lstStyle/>
@@ -15221,7 +15302,7 @@
           <a:noFill/>
         </p:spPr>
         <p:txBody>
-          <a:bodyPr wrap="square" lIns="45720" rIns="45720" tIns="18288" bIns="18288" anchor="t">
+          <a:bodyPr wrap="square" lIns="45720" tIns="18288" rIns="45720" bIns="18288" anchor="t">
             <a:spAutoFit/>
           </a:bodyPr>
           <a:lstStyle/>
@@ -15263,7 +15344,7 @@
           <a:noFill/>
         </p:spPr>
         <p:txBody>
-          <a:bodyPr wrap="square" lIns="45720" rIns="45720" tIns="18288" bIns="18288" anchor="t">
+          <a:bodyPr wrap="square" lIns="45720" tIns="18288" rIns="45720" bIns="18288" anchor="t">
             <a:spAutoFit/>
           </a:bodyPr>
           <a:lstStyle/>
@@ -15333,6 +15414,7 @@
           <a:lstStyle/>
           <a:p>
             <a:pPr algn="ctr"/>
+            <a:endParaRPr/>
           </a:p>
         </p:txBody>
       </p:sp>
@@ -15353,7 +15435,7 @@
           <a:noFill/>
         </p:spPr>
         <p:txBody>
-          <a:bodyPr wrap="square" lIns="45720" rIns="45720" tIns="18288" bIns="18288" anchor="t">
+          <a:bodyPr wrap="square" lIns="45720" tIns="18288" rIns="45720" bIns="18288" anchor="t">
             <a:spAutoFit/>
           </a:bodyPr>
           <a:lstStyle/>
@@ -15387,20 +15469,20 @@
         <p:spPr>
           <a:xfrm>
             <a:off x="7498079" y="2011680"/>
-            <a:ext cx="4206240" cy="640080"/>
-          </a:xfrm>
-          <a:prstGeom prst="rect">
-            <a:avLst/>
-          </a:prstGeom>
-          <a:noFill/>
-        </p:spPr>
-        <p:txBody>
-          <a:bodyPr wrap="square" lIns="45720" rIns="45720" tIns="18288" bIns="18288" anchor="t">
-            <a:spAutoFit/>
-          </a:bodyPr>
-          <a:lstStyle/>
-          <a:p>
-            <a:pPr algn="l">
+            <a:ext cx="4206240" cy="448136"/>
+          </a:xfrm>
+          <a:prstGeom prst="rect">
+            <a:avLst/>
+          </a:prstGeom>
+          <a:noFill/>
+        </p:spPr>
+        <p:txBody>
+          <a:bodyPr wrap="square" lIns="45720" tIns="18288" rIns="45720" bIns="18288" anchor="t">
+            <a:spAutoFit/>
+          </a:bodyPr>
+          <a:lstStyle/>
+          <a:p>
+            <a:pPr>
               <a:lnSpc>
                 <a:spcPct val="115000"/>
               </a:lnSpc>
@@ -15409,14 +15491,74 @@
               </a:spcAft>
             </a:pPr>
             <a:r>
-              <a:rPr sz="1200" b="0" i="1">
+              <a:rPr lang="en-US" sz="1200" i="1" dirty="0">
                 <a:solidFill>
                   <a:srgbClr val="FFFFFF"/>
                 </a:solidFill>
                 <a:latin typeface="Consolas"/>
               </a:rPr>
-              <a:t>[repo location — speaker to fill in]</a:t>
-            </a:r>
+              <a:t>https://</a:t>
+            </a:r>
+            <a:r>
+              <a:rPr lang="en-US" sz="1200" i="1" dirty="0" err="1">
+                <a:solidFill>
+                  <a:srgbClr val="FFFFFF"/>
+                </a:solidFill>
+                <a:latin typeface="Consolas"/>
+              </a:rPr>
+              <a:t>github.com</a:t>
+            </a:r>
+            <a:r>
+              <a:rPr lang="en-US" sz="1200" i="1" dirty="0">
+                <a:solidFill>
+                  <a:srgbClr val="FFFFFF"/>
+                </a:solidFill>
+                <a:latin typeface="Consolas"/>
+              </a:rPr>
+              <a:t>/</a:t>
+            </a:r>
+            <a:r>
+              <a:rPr lang="en-US" sz="1200" i="1" dirty="0" err="1">
+                <a:solidFill>
+                  <a:srgbClr val="FFFFFF"/>
+                </a:solidFill>
+                <a:latin typeface="Consolas"/>
+              </a:rPr>
+              <a:t>terrytompkins</a:t>
+            </a:r>
+            <a:r>
+              <a:rPr lang="en-US" sz="1200" i="1" dirty="0">
+                <a:solidFill>
+                  <a:srgbClr val="FFFFFF"/>
+                </a:solidFill>
+                <a:latin typeface="Consolas"/>
+              </a:rPr>
+              <a:t>/</a:t>
+            </a:r>
+            <a:r>
+              <a:rPr lang="en-US" sz="1200" i="1" dirty="0" err="1">
+                <a:solidFill>
+                  <a:srgbClr val="FFFFFF"/>
+                </a:solidFill>
+                <a:latin typeface="Consolas"/>
+              </a:rPr>
+              <a:t>irl</a:t>
+            </a:r>
+            <a:r>
+              <a:rPr lang="en-US" sz="1200" i="1" dirty="0">
+                <a:solidFill>
+                  <a:srgbClr val="FFFFFF"/>
+                </a:solidFill>
+                <a:latin typeface="Consolas"/>
+              </a:rPr>
+              <a:t>-chat-with-pdf-demo</a:t>
+            </a:r>
+            <a:endParaRPr sz="1200" b="0" i="1" dirty="0">
+              <a:solidFill>
+                <a:srgbClr val="FFFFFF"/>
+              </a:solidFill>
+              <a:latin typeface="Consolas"/>
+            </a:endParaRPr>
           </a:p>
         </p:txBody>
       </p:sp>
@@ -15465,6 +15607,7 @@
           <a:lstStyle/>
           <a:p>
             <a:pPr algn="ctr"/>
+            <a:endParaRPr/>
           </a:p>
         </p:txBody>
       </p:sp>
@@ -15477,15 +15620,15 @@
         <p:spPr>
           <a:xfrm>
             <a:off x="7498079" y="2880360"/>
-            <a:ext cx="4206240" cy="274320"/>
-          </a:xfrm>
-          <a:prstGeom prst="rect">
-            <a:avLst/>
-          </a:prstGeom>
-          <a:noFill/>
-        </p:spPr>
-        <p:txBody>
-          <a:bodyPr wrap="square" lIns="45720" rIns="45720" tIns="18288" bIns="18288" anchor="t">
+            <a:ext cx="4206240" cy="186846"/>
+          </a:xfrm>
+          <a:prstGeom prst="rect">
+            <a:avLst/>
+          </a:prstGeom>
+          <a:noFill/>
+        </p:spPr>
+        <p:txBody>
+          <a:bodyPr wrap="square" lIns="45720" tIns="18288" rIns="45720" bIns="18288" anchor="t">
             <a:spAutoFit/>
           </a:bodyPr>
           <a:lstStyle/>
@@ -15499,14 +15642,29 @@
               </a:spcAft>
             </a:pPr>
             <a:r>
-              <a:rPr sz="900" b="1" i="0">
+              <a:rPr lang="en-US" sz="900" b="1" i="0" dirty="0">
                 <a:solidFill>
                   <a:srgbClr val="D4A017"/>
                 </a:solidFill>
                 <a:latin typeface="Calibri"/>
               </a:rPr>
-              <a:t>SESSION WALK-THROUGH NOTES</a:t>
-            </a:r>
+              <a:t>TUTORIAL FOR </a:t>
+            </a:r>
+            <a:r>
+              <a:rPr lang="en-US" sz="900" b="1" dirty="0">
+                <a:solidFill>
+                  <a:srgbClr val="D4A017"/>
+                </a:solidFill>
+                <a:latin typeface="Calibri"/>
+              </a:rPr>
+              <a:t>REPLICATING THIS PROJECT</a:t>
+            </a:r>
+            <a:endParaRPr sz="900" b="1" i="0" dirty="0">
+              <a:solidFill>
+                <a:srgbClr val="D4A017"/>
+              </a:solidFill>
+              <a:latin typeface="Calibri"/>
+            </a:endParaRPr>
           </a:p>
         </p:txBody>
       </p:sp>
@@ -15519,15 +15677,15 @@
         <p:spPr>
           <a:xfrm>
             <a:off x="7498079" y="3108960"/>
-            <a:ext cx="4206240" cy="640080"/>
-          </a:xfrm>
-          <a:prstGeom prst="rect">
-            <a:avLst/>
-          </a:prstGeom>
-          <a:noFill/>
-        </p:spPr>
-        <p:txBody>
-          <a:bodyPr wrap="square" lIns="45720" rIns="45720" tIns="18288" bIns="18288" anchor="t">
+            <a:ext cx="4206240" cy="235770"/>
+          </a:xfrm>
+          <a:prstGeom prst="rect">
+            <a:avLst/>
+          </a:prstGeom>
+          <a:noFill/>
+        </p:spPr>
+        <p:txBody>
+          <a:bodyPr wrap="square" lIns="45720" tIns="18288" rIns="45720" bIns="18288" anchor="t">
             <a:spAutoFit/>
           </a:bodyPr>
           <a:lstStyle/>
@@ -15541,14 +15699,20 @@
               </a:spcAft>
             </a:pPr>
             <a:r>
-              <a:rPr sz="1200" b="0" i="0">
+              <a:rPr lang="en-US" sz="1200" dirty="0" err="1">
                 <a:solidFill>
                   <a:srgbClr val="FFFFFF"/>
                 </a:solidFill>
                 <a:latin typeface="Consolas"/>
               </a:rPr>
-              <a:t>claude-code-session.log</a:t>
-            </a:r>
+              <a:t>Vibe_Coding_Your_First_App.docx</a:t>
+            </a:r>
+            <a:endParaRPr sz="1200" b="0" i="0" dirty="0">
+              <a:solidFill>
+                <a:srgbClr val="FFFFFF"/>
+              </a:solidFill>
+              <a:latin typeface="Consolas"/>
+            </a:endParaRPr>
           </a:p>
         </p:txBody>
       </p:sp>
@@ -15597,6 +15761,7 @@
           <a:lstStyle/>
           <a:p>
             <a:pPr algn="ctr"/>
+            <a:endParaRPr/>
           </a:p>
         </p:txBody>
       </p:sp>
@@ -15617,7 +15782,7 @@
           <a:noFill/>
         </p:spPr>
         <p:txBody>
-          <a:bodyPr wrap="square" lIns="45720" rIns="45720" tIns="18288" bIns="18288" anchor="t">
+          <a:bodyPr wrap="square" lIns="45720" tIns="18288" rIns="45720" bIns="18288" anchor="t">
             <a:spAutoFit/>
           </a:bodyPr>
           <a:lstStyle/>
@@ -15651,15 +15816,15 @@
         <p:spPr>
           <a:xfrm>
             <a:off x="7498079" y="4206240"/>
-            <a:ext cx="4206240" cy="640080"/>
-          </a:xfrm>
-          <a:prstGeom prst="rect">
-            <a:avLst/>
-          </a:prstGeom>
-          <a:noFill/>
-        </p:spPr>
-        <p:txBody>
-          <a:bodyPr wrap="square" lIns="45720" rIns="45720" tIns="18288" bIns="18288" anchor="t">
+            <a:ext cx="4206240" cy="236860"/>
+          </a:xfrm>
+          <a:prstGeom prst="rect">
+            <a:avLst/>
+          </a:prstGeom>
+          <a:noFill/>
+        </p:spPr>
+        <p:txBody>
+          <a:bodyPr wrap="square" lIns="45720" tIns="18288" rIns="45720" bIns="18288" anchor="t">
             <a:spAutoFit/>
           </a:bodyPr>
           <a:lstStyle/>
@@ -15673,14 +15838,20 @@
               </a:spcAft>
             </a:pPr>
             <a:r>
-              <a:rPr sz="1200" b="0" i="1">
+              <a:rPr lang="en-US" sz="1200" i="1" dirty="0" err="1">
                 <a:solidFill>
                   <a:srgbClr val="FFFFFF"/>
                 </a:solidFill>
                 <a:latin typeface="Calibri"/>
               </a:rPr>
-              <a:t>[email — speaker to fill in]</a:t>
-            </a:r>
+              <a:t>Terry-Tompkins@idexx.com</a:t>
+            </a:r>
+            <a:endParaRPr sz="1200" b="0" i="1" dirty="0">
+              <a:solidFill>
+                <a:srgbClr val="FFFFFF"/>
+              </a:solidFill>
+              <a:latin typeface="Calibri"/>
+            </a:endParaRPr>
           </a:p>
         </p:txBody>
       </p:sp>
@@ -15701,7 +15872,7 @@
           <a:noFill/>
         </p:spPr>
         <p:txBody>
-          <a:bodyPr wrap="square" lIns="45720" rIns="45720" tIns="18288" bIns="18288" anchor="t">
+          <a:bodyPr wrap="square" lIns="45720" tIns="18288" rIns="45720" bIns="18288" anchor="t">
             <a:spAutoFit/>
           </a:bodyPr>
           <a:lstStyle/>
@@ -15743,7 +15914,7 @@
           <a:noFill/>
         </p:spPr>
         <p:txBody>
-          <a:bodyPr wrap="square" lIns="45720" rIns="45720" tIns="18288" bIns="18288" anchor="t">
+          <a:bodyPr wrap="square" lIns="45720" tIns="18288" rIns="45720" bIns="18288" anchor="t">
             <a:spAutoFit/>
           </a:bodyPr>
           <a:lstStyle/>
@@ -15808,7 +15979,9 @@
         <p:txBody>
           <a:bodyPr rtlCol="0" anchor="ctr"/>
           <a:lstStyle/>
-          <a:p/>
+          <a:p>
+            <a:endParaRPr/>
+          </a:p>
         </p:txBody>
       </p:sp>
       <p:sp>
@@ -15828,7 +16001,7 @@
           <a:noFill/>
         </p:spPr>
         <p:txBody>
-          <a:bodyPr wrap="square" lIns="45720" rIns="45720" tIns="18288" bIns="18288" anchor="t">
+          <a:bodyPr wrap="square" lIns="45720" tIns="18288" rIns="45720" bIns="18288" anchor="t">
             <a:spAutoFit/>
           </a:bodyPr>
           <a:lstStyle/>
@@ -15870,7 +16043,7 @@
           <a:noFill/>
         </p:spPr>
         <p:txBody>
-          <a:bodyPr wrap="square" lIns="45720" rIns="45720" tIns="18288" bIns="18288" anchor="t">
+          <a:bodyPr wrap="square" lIns="45720" tIns="18288" rIns="45720" bIns="18288" anchor="t">
             <a:spAutoFit/>
           </a:bodyPr>
           <a:lstStyle/>
@@ -15904,7 +16077,7 @@
 </file>
 
 <file path=ppt/slides/slide2.xml><?xml version="1.0" encoding="utf-8"?>
-<p:sld xmlns:a="http://schemas.openxmlformats.org/drawingml/2006/main" xmlns:p="http://schemas.openxmlformats.org/presentationml/2006/main" xmlns:r="http://schemas.openxmlformats.org/officeDocument/2006/relationships">
+<p:sld xmlns:a="http://schemas.openxmlformats.org/drawingml/2006/main" xmlns:r="http://schemas.openxmlformats.org/officeDocument/2006/relationships" xmlns:p="http://schemas.openxmlformats.org/presentationml/2006/main">
   <p:cSld>
     <p:spTree>
       <p:nvGrpSpPr>
@@ -15912,7 +16085,14 @@
         <p:cNvGrpSpPr/>
         <p:nvPr/>
       </p:nvGrpSpPr>
-      <p:grpSpPr/>
+      <p:grpSpPr>
+        <a:xfrm>
+          <a:off x="0" y="0"/>
+          <a:ext cx="0" cy="0"/>
+          <a:chOff x="0" y="0"/>
+          <a:chExt cx="0" cy="0"/>
+        </a:xfrm>
+      </p:grpSpPr>
       <p:sp>
         <p:nvSpPr>
           <p:cNvPr id="2" name="Rectangle 1"/>
@@ -15952,7 +16132,9 @@
         <p:txBody>
           <a:bodyPr rtlCol="0" anchor="ctr"/>
           <a:lstStyle/>
-          <a:p/>
+          <a:p>
+            <a:endParaRPr/>
+          </a:p>
         </p:txBody>
       </p:sp>
       <p:sp>
@@ -15972,7 +16154,7 @@
           <a:noFill/>
         </p:spPr>
         <p:txBody>
-          <a:bodyPr wrap="square" lIns="45720" rIns="45720" tIns="18288" bIns="18288" anchor="t">
+          <a:bodyPr wrap="square" lIns="45720" tIns="18288" rIns="45720" bIns="18288" anchor="t">
             <a:spAutoFit/>
           </a:bodyPr>
           <a:lstStyle/>
@@ -16014,7 +16196,7 @@
           <a:noFill/>
         </p:spPr>
         <p:txBody>
-          <a:bodyPr wrap="square" lIns="45720" rIns="45720" tIns="18288" bIns="18288" anchor="t">
+          <a:bodyPr wrap="square" lIns="45720" tIns="18288" rIns="45720" bIns="18288" anchor="t">
             <a:spAutoFit/>
           </a:bodyPr>
           <a:lstStyle/>
@@ -16082,6 +16264,7 @@
           <a:lstStyle/>
           <a:p>
             <a:pPr algn="ctr"/>
+            <a:endParaRPr/>
           </a:p>
         </p:txBody>
       </p:sp>
@@ -16124,7 +16307,9 @@
         <p:txBody>
           <a:bodyPr rtlCol="0" anchor="ctr"/>
           <a:lstStyle/>
-          <a:p/>
+          <a:p>
+            <a:endParaRPr/>
+          </a:p>
         </p:txBody>
       </p:sp>
       <p:sp>
@@ -16144,7 +16329,7 @@
           <a:noFill/>
         </p:spPr>
         <p:txBody>
-          <a:bodyPr wrap="square" lIns="45720" rIns="45720" tIns="18288" bIns="18288" anchor="t">
+          <a:bodyPr wrap="square" lIns="45720" tIns="18288" rIns="45720" bIns="18288" anchor="t">
             <a:spAutoFit/>
           </a:bodyPr>
           <a:lstStyle/>
@@ -16186,7 +16371,7 @@
           <a:noFill/>
         </p:spPr>
         <p:txBody>
-          <a:bodyPr wrap="square" lIns="45720" rIns="45720" tIns="18288" bIns="18288" anchor="t">
+          <a:bodyPr wrap="square" lIns="45720" tIns="18288" rIns="45720" bIns="18288" anchor="t">
             <a:spAutoFit/>
           </a:bodyPr>
           <a:lstStyle/>
@@ -16228,7 +16413,7 @@
           <a:noFill/>
         </p:spPr>
         <p:txBody>
-          <a:bodyPr wrap="square" lIns="45720" rIns="45720" tIns="18288" bIns="18288">
+          <a:bodyPr wrap="square" lIns="45720" tIns="18288" rIns="45720" bIns="18288">
             <a:spAutoFit/>
           </a:bodyPr>
           <a:lstStyle/>
@@ -16385,7 +16570,9 @@
         <p:txBody>
           <a:bodyPr rtlCol="0" anchor="ctr"/>
           <a:lstStyle/>
-          <a:p/>
+          <a:p>
+            <a:endParaRPr/>
+          </a:p>
         </p:txBody>
       </p:sp>
       <p:sp>
@@ -16405,7 +16592,7 @@
           <a:noFill/>
         </p:spPr>
         <p:txBody>
-          <a:bodyPr wrap="square" lIns="45720" rIns="45720" tIns="18288" bIns="18288" anchor="t">
+          <a:bodyPr wrap="square" lIns="45720" tIns="18288" rIns="45720" bIns="18288" anchor="t">
             <a:spAutoFit/>
           </a:bodyPr>
           <a:lstStyle/>
@@ -16447,7 +16634,7 @@
           <a:noFill/>
         </p:spPr>
         <p:txBody>
-          <a:bodyPr wrap="square" lIns="45720" rIns="45720" tIns="18288" bIns="18288" anchor="t">
+          <a:bodyPr wrap="square" lIns="45720" tIns="18288" rIns="45720" bIns="18288" anchor="t">
             <a:spAutoFit/>
           </a:bodyPr>
           <a:lstStyle/>
@@ -16515,6 +16702,7 @@
           <a:lstStyle/>
           <a:p>
             <a:pPr algn="ctr"/>
+            <a:endParaRPr/>
           </a:p>
         </p:txBody>
       </p:sp>
@@ -16557,7 +16745,9 @@
         <p:txBody>
           <a:bodyPr rtlCol="0" anchor="ctr"/>
           <a:lstStyle/>
-          <a:p/>
+          <a:p>
+            <a:endParaRPr/>
+          </a:p>
         </p:txBody>
       </p:sp>
       <p:sp>
@@ -16577,7 +16767,7 @@
           <a:noFill/>
         </p:spPr>
         <p:txBody>
-          <a:bodyPr wrap="square" lIns="45720" rIns="45720" tIns="18288" bIns="18288" anchor="t">
+          <a:bodyPr wrap="square" lIns="45720" tIns="18288" rIns="45720" bIns="18288" anchor="t">
             <a:spAutoFit/>
           </a:bodyPr>
           <a:lstStyle/>
@@ -16619,7 +16809,7 @@
           <a:noFill/>
         </p:spPr>
         <p:txBody>
-          <a:bodyPr wrap="square" lIns="45720" rIns="45720" tIns="18288" bIns="18288" anchor="t">
+          <a:bodyPr wrap="square" lIns="45720" tIns="18288" rIns="45720" bIns="18288" anchor="t">
             <a:spAutoFit/>
           </a:bodyPr>
           <a:lstStyle/>
@@ -16661,7 +16851,7 @@
           <a:noFill/>
         </p:spPr>
         <p:txBody>
-          <a:bodyPr wrap="square" lIns="45720" rIns="45720" tIns="18288" bIns="18288">
+          <a:bodyPr wrap="square" lIns="45720" tIns="18288" rIns="45720" bIns="18288">
             <a:spAutoFit/>
           </a:bodyPr>
           <a:lstStyle/>
@@ -16818,7 +17008,9 @@
         <p:txBody>
           <a:bodyPr rtlCol="0" anchor="ctr"/>
           <a:lstStyle/>
-          <a:p/>
+          <a:p>
+            <a:endParaRPr/>
+          </a:p>
         </p:txBody>
       </p:sp>
       <p:sp>
@@ -16838,7 +17030,7 @@
           <a:noFill/>
         </p:spPr>
         <p:txBody>
-          <a:bodyPr wrap="square" lIns="45720" rIns="45720" tIns="18288" bIns="18288" anchor="t">
+          <a:bodyPr wrap="square" lIns="45720" tIns="18288" rIns="45720" bIns="18288" anchor="t">
             <a:spAutoFit/>
           </a:bodyPr>
           <a:lstStyle/>
@@ -16880,7 +17072,7 @@
           <a:noFill/>
         </p:spPr>
         <p:txBody>
-          <a:bodyPr wrap="square" lIns="45720" rIns="45720" tIns="18288" bIns="18288" anchor="t">
+          <a:bodyPr wrap="square" lIns="45720" tIns="18288" rIns="45720" bIns="18288" anchor="t">
             <a:spAutoFit/>
           </a:bodyPr>
           <a:lstStyle/>
@@ -16948,6 +17140,7 @@
           <a:lstStyle/>
           <a:p>
             <a:pPr algn="ctr"/>
+            <a:endParaRPr/>
           </a:p>
         </p:txBody>
       </p:sp>
@@ -16968,7 +17161,7 @@
           <a:noFill/>
         </p:spPr>
         <p:txBody>
-          <a:bodyPr wrap="square" lIns="45720" rIns="45720" tIns="18288" bIns="18288" anchor="t">
+          <a:bodyPr wrap="square" lIns="45720" tIns="18288" rIns="45720" bIns="18288" anchor="t">
             <a:spAutoFit/>
           </a:bodyPr>
           <a:lstStyle/>
@@ -17032,7 +17225,9 @@
         <p:txBody>
           <a:bodyPr rtlCol="0" anchor="ctr"/>
           <a:lstStyle/>
-          <a:p/>
+          <a:p>
+            <a:endParaRPr/>
+          </a:p>
         </p:txBody>
       </p:sp>
       <p:sp>
@@ -17052,7 +17247,7 @@
           <a:noFill/>
         </p:spPr>
         <p:txBody>
-          <a:bodyPr wrap="square" lIns="45720" rIns="45720" tIns="18288" bIns="18288" anchor="t">
+          <a:bodyPr wrap="square" lIns="45720" tIns="18288" rIns="45720" bIns="18288" anchor="t">
             <a:spAutoFit/>
           </a:bodyPr>
           <a:lstStyle/>
@@ -17094,7 +17289,7 @@
           <a:noFill/>
         </p:spPr>
         <p:txBody>
-          <a:bodyPr wrap="square" lIns="45720" rIns="45720" tIns="18288" bIns="18288" anchor="t">
+          <a:bodyPr wrap="square" lIns="45720" tIns="18288" rIns="45720" bIns="18288" anchor="t">
             <a:spAutoFit/>
           </a:bodyPr>
           <a:lstStyle/>
@@ -17128,7 +17323,7 @@
 </file>
 
 <file path=ppt/slides/slide3.xml><?xml version="1.0" encoding="utf-8"?>
-<p:sld xmlns:a="http://schemas.openxmlformats.org/drawingml/2006/main" xmlns:p="http://schemas.openxmlformats.org/presentationml/2006/main" xmlns:r="http://schemas.openxmlformats.org/officeDocument/2006/relationships">
+<p:sld xmlns:a="http://schemas.openxmlformats.org/drawingml/2006/main" xmlns:r="http://schemas.openxmlformats.org/officeDocument/2006/relationships" xmlns:p="http://schemas.openxmlformats.org/presentationml/2006/main">
   <p:cSld>
     <p:spTree>
       <p:nvGrpSpPr>
@@ -17136,7 +17331,14 @@
         <p:cNvGrpSpPr/>
         <p:nvPr/>
       </p:nvGrpSpPr>
-      <p:grpSpPr/>
+      <p:grpSpPr>
+        <a:xfrm>
+          <a:off x="0" y="0"/>
+          <a:ext cx="0" cy="0"/>
+          <a:chOff x="0" y="0"/>
+          <a:chExt cx="0" cy="0"/>
+        </a:xfrm>
+      </p:grpSpPr>
       <p:sp>
         <p:nvSpPr>
           <p:cNvPr id="2" name="Rectangle 1"/>
@@ -17176,7 +17378,9 @@
         <p:txBody>
           <a:bodyPr rtlCol="0" anchor="ctr"/>
           <a:lstStyle/>
-          <a:p/>
+          <a:p>
+            <a:endParaRPr/>
+          </a:p>
         </p:txBody>
       </p:sp>
       <p:sp>
@@ -17196,7 +17400,7 @@
           <a:noFill/>
         </p:spPr>
         <p:txBody>
-          <a:bodyPr wrap="square" lIns="45720" rIns="45720" tIns="18288" bIns="18288" anchor="t">
+          <a:bodyPr wrap="square" lIns="45720" tIns="18288" rIns="45720" bIns="18288" anchor="t">
             <a:spAutoFit/>
           </a:bodyPr>
           <a:lstStyle/>
@@ -17238,7 +17442,7 @@
           <a:noFill/>
         </p:spPr>
         <p:txBody>
-          <a:bodyPr wrap="square" lIns="45720" rIns="45720" tIns="18288" bIns="18288" anchor="t">
+          <a:bodyPr wrap="square" lIns="45720" tIns="18288" rIns="45720" bIns="18288" anchor="t">
             <a:spAutoFit/>
           </a:bodyPr>
           <a:lstStyle/>
@@ -17280,7 +17484,7 @@
           <a:noFill/>
         </p:spPr>
         <p:txBody>
-          <a:bodyPr wrap="square" lIns="45720" rIns="45720" tIns="18288" bIns="18288" anchor="t">
+          <a:bodyPr wrap="square" lIns="45720" tIns="18288" rIns="45720" bIns="18288" anchor="t">
             <a:spAutoFit/>
           </a:bodyPr>
           <a:lstStyle/>
@@ -17322,7 +17526,7 @@
           <a:noFill/>
         </p:spPr>
         <p:txBody>
-          <a:bodyPr wrap="square" lIns="45720" rIns="45720" tIns="18288" bIns="18288" anchor="t">
+          <a:bodyPr wrap="square" lIns="45720" tIns="18288" rIns="45720" bIns="18288" anchor="t">
             <a:spAutoFit/>
           </a:bodyPr>
           <a:lstStyle/>
@@ -17390,6 +17594,7 @@
           <a:lstStyle/>
           <a:p>
             <a:pPr algn="ctr"/>
+            <a:endParaRPr/>
           </a:p>
         </p:txBody>
       </p:sp>
@@ -17410,7 +17615,7 @@
           <a:noFill/>
         </p:spPr>
         <p:txBody>
-          <a:bodyPr wrap="square" lIns="45720" rIns="45720" tIns="18288" bIns="18288">
+          <a:bodyPr wrap="square" lIns="45720" tIns="18288" rIns="45720" bIns="18288">
             <a:spAutoFit/>
           </a:bodyPr>
           <a:lstStyle/>
@@ -17541,7 +17746,9 @@
         <p:txBody>
           <a:bodyPr rtlCol="0" anchor="ctr"/>
           <a:lstStyle/>
-          <a:p/>
+          <a:p>
+            <a:endParaRPr/>
+          </a:p>
         </p:txBody>
       </p:sp>
       <p:sp>
@@ -17585,7 +17792,9 @@
         <p:txBody>
           <a:bodyPr rtlCol="0" anchor="ctr"/>
           <a:lstStyle/>
-          <a:p/>
+          <a:p>
+            <a:endParaRPr/>
+          </a:p>
         </p:txBody>
       </p:sp>
       <p:sp>
@@ -17629,7 +17838,9 @@
         <p:txBody>
           <a:bodyPr rtlCol="0" anchor="ctr"/>
           <a:lstStyle/>
-          <a:p/>
+          <a:p>
+            <a:endParaRPr/>
+          </a:p>
         </p:txBody>
       </p:sp>
       <p:sp>
@@ -17671,7 +17882,9 @@
         <p:txBody>
           <a:bodyPr rtlCol="0" anchor="ctr"/>
           <a:lstStyle/>
-          <a:p/>
+          <a:p>
+            <a:endParaRPr/>
+          </a:p>
         </p:txBody>
       </p:sp>
       <p:sp>
@@ -17713,7 +17926,9 @@
         <p:txBody>
           <a:bodyPr rtlCol="0" anchor="ctr"/>
           <a:lstStyle/>
-          <a:p/>
+          <a:p>
+            <a:endParaRPr/>
+          </a:p>
         </p:txBody>
       </p:sp>
       <p:sp>
@@ -17755,7 +17970,9 @@
         <p:txBody>
           <a:bodyPr rtlCol="0" anchor="ctr"/>
           <a:lstStyle/>
-          <a:p/>
+          <a:p>
+            <a:endParaRPr/>
+          </a:p>
         </p:txBody>
       </p:sp>
       <p:sp>
@@ -17797,7 +18014,9 @@
         <p:txBody>
           <a:bodyPr rtlCol="0" anchor="ctr"/>
           <a:lstStyle/>
-          <a:p/>
+          <a:p>
+            <a:endParaRPr/>
+          </a:p>
         </p:txBody>
       </p:sp>
       <p:sp>
@@ -17839,7 +18058,9 @@
         <p:txBody>
           <a:bodyPr rtlCol="0" anchor="ctr"/>
           <a:lstStyle/>
-          <a:p/>
+          <a:p>
+            <a:endParaRPr/>
+          </a:p>
         </p:txBody>
       </p:sp>
       <p:sp>
@@ -17881,7 +18102,9 @@
         <p:txBody>
           <a:bodyPr rtlCol="0" anchor="ctr"/>
           <a:lstStyle/>
-          <a:p/>
+          <a:p>
+            <a:endParaRPr/>
+          </a:p>
         </p:txBody>
       </p:sp>
       <p:sp>
@@ -17923,7 +18146,9 @@
         <p:txBody>
           <a:bodyPr rtlCol="0" anchor="ctr"/>
           <a:lstStyle/>
-          <a:p/>
+          <a:p>
+            <a:endParaRPr/>
+          </a:p>
         </p:txBody>
       </p:sp>
       <p:sp>
@@ -17965,7 +18190,9 @@
         <p:txBody>
           <a:bodyPr rtlCol="0" anchor="ctr"/>
           <a:lstStyle/>
-          <a:p/>
+          <a:p>
+            <a:endParaRPr/>
+          </a:p>
         </p:txBody>
       </p:sp>
       <p:sp>
@@ -17985,7 +18212,7 @@
           <a:noFill/>
         </p:spPr>
         <p:txBody>
-          <a:bodyPr wrap="square" lIns="45720" rIns="45720" tIns="18288" bIns="18288" anchor="t">
+          <a:bodyPr wrap="square" lIns="45720" tIns="18288" rIns="45720" bIns="18288" anchor="t">
             <a:spAutoFit/>
           </a:bodyPr>
           <a:lstStyle/>
@@ -18050,6 +18277,7 @@
           <a:lstStyle/>
           <a:p>
             <a:pPr algn="ctr"/>
+            <a:endParaRPr/>
           </a:p>
         </p:txBody>
       </p:sp>
@@ -18096,6 +18324,7 @@
           <a:lstStyle/>
           <a:p>
             <a:pPr algn="ctr"/>
+            <a:endParaRPr/>
           </a:p>
         </p:txBody>
       </p:sp>
@@ -18116,7 +18345,7 @@
           <a:noFill/>
         </p:spPr>
         <p:txBody>
-          <a:bodyPr wrap="square" lIns="45720" rIns="45720" tIns="18288" bIns="18288" anchor="t">
+          <a:bodyPr wrap="square" lIns="45720" tIns="18288" rIns="45720" bIns="18288" anchor="t">
             <a:spAutoFit/>
           </a:bodyPr>
           <a:lstStyle/>
@@ -18158,7 +18387,7 @@
           <a:noFill/>
         </p:spPr>
         <p:txBody>
-          <a:bodyPr wrap="square" lIns="45720" rIns="45720" tIns="18288" bIns="18288" anchor="t">
+          <a:bodyPr wrap="square" lIns="45720" tIns="18288" rIns="45720" bIns="18288" anchor="t">
             <a:spAutoFit/>
           </a:bodyPr>
           <a:lstStyle/>
@@ -18203,7 +18432,7 @@
           <a:noFill/>
         </p:spPr>
         <p:txBody>
-          <a:bodyPr wrap="square" lIns="45720" rIns="45720" tIns="18288" bIns="18288" anchor="t">
+          <a:bodyPr wrap="square" lIns="45720" tIns="18288" rIns="45720" bIns="18288" anchor="t">
             <a:spAutoFit/>
           </a:bodyPr>
           <a:lstStyle/>
@@ -18271,6 +18500,7 @@
           <a:lstStyle/>
           <a:p>
             <a:pPr algn="ctr"/>
+            <a:endParaRPr/>
           </a:p>
         </p:txBody>
       </p:sp>
@@ -18291,7 +18521,7 @@
           <a:noFill/>
         </p:spPr>
         <p:txBody>
-          <a:bodyPr wrap="square" lIns="45720" rIns="45720" tIns="18288" bIns="18288" anchor="t">
+          <a:bodyPr wrap="square" lIns="45720" tIns="18288" rIns="45720" bIns="18288" anchor="t">
             <a:spAutoFit/>
           </a:bodyPr>
           <a:lstStyle/>
@@ -18355,7 +18585,9 @@
         <p:txBody>
           <a:bodyPr rtlCol="0" anchor="ctr"/>
           <a:lstStyle/>
-          <a:p/>
+          <a:p>
+            <a:endParaRPr/>
+          </a:p>
         </p:txBody>
       </p:sp>
       <p:sp>
@@ -18375,7 +18607,7 @@
           <a:noFill/>
         </p:spPr>
         <p:txBody>
-          <a:bodyPr wrap="square" lIns="45720" rIns="45720" tIns="18288" bIns="18288" anchor="t">
+          <a:bodyPr wrap="square" lIns="45720" tIns="18288" rIns="45720" bIns="18288" anchor="t">
             <a:spAutoFit/>
           </a:bodyPr>
           <a:lstStyle/>
@@ -18417,7 +18649,7 @@
           <a:noFill/>
         </p:spPr>
         <p:txBody>
-          <a:bodyPr wrap="square" lIns="45720" rIns="45720" tIns="18288" bIns="18288" anchor="t">
+          <a:bodyPr wrap="square" lIns="45720" tIns="18288" rIns="45720" bIns="18288" anchor="t">
             <a:spAutoFit/>
           </a:bodyPr>
           <a:lstStyle/>
@@ -18451,7 +18683,7 @@
 </file>
 
 <file path=ppt/slides/slide4.xml><?xml version="1.0" encoding="utf-8"?>
-<p:sld xmlns:a="http://schemas.openxmlformats.org/drawingml/2006/main" xmlns:p="http://schemas.openxmlformats.org/presentationml/2006/main" xmlns:r="http://schemas.openxmlformats.org/officeDocument/2006/relationships">
+<p:sld xmlns:a="http://schemas.openxmlformats.org/drawingml/2006/main" xmlns:r="http://schemas.openxmlformats.org/officeDocument/2006/relationships" xmlns:p="http://schemas.openxmlformats.org/presentationml/2006/main">
   <p:cSld>
     <p:spTree>
       <p:nvGrpSpPr>
@@ -18459,7 +18691,14 @@
         <p:cNvGrpSpPr/>
         <p:nvPr/>
       </p:nvGrpSpPr>
-      <p:grpSpPr/>
+      <p:grpSpPr>
+        <a:xfrm>
+          <a:off x="0" y="0"/>
+          <a:ext cx="0" cy="0"/>
+          <a:chOff x="0" y="0"/>
+          <a:chExt cx="0" cy="0"/>
+        </a:xfrm>
+      </p:grpSpPr>
       <p:sp>
         <p:nvSpPr>
           <p:cNvPr id="2" name="Rectangle 1"/>
@@ -18499,7 +18738,9 @@
         <p:txBody>
           <a:bodyPr rtlCol="0" anchor="ctr"/>
           <a:lstStyle/>
-          <a:p/>
+          <a:p>
+            <a:endParaRPr/>
+          </a:p>
         </p:txBody>
       </p:sp>
       <p:sp>
@@ -18519,7 +18760,7 @@
           <a:noFill/>
         </p:spPr>
         <p:txBody>
-          <a:bodyPr wrap="square" lIns="45720" rIns="45720" tIns="18288" bIns="18288" anchor="t">
+          <a:bodyPr wrap="square" lIns="45720" tIns="18288" rIns="45720" bIns="18288" anchor="t">
             <a:spAutoFit/>
           </a:bodyPr>
           <a:lstStyle/>
@@ -18561,7 +18802,7 @@
           <a:noFill/>
         </p:spPr>
         <p:txBody>
-          <a:bodyPr wrap="square" lIns="45720" rIns="45720" tIns="18288" bIns="18288" anchor="t">
+          <a:bodyPr wrap="square" lIns="45720" tIns="18288" rIns="45720" bIns="18288" anchor="t">
             <a:spAutoFit/>
           </a:bodyPr>
           <a:lstStyle/>
@@ -18603,7 +18844,7 @@
           <a:noFill/>
         </p:spPr>
         <p:txBody>
-          <a:bodyPr wrap="square" lIns="45720" rIns="45720" tIns="18288" bIns="18288" anchor="t">
+          <a:bodyPr wrap="square" lIns="45720" tIns="18288" rIns="45720" bIns="18288" anchor="t">
             <a:spAutoFit/>
           </a:bodyPr>
           <a:lstStyle/>
@@ -18645,7 +18886,7 @@
           <a:noFill/>
         </p:spPr>
         <p:txBody>
-          <a:bodyPr wrap="square" lIns="45720" rIns="45720" tIns="18288" bIns="18288" anchor="t">
+          <a:bodyPr wrap="square" lIns="45720" tIns="18288" rIns="45720" bIns="18288" anchor="t">
             <a:spAutoFit/>
           </a:bodyPr>
           <a:lstStyle/>
@@ -18687,7 +18928,7 @@
           <a:noFill/>
         </p:spPr>
         <p:txBody>
-          <a:bodyPr wrap="square" lIns="45720" rIns="45720" tIns="18288" bIns="18288">
+          <a:bodyPr wrap="square" lIns="45720" tIns="18288" rIns="45720" bIns="18288">
             <a:spAutoFit/>
           </a:bodyPr>
           <a:lstStyle/>
@@ -18876,6 +19117,7 @@
           <a:lstStyle/>
           <a:p>
             <a:pPr algn="ctr"/>
+            <a:endParaRPr/>
           </a:p>
         </p:txBody>
       </p:sp>
@@ -18922,6 +19164,7 @@
           <a:lstStyle/>
           <a:p>
             <a:pPr algn="ctr"/>
+            <a:endParaRPr/>
           </a:p>
         </p:txBody>
       </p:sp>
@@ -18965,6 +19208,7 @@
           <a:lstStyle/>
           <a:p>
             <a:pPr algn="ctr"/>
+            <a:endParaRPr/>
           </a:p>
         </p:txBody>
       </p:sp>
@@ -19008,6 +19252,7 @@
           <a:lstStyle/>
           <a:p>
             <a:pPr algn="ctr"/>
+            <a:endParaRPr/>
           </a:p>
         </p:txBody>
       </p:sp>
@@ -19051,6 +19296,7 @@
           <a:lstStyle/>
           <a:p>
             <a:pPr algn="ctr"/>
+            <a:endParaRPr/>
           </a:p>
         </p:txBody>
       </p:sp>
@@ -19071,7 +19317,7 @@
           <a:noFill/>
         </p:spPr>
         <p:txBody>
-          <a:bodyPr wrap="square" lIns="45720" rIns="45720" tIns="18288" bIns="18288" anchor="t">
+          <a:bodyPr wrap="square" lIns="45720" tIns="18288" rIns="45720" bIns="18288" anchor="t">
             <a:spAutoFit/>
           </a:bodyPr>
           <a:lstStyle/>
@@ -19113,7 +19359,7 @@
           <a:noFill/>
         </p:spPr>
         <p:txBody>
-          <a:bodyPr wrap="square" lIns="45720" rIns="45720" tIns="18288" bIns="18288" anchor="t">
+          <a:bodyPr wrap="square" lIns="45720" tIns="18288" rIns="45720" bIns="18288" anchor="t">
             <a:spAutoFit/>
           </a:bodyPr>
           <a:lstStyle/>
@@ -19164,7 +19410,7 @@
           <a:noFill/>
         </p:spPr>
         <p:txBody>
-          <a:bodyPr wrap="square" lIns="45720" rIns="45720" tIns="18288" bIns="18288" anchor="t">
+          <a:bodyPr wrap="square" lIns="45720" tIns="18288" rIns="45720" bIns="18288" anchor="t">
             <a:spAutoFit/>
           </a:bodyPr>
           <a:lstStyle/>
@@ -19184,16 +19430,7 @@
                 </a:solidFill>
                 <a:latin typeface="Consolas"/>
               </a:rPr>
-              <a:t>  </a:t>
-            </a:r>
-            <a:r>
-              <a:rPr sz="1100" b="0" i="0">
-                <a:solidFill>
-                  <a:srgbClr val="FFFFFF"/>
-                </a:solidFill>
-                <a:latin typeface="Consolas"/>
-              </a:rPr>
-              <a:t>and have an AI summarize it for marketing.</a:t>
+              <a:t>  and have an AI summarize it for marketing.</a:t>
             </a:r>
           </a:p>
         </p:txBody>
@@ -19215,7 +19452,7 @@
           <a:noFill/>
         </p:spPr>
         <p:txBody>
-          <a:bodyPr wrap="square" lIns="45720" rIns="45720" tIns="18288" bIns="18288" anchor="t">
+          <a:bodyPr wrap="square" lIns="45720" tIns="18288" rIns="45720" bIns="18288" anchor="t">
             <a:spAutoFit/>
           </a:bodyPr>
           <a:lstStyle/>
@@ -19266,7 +19503,7 @@
           <a:noFill/>
         </p:spPr>
         <p:txBody>
-          <a:bodyPr wrap="square" lIns="45720" rIns="45720" tIns="18288" bIns="18288" anchor="t">
+          <a:bodyPr wrap="square" lIns="45720" tIns="18288" rIns="45720" bIns="18288" anchor="t">
             <a:spAutoFit/>
           </a:bodyPr>
           <a:lstStyle/>
@@ -19317,7 +19554,7 @@
           <a:noFill/>
         </p:spPr>
         <p:txBody>
-          <a:bodyPr wrap="square" lIns="45720" rIns="45720" tIns="18288" bIns="18288" anchor="t">
+          <a:bodyPr wrap="square" lIns="45720" tIns="18288" rIns="45720" bIns="18288" anchor="t">
             <a:spAutoFit/>
           </a:bodyPr>
           <a:lstStyle/>
@@ -19368,7 +19605,7 @@
           <a:noFill/>
         </p:spPr>
         <p:txBody>
-          <a:bodyPr wrap="square" lIns="45720" rIns="45720" tIns="18288" bIns="18288" anchor="t">
+          <a:bodyPr wrap="square" lIns="45720" tIns="18288" rIns="45720" bIns="18288" anchor="t">
             <a:spAutoFit/>
           </a:bodyPr>
           <a:lstStyle/>
@@ -19419,7 +19656,7 @@
           <a:noFill/>
         </p:spPr>
         <p:txBody>
-          <a:bodyPr wrap="square" lIns="45720" rIns="45720" tIns="18288" bIns="18288" anchor="t">
+          <a:bodyPr wrap="square" lIns="45720" tIns="18288" rIns="45720" bIns="18288" anchor="t">
             <a:spAutoFit/>
           </a:bodyPr>
           <a:lstStyle/>
@@ -19470,7 +19707,7 @@
           <a:noFill/>
         </p:spPr>
         <p:txBody>
-          <a:bodyPr wrap="square" lIns="45720" rIns="45720" tIns="18288" bIns="18288" anchor="t">
+          <a:bodyPr wrap="square" lIns="45720" tIns="18288" rIns="45720" bIns="18288" anchor="t">
             <a:spAutoFit/>
           </a:bodyPr>
           <a:lstStyle/>
@@ -19521,7 +19758,7 @@
           <a:noFill/>
         </p:spPr>
         <p:txBody>
-          <a:bodyPr wrap="square" lIns="45720" rIns="45720" tIns="18288" bIns="18288" anchor="t">
+          <a:bodyPr wrap="square" lIns="45720" tIns="18288" rIns="45720" bIns="18288" anchor="t">
             <a:spAutoFit/>
           </a:bodyPr>
           <a:lstStyle/>
@@ -19572,7 +19809,7 @@
           <a:noFill/>
         </p:spPr>
         <p:txBody>
-          <a:bodyPr wrap="square" lIns="45720" rIns="45720" tIns="18288" bIns="18288" anchor="t">
+          <a:bodyPr wrap="square" lIns="45720" tIns="18288" rIns="45720" bIns="18288" anchor="t">
             <a:spAutoFit/>
           </a:bodyPr>
           <a:lstStyle/>
@@ -19623,7 +19860,7 @@
           <a:noFill/>
         </p:spPr>
         <p:txBody>
-          <a:bodyPr wrap="square" lIns="45720" rIns="45720" tIns="18288" bIns="18288" anchor="t">
+          <a:bodyPr wrap="square" lIns="45720" tIns="18288" rIns="45720" bIns="18288" anchor="t">
             <a:spAutoFit/>
           </a:bodyPr>
           <a:lstStyle/>
@@ -19674,7 +19911,7 @@
           <a:noFill/>
         </p:spPr>
         <p:txBody>
-          <a:bodyPr wrap="square" lIns="45720" rIns="45720" tIns="18288" bIns="18288" anchor="t">
+          <a:bodyPr wrap="square" lIns="45720" tIns="18288" rIns="45720" bIns="18288" anchor="t">
             <a:spAutoFit/>
           </a:bodyPr>
           <a:lstStyle/>
@@ -19747,7 +19984,9 @@
         <p:txBody>
           <a:bodyPr rtlCol="0" anchor="ctr"/>
           <a:lstStyle/>
-          <a:p/>
+          <a:p>
+            <a:endParaRPr/>
+          </a:p>
         </p:txBody>
       </p:sp>
       <p:sp>
@@ -19767,7 +20006,7 @@
           <a:noFill/>
         </p:spPr>
         <p:txBody>
-          <a:bodyPr wrap="square" lIns="45720" rIns="45720" tIns="18288" bIns="18288" anchor="t">
+          <a:bodyPr wrap="square" lIns="45720" tIns="18288" rIns="45720" bIns="18288" anchor="t">
             <a:spAutoFit/>
           </a:bodyPr>
           <a:lstStyle/>
@@ -19809,7 +20048,7 @@
           <a:noFill/>
         </p:spPr>
         <p:txBody>
-          <a:bodyPr wrap="square" lIns="45720" rIns="45720" tIns="18288" bIns="18288" anchor="t">
+          <a:bodyPr wrap="square" lIns="45720" tIns="18288" rIns="45720" bIns="18288" anchor="t">
             <a:spAutoFit/>
           </a:bodyPr>
           <a:lstStyle/>
@@ -19843,7 +20082,7 @@
 </file>
 
 <file path=ppt/slides/slide5.xml><?xml version="1.0" encoding="utf-8"?>
-<p:sld xmlns:a="http://schemas.openxmlformats.org/drawingml/2006/main" xmlns:p="http://schemas.openxmlformats.org/presentationml/2006/main" xmlns:r="http://schemas.openxmlformats.org/officeDocument/2006/relationships">
+<p:sld xmlns:a="http://schemas.openxmlformats.org/drawingml/2006/main" xmlns:r="http://schemas.openxmlformats.org/officeDocument/2006/relationships" xmlns:p="http://schemas.openxmlformats.org/presentationml/2006/main">
   <p:cSld>
     <p:spTree>
       <p:nvGrpSpPr>
@@ -19851,7 +20090,14 @@
         <p:cNvGrpSpPr/>
         <p:nvPr/>
       </p:nvGrpSpPr>
-      <p:grpSpPr/>
+      <p:grpSpPr>
+        <a:xfrm>
+          <a:off x="0" y="0"/>
+          <a:ext cx="0" cy="0"/>
+          <a:chOff x="0" y="0"/>
+          <a:chExt cx="0" cy="0"/>
+        </a:xfrm>
+      </p:grpSpPr>
       <p:sp>
         <p:nvSpPr>
           <p:cNvPr id="2" name="Rectangle 1"/>
@@ -19891,7 +20137,9 @@
         <p:txBody>
           <a:bodyPr rtlCol="0" anchor="ctr"/>
           <a:lstStyle/>
-          <a:p/>
+          <a:p>
+            <a:endParaRPr/>
+          </a:p>
         </p:txBody>
       </p:sp>
       <p:sp>
@@ -19911,7 +20159,7 @@
           <a:noFill/>
         </p:spPr>
         <p:txBody>
-          <a:bodyPr wrap="square" lIns="45720" rIns="45720" tIns="18288" bIns="18288" anchor="t">
+          <a:bodyPr wrap="square" lIns="45720" tIns="18288" rIns="45720" bIns="18288" anchor="t">
             <a:spAutoFit/>
           </a:bodyPr>
           <a:lstStyle/>
@@ -19953,7 +20201,7 @@
           <a:noFill/>
         </p:spPr>
         <p:txBody>
-          <a:bodyPr wrap="square" lIns="45720" rIns="45720" tIns="18288" bIns="18288" anchor="t">
+          <a:bodyPr wrap="square" lIns="45720" tIns="18288" rIns="45720" bIns="18288" anchor="t">
             <a:spAutoFit/>
           </a:bodyPr>
           <a:lstStyle/>
@@ -19995,7 +20243,7 @@
           <a:noFill/>
         </p:spPr>
         <p:txBody>
-          <a:bodyPr wrap="square" lIns="45720" rIns="45720" tIns="18288" bIns="18288" anchor="t">
+          <a:bodyPr wrap="square" lIns="45720" tIns="18288" rIns="45720" bIns="18288" anchor="t">
             <a:spAutoFit/>
           </a:bodyPr>
           <a:lstStyle/>
@@ -20063,6 +20311,7 @@
           <a:lstStyle/>
           <a:p>
             <a:pPr algn="ctr"/>
+            <a:endParaRPr/>
           </a:p>
         </p:txBody>
       </p:sp>
@@ -20105,7 +20354,9 @@
         <p:txBody>
           <a:bodyPr rtlCol="0" anchor="ctr"/>
           <a:lstStyle/>
-          <a:p/>
+          <a:p>
+            <a:endParaRPr/>
+          </a:p>
         </p:txBody>
       </p:sp>
       <p:sp>
@@ -20148,6 +20399,7 @@
           <a:lstStyle/>
           <a:p>
             <a:pPr algn="ctr"/>
+            <a:endParaRPr/>
           </a:p>
         </p:txBody>
       </p:sp>
@@ -20168,7 +20420,7 @@
           <a:noFill/>
         </p:spPr>
         <p:txBody>
-          <a:bodyPr wrap="square" lIns="45720" rIns="45720" tIns="18288" bIns="18288" anchor="t">
+          <a:bodyPr wrap="square" lIns="45720" tIns="18288" rIns="45720" bIns="18288" anchor="t">
             <a:spAutoFit/>
           </a:bodyPr>
           <a:lstStyle/>
@@ -20210,7 +20462,7 @@
           <a:noFill/>
         </p:spPr>
         <p:txBody>
-          <a:bodyPr wrap="square" lIns="45720" rIns="45720" tIns="18288" bIns="18288" anchor="t">
+          <a:bodyPr wrap="square" lIns="45720" tIns="18288" rIns="45720" bIns="18288" anchor="t">
             <a:spAutoFit/>
           </a:bodyPr>
           <a:lstStyle/>
@@ -20252,7 +20504,7 @@
           <a:noFill/>
         </p:spPr>
         <p:txBody>
-          <a:bodyPr wrap="square" lIns="45720" rIns="45720" tIns="18288" bIns="18288" anchor="t">
+          <a:bodyPr wrap="square" lIns="45720" tIns="18288" rIns="45720" bIns="18288" anchor="t">
             <a:spAutoFit/>
           </a:bodyPr>
           <a:lstStyle/>
@@ -20320,6 +20572,7 @@
           <a:lstStyle/>
           <a:p>
             <a:pPr algn="ctr"/>
+            <a:endParaRPr/>
           </a:p>
         </p:txBody>
       </p:sp>
@@ -20362,7 +20615,9 @@
         <p:txBody>
           <a:bodyPr rtlCol="0" anchor="ctr"/>
           <a:lstStyle/>
-          <a:p/>
+          <a:p>
+            <a:endParaRPr/>
+          </a:p>
         </p:txBody>
       </p:sp>
       <p:sp>
@@ -20405,6 +20660,7 @@
           <a:lstStyle/>
           <a:p>
             <a:pPr algn="ctr"/>
+            <a:endParaRPr/>
           </a:p>
         </p:txBody>
       </p:sp>
@@ -20425,7 +20681,7 @@
           <a:noFill/>
         </p:spPr>
         <p:txBody>
-          <a:bodyPr wrap="square" lIns="45720" rIns="45720" tIns="18288" bIns="18288" anchor="t">
+          <a:bodyPr wrap="square" lIns="45720" tIns="18288" rIns="45720" bIns="18288" anchor="t">
             <a:spAutoFit/>
           </a:bodyPr>
           <a:lstStyle/>
@@ -20467,7 +20723,7 @@
           <a:noFill/>
         </p:spPr>
         <p:txBody>
-          <a:bodyPr wrap="square" lIns="45720" rIns="45720" tIns="18288" bIns="18288" anchor="t">
+          <a:bodyPr wrap="square" lIns="45720" tIns="18288" rIns="45720" bIns="18288" anchor="t">
             <a:spAutoFit/>
           </a:bodyPr>
           <a:lstStyle/>
@@ -20509,7 +20765,7 @@
           <a:noFill/>
         </p:spPr>
         <p:txBody>
-          <a:bodyPr wrap="square" lIns="45720" rIns="45720" tIns="18288" bIns="18288" anchor="t">
+          <a:bodyPr wrap="square" lIns="45720" tIns="18288" rIns="45720" bIns="18288" anchor="t">
             <a:spAutoFit/>
           </a:bodyPr>
           <a:lstStyle/>
@@ -20577,6 +20833,7 @@
           <a:lstStyle/>
           <a:p>
             <a:pPr algn="ctr"/>
+            <a:endParaRPr/>
           </a:p>
         </p:txBody>
       </p:sp>
@@ -20619,7 +20876,9 @@
         <p:txBody>
           <a:bodyPr rtlCol="0" anchor="ctr"/>
           <a:lstStyle/>
-          <a:p/>
+          <a:p>
+            <a:endParaRPr/>
+          </a:p>
         </p:txBody>
       </p:sp>
       <p:sp>
@@ -20662,6 +20921,7 @@
           <a:lstStyle/>
           <a:p>
             <a:pPr algn="ctr"/>
+            <a:endParaRPr/>
           </a:p>
         </p:txBody>
       </p:sp>
@@ -20682,7 +20942,7 @@
           <a:noFill/>
         </p:spPr>
         <p:txBody>
-          <a:bodyPr wrap="square" lIns="45720" rIns="45720" tIns="18288" bIns="18288" anchor="t">
+          <a:bodyPr wrap="square" lIns="45720" tIns="18288" rIns="45720" bIns="18288" anchor="t">
             <a:spAutoFit/>
           </a:bodyPr>
           <a:lstStyle/>
@@ -20724,7 +20984,7 @@
           <a:noFill/>
         </p:spPr>
         <p:txBody>
-          <a:bodyPr wrap="square" lIns="45720" rIns="45720" tIns="18288" bIns="18288" anchor="t">
+          <a:bodyPr wrap="square" lIns="45720" tIns="18288" rIns="45720" bIns="18288" anchor="t">
             <a:spAutoFit/>
           </a:bodyPr>
           <a:lstStyle/>
@@ -20766,7 +21026,7 @@
           <a:noFill/>
         </p:spPr>
         <p:txBody>
-          <a:bodyPr wrap="square" lIns="45720" rIns="45720" tIns="18288" bIns="18288" anchor="t">
+          <a:bodyPr wrap="square" lIns="45720" tIns="18288" rIns="45720" bIns="18288" anchor="t">
             <a:spAutoFit/>
           </a:bodyPr>
           <a:lstStyle/>
@@ -20834,6 +21094,7 @@
           <a:lstStyle/>
           <a:p>
             <a:pPr algn="ctr"/>
+            <a:endParaRPr/>
           </a:p>
         </p:txBody>
       </p:sp>
@@ -20876,7 +21137,9 @@
         <p:txBody>
           <a:bodyPr rtlCol="0" anchor="ctr"/>
           <a:lstStyle/>
-          <a:p/>
+          <a:p>
+            <a:endParaRPr/>
+          </a:p>
         </p:txBody>
       </p:sp>
       <p:sp>
@@ -20919,6 +21182,7 @@
           <a:lstStyle/>
           <a:p>
             <a:pPr algn="ctr"/>
+            <a:endParaRPr/>
           </a:p>
         </p:txBody>
       </p:sp>
@@ -20939,7 +21203,7 @@
           <a:noFill/>
         </p:spPr>
         <p:txBody>
-          <a:bodyPr wrap="square" lIns="45720" rIns="45720" tIns="18288" bIns="18288" anchor="t">
+          <a:bodyPr wrap="square" lIns="45720" tIns="18288" rIns="45720" bIns="18288" anchor="t">
             <a:spAutoFit/>
           </a:bodyPr>
           <a:lstStyle/>
@@ -20981,7 +21245,7 @@
           <a:noFill/>
         </p:spPr>
         <p:txBody>
-          <a:bodyPr wrap="square" lIns="45720" rIns="45720" tIns="18288" bIns="18288" anchor="t">
+          <a:bodyPr wrap="square" lIns="45720" tIns="18288" rIns="45720" bIns="18288" anchor="t">
             <a:spAutoFit/>
           </a:bodyPr>
           <a:lstStyle/>
@@ -21023,7 +21287,7 @@
           <a:noFill/>
         </p:spPr>
         <p:txBody>
-          <a:bodyPr wrap="square" lIns="45720" rIns="45720" tIns="18288" bIns="18288" anchor="t">
+          <a:bodyPr wrap="square" lIns="45720" tIns="18288" rIns="45720" bIns="18288" anchor="t">
             <a:spAutoFit/>
           </a:bodyPr>
           <a:lstStyle/>
@@ -21091,6 +21355,7 @@
           <a:lstStyle/>
           <a:p>
             <a:pPr algn="ctr"/>
+            <a:endParaRPr/>
           </a:p>
         </p:txBody>
       </p:sp>
@@ -21133,7 +21398,9 @@
         <p:txBody>
           <a:bodyPr rtlCol="0" anchor="ctr"/>
           <a:lstStyle/>
-          <a:p/>
+          <a:p>
+            <a:endParaRPr/>
+          </a:p>
         </p:txBody>
       </p:sp>
       <p:sp>
@@ -21176,6 +21443,7 @@
           <a:lstStyle/>
           <a:p>
             <a:pPr algn="ctr"/>
+            <a:endParaRPr/>
           </a:p>
         </p:txBody>
       </p:sp>
@@ -21196,7 +21464,7 @@
           <a:noFill/>
         </p:spPr>
         <p:txBody>
-          <a:bodyPr wrap="square" lIns="45720" rIns="45720" tIns="18288" bIns="18288" anchor="t">
+          <a:bodyPr wrap="square" lIns="45720" tIns="18288" rIns="45720" bIns="18288" anchor="t">
             <a:spAutoFit/>
           </a:bodyPr>
           <a:lstStyle/>
@@ -21238,7 +21506,7 @@
           <a:noFill/>
         </p:spPr>
         <p:txBody>
-          <a:bodyPr wrap="square" lIns="45720" rIns="45720" tIns="18288" bIns="18288" anchor="t">
+          <a:bodyPr wrap="square" lIns="45720" tIns="18288" rIns="45720" bIns="18288" anchor="t">
             <a:spAutoFit/>
           </a:bodyPr>
           <a:lstStyle/>
@@ -21280,7 +21548,7 @@
           <a:noFill/>
         </p:spPr>
         <p:txBody>
-          <a:bodyPr wrap="square" lIns="45720" rIns="45720" tIns="18288" bIns="18288" anchor="t">
+          <a:bodyPr wrap="square" lIns="45720" tIns="18288" rIns="45720" bIns="18288" anchor="t">
             <a:spAutoFit/>
           </a:bodyPr>
           <a:lstStyle/>
@@ -21348,6 +21616,7 @@
           <a:lstStyle/>
           <a:p>
             <a:pPr algn="ctr"/>
+            <a:endParaRPr/>
           </a:p>
         </p:txBody>
       </p:sp>
@@ -21390,7 +21659,9 @@
         <p:txBody>
           <a:bodyPr rtlCol="0" anchor="ctr"/>
           <a:lstStyle/>
-          <a:p/>
+          <a:p>
+            <a:endParaRPr/>
+          </a:p>
         </p:txBody>
       </p:sp>
       <p:sp>
@@ -21433,6 +21704,7 @@
           <a:lstStyle/>
           <a:p>
             <a:pPr algn="ctr"/>
+            <a:endParaRPr/>
           </a:p>
         </p:txBody>
       </p:sp>
@@ -21453,7 +21725,7 @@
           <a:noFill/>
         </p:spPr>
         <p:txBody>
-          <a:bodyPr wrap="square" lIns="45720" rIns="45720" tIns="18288" bIns="18288" anchor="t">
+          <a:bodyPr wrap="square" lIns="45720" tIns="18288" rIns="45720" bIns="18288" anchor="t">
             <a:spAutoFit/>
           </a:bodyPr>
           <a:lstStyle/>
@@ -21495,7 +21767,7 @@
           <a:noFill/>
         </p:spPr>
         <p:txBody>
-          <a:bodyPr wrap="square" lIns="45720" rIns="45720" tIns="18288" bIns="18288" anchor="t">
+          <a:bodyPr wrap="square" lIns="45720" tIns="18288" rIns="45720" bIns="18288" anchor="t">
             <a:spAutoFit/>
           </a:bodyPr>
           <a:lstStyle/>
@@ -21537,7 +21809,7 @@
           <a:noFill/>
         </p:spPr>
         <p:txBody>
-          <a:bodyPr wrap="square" lIns="45720" rIns="45720" tIns="18288" bIns="18288" anchor="t">
+          <a:bodyPr wrap="square" lIns="45720" tIns="18288" rIns="45720" bIns="18288" anchor="t">
             <a:spAutoFit/>
           </a:bodyPr>
           <a:lstStyle/>
@@ -21605,6 +21877,7 @@
           <a:lstStyle/>
           <a:p>
             <a:pPr algn="ctr"/>
+            <a:endParaRPr/>
           </a:p>
         </p:txBody>
       </p:sp>
@@ -21647,7 +21920,9 @@
         <p:txBody>
           <a:bodyPr rtlCol="0" anchor="ctr"/>
           <a:lstStyle/>
-          <a:p/>
+          <a:p>
+            <a:endParaRPr/>
+          </a:p>
         </p:txBody>
       </p:sp>
       <p:sp>
@@ -21690,6 +21965,7 @@
           <a:lstStyle/>
           <a:p>
             <a:pPr algn="ctr"/>
+            <a:endParaRPr/>
           </a:p>
         </p:txBody>
       </p:sp>
@@ -21710,7 +21986,7 @@
           <a:noFill/>
         </p:spPr>
         <p:txBody>
-          <a:bodyPr wrap="square" lIns="45720" rIns="45720" tIns="18288" bIns="18288" anchor="t">
+          <a:bodyPr wrap="square" lIns="45720" tIns="18288" rIns="45720" bIns="18288" anchor="t">
             <a:spAutoFit/>
           </a:bodyPr>
           <a:lstStyle/>
@@ -21752,7 +22028,7 @@
           <a:noFill/>
         </p:spPr>
         <p:txBody>
-          <a:bodyPr wrap="square" lIns="45720" rIns="45720" tIns="18288" bIns="18288" anchor="t">
+          <a:bodyPr wrap="square" lIns="45720" tIns="18288" rIns="45720" bIns="18288" anchor="t">
             <a:spAutoFit/>
           </a:bodyPr>
           <a:lstStyle/>
@@ -21794,7 +22070,7 @@
           <a:noFill/>
         </p:spPr>
         <p:txBody>
-          <a:bodyPr wrap="square" lIns="45720" rIns="45720" tIns="18288" bIns="18288" anchor="t">
+          <a:bodyPr wrap="square" lIns="45720" tIns="18288" rIns="45720" bIns="18288" anchor="t">
             <a:spAutoFit/>
           </a:bodyPr>
           <a:lstStyle/>
@@ -21862,6 +22138,7 @@
           <a:lstStyle/>
           <a:p>
             <a:pPr algn="ctr"/>
+            <a:endParaRPr/>
           </a:p>
         </p:txBody>
       </p:sp>
@@ -21904,7 +22181,9 @@
         <p:txBody>
           <a:bodyPr rtlCol="0" anchor="ctr"/>
           <a:lstStyle/>
-          <a:p/>
+          <a:p>
+            <a:endParaRPr/>
+          </a:p>
         </p:txBody>
       </p:sp>
       <p:sp>
@@ -21947,6 +22226,7 @@
           <a:lstStyle/>
           <a:p>
             <a:pPr algn="ctr"/>
+            <a:endParaRPr/>
           </a:p>
         </p:txBody>
       </p:sp>
@@ -21967,7 +22247,7 @@
           <a:noFill/>
         </p:spPr>
         <p:txBody>
-          <a:bodyPr wrap="square" lIns="45720" rIns="45720" tIns="18288" bIns="18288" anchor="t">
+          <a:bodyPr wrap="square" lIns="45720" tIns="18288" rIns="45720" bIns="18288" anchor="t">
             <a:spAutoFit/>
           </a:bodyPr>
           <a:lstStyle/>
@@ -22009,7 +22289,7 @@
           <a:noFill/>
         </p:spPr>
         <p:txBody>
-          <a:bodyPr wrap="square" lIns="45720" rIns="45720" tIns="18288" bIns="18288" anchor="t">
+          <a:bodyPr wrap="square" lIns="45720" tIns="18288" rIns="45720" bIns="18288" anchor="t">
             <a:spAutoFit/>
           </a:bodyPr>
           <a:lstStyle/>
@@ -22051,7 +22331,7 @@
           <a:noFill/>
         </p:spPr>
         <p:txBody>
-          <a:bodyPr wrap="square" lIns="45720" rIns="45720" tIns="18288" bIns="18288" anchor="t">
+          <a:bodyPr wrap="square" lIns="45720" tIns="18288" rIns="45720" bIns="18288" anchor="t">
             <a:spAutoFit/>
           </a:bodyPr>
           <a:lstStyle/>
@@ -22119,6 +22399,7 @@
           <a:lstStyle/>
           <a:p>
             <a:pPr algn="ctr"/>
+            <a:endParaRPr/>
           </a:p>
         </p:txBody>
       </p:sp>
@@ -22139,7 +22420,7 @@
           <a:noFill/>
         </p:spPr>
         <p:txBody>
-          <a:bodyPr wrap="square" lIns="45720" rIns="45720" tIns="18288" bIns="18288" anchor="t">
+          <a:bodyPr wrap="square" lIns="45720" tIns="18288" rIns="45720" bIns="18288" anchor="t">
             <a:spAutoFit/>
           </a:bodyPr>
           <a:lstStyle/>
@@ -22203,7 +22484,9 @@
         <p:txBody>
           <a:bodyPr rtlCol="0" anchor="ctr"/>
           <a:lstStyle/>
-          <a:p/>
+          <a:p>
+            <a:endParaRPr/>
+          </a:p>
         </p:txBody>
       </p:sp>
       <p:sp>
@@ -22223,7 +22506,7 @@
           <a:noFill/>
         </p:spPr>
         <p:txBody>
-          <a:bodyPr wrap="square" lIns="45720" rIns="45720" tIns="18288" bIns="18288" anchor="t">
+          <a:bodyPr wrap="square" lIns="45720" tIns="18288" rIns="45720" bIns="18288" anchor="t">
             <a:spAutoFit/>
           </a:bodyPr>
           <a:lstStyle/>
@@ -22265,7 +22548,7 @@
           <a:noFill/>
         </p:spPr>
         <p:txBody>
-          <a:bodyPr wrap="square" lIns="45720" rIns="45720" tIns="18288" bIns="18288" anchor="t">
+          <a:bodyPr wrap="square" lIns="45720" tIns="18288" rIns="45720" bIns="18288" anchor="t">
             <a:spAutoFit/>
           </a:bodyPr>
           <a:lstStyle/>
@@ -22299,7 +22582,7 @@
 </file>
 
 <file path=ppt/slides/slide6.xml><?xml version="1.0" encoding="utf-8"?>
-<p:sld xmlns:a="http://schemas.openxmlformats.org/drawingml/2006/main" xmlns:p="http://schemas.openxmlformats.org/presentationml/2006/main" xmlns:r="http://schemas.openxmlformats.org/officeDocument/2006/relationships">
+<p:sld xmlns:a="http://schemas.openxmlformats.org/drawingml/2006/main" xmlns:r="http://schemas.openxmlformats.org/officeDocument/2006/relationships" xmlns:p="http://schemas.openxmlformats.org/presentationml/2006/main">
   <p:cSld>
     <p:spTree>
       <p:nvGrpSpPr>
@@ -22307,7 +22590,14 @@
         <p:cNvGrpSpPr/>
         <p:nvPr/>
       </p:nvGrpSpPr>
-      <p:grpSpPr/>
+      <p:grpSpPr>
+        <a:xfrm>
+          <a:off x="0" y="0"/>
+          <a:ext cx="0" cy="0"/>
+          <a:chOff x="0" y="0"/>
+          <a:chExt cx="0" cy="0"/>
+        </a:xfrm>
+      </p:grpSpPr>
       <p:sp>
         <p:nvSpPr>
           <p:cNvPr id="2" name="Rectangle 1"/>
@@ -22347,7 +22637,9 @@
         <p:txBody>
           <a:bodyPr rtlCol="0" anchor="ctr"/>
           <a:lstStyle/>
-          <a:p/>
+          <a:p>
+            <a:endParaRPr/>
+          </a:p>
         </p:txBody>
       </p:sp>
       <p:sp>
@@ -22367,7 +22659,7 @@
           <a:noFill/>
         </p:spPr>
         <p:txBody>
-          <a:bodyPr wrap="square" lIns="45720" rIns="45720" tIns="18288" bIns="18288" anchor="t">
+          <a:bodyPr wrap="square" lIns="45720" tIns="18288" rIns="45720" bIns="18288" anchor="t">
             <a:spAutoFit/>
           </a:bodyPr>
           <a:lstStyle/>
@@ -22409,7 +22701,7 @@
           <a:noFill/>
         </p:spPr>
         <p:txBody>
-          <a:bodyPr wrap="square" lIns="45720" rIns="45720" tIns="18288" bIns="18288" anchor="t">
+          <a:bodyPr wrap="square" lIns="45720" tIns="18288" rIns="45720" bIns="18288" anchor="t">
             <a:spAutoFit/>
           </a:bodyPr>
           <a:lstStyle/>
@@ -22451,7 +22743,7 @@
           <a:noFill/>
         </p:spPr>
         <p:txBody>
-          <a:bodyPr wrap="square" lIns="45720" rIns="45720" tIns="18288" bIns="18288" anchor="t">
+          <a:bodyPr wrap="square" lIns="45720" tIns="18288" rIns="45720" bIns="18288" anchor="t">
             <a:spAutoFit/>
           </a:bodyPr>
           <a:lstStyle/>
@@ -22519,6 +22811,7 @@
           <a:lstStyle/>
           <a:p>
             <a:pPr algn="ctr"/>
+            <a:endParaRPr/>
           </a:p>
         </p:txBody>
       </p:sp>
@@ -22539,7 +22832,7 @@
           <a:noFill/>
         </p:spPr>
         <p:txBody>
-          <a:bodyPr wrap="square" lIns="45720" rIns="45720" tIns="18288" bIns="18288" anchor="t">
+          <a:bodyPr wrap="square" lIns="45720" tIns="18288" rIns="45720" bIns="18288" anchor="t">
             <a:spAutoFit/>
           </a:bodyPr>
           <a:lstStyle/>
@@ -22581,7 +22874,7 @@
           <a:noFill/>
         </p:spPr>
         <p:txBody>
-          <a:bodyPr wrap="square" lIns="45720" rIns="45720" tIns="18288" bIns="18288" anchor="t">
+          <a:bodyPr wrap="square" lIns="45720" tIns="18288" rIns="45720" bIns="18288" anchor="t">
             <a:spAutoFit/>
           </a:bodyPr>
           <a:lstStyle/>
@@ -22645,7 +22938,9 @@
         <p:txBody>
           <a:bodyPr rtlCol="0" anchor="ctr"/>
           <a:lstStyle/>
-          <a:p/>
+          <a:p>
+            <a:endParaRPr/>
+          </a:p>
         </p:txBody>
       </p:sp>
       <p:sp>
@@ -22688,6 +22983,7 @@
           <a:lstStyle/>
           <a:p>
             <a:pPr algn="ctr"/>
+            <a:endParaRPr/>
           </a:p>
         </p:txBody>
       </p:sp>
@@ -22708,7 +23004,7 @@
           <a:noFill/>
         </p:spPr>
         <p:txBody>
-          <a:bodyPr wrap="square" lIns="45720" rIns="45720" tIns="18288" bIns="18288" anchor="t">
+          <a:bodyPr wrap="square" lIns="45720" tIns="18288" rIns="45720" bIns="18288" anchor="t">
             <a:spAutoFit/>
           </a:bodyPr>
           <a:lstStyle/>
@@ -22750,7 +23046,7 @@
           <a:noFill/>
         </p:spPr>
         <p:txBody>
-          <a:bodyPr wrap="square" lIns="45720" rIns="45720" tIns="18288" bIns="18288" anchor="t">
+          <a:bodyPr wrap="square" lIns="45720" tIns="18288" rIns="45720" bIns="18288" anchor="t">
             <a:spAutoFit/>
           </a:bodyPr>
           <a:lstStyle/>
@@ -22814,7 +23110,9 @@
         <p:txBody>
           <a:bodyPr rtlCol="0" anchor="ctr"/>
           <a:lstStyle/>
-          <a:p/>
+          <a:p>
+            <a:endParaRPr/>
+          </a:p>
         </p:txBody>
       </p:sp>
       <p:sp>
@@ -22834,7 +23132,7 @@
           <a:noFill/>
         </p:spPr>
         <p:txBody>
-          <a:bodyPr wrap="square" lIns="45720" rIns="45720" tIns="18288" bIns="18288" anchor="t">
+          <a:bodyPr wrap="square" lIns="45720" tIns="18288" rIns="45720" bIns="18288" anchor="t">
             <a:spAutoFit/>
           </a:bodyPr>
           <a:lstStyle/>
@@ -22898,7 +23196,9 @@
         <p:txBody>
           <a:bodyPr rtlCol="0" anchor="ctr"/>
           <a:lstStyle/>
-          <a:p/>
+          <a:p>
+            <a:endParaRPr/>
+          </a:p>
         </p:txBody>
       </p:sp>
       <p:sp>
@@ -22941,6 +23241,7 @@
           <a:lstStyle/>
           <a:p>
             <a:pPr algn="ctr"/>
+            <a:endParaRPr/>
           </a:p>
         </p:txBody>
       </p:sp>
@@ -22961,7 +23262,7 @@
           <a:noFill/>
         </p:spPr>
         <p:txBody>
-          <a:bodyPr wrap="square" lIns="45720" rIns="45720" tIns="18288" bIns="18288" anchor="t">
+          <a:bodyPr wrap="square" lIns="45720" tIns="18288" rIns="45720" bIns="18288" anchor="t">
             <a:spAutoFit/>
           </a:bodyPr>
           <a:lstStyle/>
@@ -23003,7 +23304,7 @@
           <a:noFill/>
         </p:spPr>
         <p:txBody>
-          <a:bodyPr wrap="square" lIns="45720" rIns="45720" tIns="18288" bIns="18288" anchor="t">
+          <a:bodyPr wrap="square" lIns="45720" tIns="18288" rIns="45720" bIns="18288" anchor="t">
             <a:spAutoFit/>
           </a:bodyPr>
           <a:lstStyle/>
@@ -23067,7 +23368,9 @@
         <p:txBody>
           <a:bodyPr rtlCol="0" anchor="ctr"/>
           <a:lstStyle/>
-          <a:p/>
+          <a:p>
+            <a:endParaRPr/>
+          </a:p>
         </p:txBody>
       </p:sp>
       <p:sp>
@@ -23087,7 +23390,7 @@
           <a:noFill/>
         </p:spPr>
         <p:txBody>
-          <a:bodyPr wrap="square" lIns="45720" rIns="45720" tIns="18288" bIns="18288" anchor="t">
+          <a:bodyPr wrap="square" lIns="45720" tIns="18288" rIns="45720" bIns="18288" anchor="t">
             <a:spAutoFit/>
           </a:bodyPr>
           <a:lstStyle/>
@@ -23151,7 +23454,9 @@
         <p:txBody>
           <a:bodyPr rtlCol="0" anchor="ctr"/>
           <a:lstStyle/>
-          <a:p/>
+          <a:p>
+            <a:endParaRPr/>
+          </a:p>
         </p:txBody>
       </p:sp>
       <p:sp>
@@ -23194,6 +23499,7 @@
           <a:lstStyle/>
           <a:p>
             <a:pPr algn="ctr"/>
+            <a:endParaRPr/>
           </a:p>
         </p:txBody>
       </p:sp>
@@ -23214,7 +23520,7 @@
           <a:noFill/>
         </p:spPr>
         <p:txBody>
-          <a:bodyPr wrap="square" lIns="45720" rIns="45720" tIns="18288" bIns="18288" anchor="t">
+          <a:bodyPr wrap="square" lIns="45720" tIns="18288" rIns="45720" bIns="18288" anchor="t">
             <a:spAutoFit/>
           </a:bodyPr>
           <a:lstStyle/>
@@ -23256,7 +23562,7 @@
           <a:noFill/>
         </p:spPr>
         <p:txBody>
-          <a:bodyPr wrap="square" lIns="45720" rIns="45720" tIns="18288" bIns="18288" anchor="t">
+          <a:bodyPr wrap="square" lIns="45720" tIns="18288" rIns="45720" bIns="18288" anchor="t">
             <a:spAutoFit/>
           </a:bodyPr>
           <a:lstStyle/>
@@ -23320,7 +23626,9 @@
         <p:txBody>
           <a:bodyPr rtlCol="0" anchor="ctr"/>
           <a:lstStyle/>
-          <a:p/>
+          <a:p>
+            <a:endParaRPr/>
+          </a:p>
         </p:txBody>
       </p:sp>
       <p:sp>
@@ -23340,7 +23648,7 @@
           <a:noFill/>
         </p:spPr>
         <p:txBody>
-          <a:bodyPr wrap="square" lIns="45720" rIns="45720" tIns="18288" bIns="18288" anchor="t">
+          <a:bodyPr wrap="square" lIns="45720" tIns="18288" rIns="45720" bIns="18288" anchor="t">
             <a:spAutoFit/>
           </a:bodyPr>
           <a:lstStyle/>
@@ -23404,7 +23712,9 @@
         <p:txBody>
           <a:bodyPr rtlCol="0" anchor="ctr"/>
           <a:lstStyle/>
-          <a:p/>
+          <a:p>
+            <a:endParaRPr/>
+          </a:p>
         </p:txBody>
       </p:sp>
       <p:sp>
@@ -23447,6 +23757,7 @@
           <a:lstStyle/>
           <a:p>
             <a:pPr algn="ctr"/>
+            <a:endParaRPr/>
           </a:p>
         </p:txBody>
       </p:sp>
@@ -23467,7 +23778,7 @@
           <a:noFill/>
         </p:spPr>
         <p:txBody>
-          <a:bodyPr wrap="square" lIns="45720" rIns="45720" tIns="18288" bIns="18288" anchor="t">
+          <a:bodyPr wrap="square" lIns="45720" tIns="18288" rIns="45720" bIns="18288" anchor="t">
             <a:spAutoFit/>
           </a:bodyPr>
           <a:lstStyle/>
@@ -23509,7 +23820,7 @@
           <a:noFill/>
         </p:spPr>
         <p:txBody>
-          <a:bodyPr wrap="square" lIns="45720" rIns="45720" tIns="18288" bIns="18288" anchor="t">
+          <a:bodyPr wrap="square" lIns="45720" tIns="18288" rIns="45720" bIns="18288" anchor="t">
             <a:spAutoFit/>
           </a:bodyPr>
           <a:lstStyle/>
@@ -23573,7 +23884,9 @@
         <p:txBody>
           <a:bodyPr rtlCol="0" anchor="ctr"/>
           <a:lstStyle/>
-          <a:p/>
+          <a:p>
+            <a:endParaRPr/>
+          </a:p>
         </p:txBody>
       </p:sp>
       <p:sp>
@@ -23593,7 +23906,7 @@
           <a:noFill/>
         </p:spPr>
         <p:txBody>
-          <a:bodyPr wrap="square" lIns="45720" rIns="45720" tIns="18288" bIns="18288" anchor="t">
+          <a:bodyPr wrap="square" lIns="45720" tIns="18288" rIns="45720" bIns="18288" anchor="t">
             <a:spAutoFit/>
           </a:bodyPr>
           <a:lstStyle/>
@@ -23657,7 +23970,9 @@
         <p:txBody>
           <a:bodyPr rtlCol="0" anchor="ctr"/>
           <a:lstStyle/>
-          <a:p/>
+          <a:p>
+            <a:endParaRPr/>
+          </a:p>
         </p:txBody>
       </p:sp>
       <p:sp>
@@ -23700,6 +24015,7 @@
           <a:lstStyle/>
           <a:p>
             <a:pPr algn="ctr"/>
+            <a:endParaRPr/>
           </a:p>
         </p:txBody>
       </p:sp>
@@ -23720,7 +24036,7 @@
           <a:noFill/>
         </p:spPr>
         <p:txBody>
-          <a:bodyPr wrap="square" lIns="45720" rIns="45720" tIns="18288" bIns="18288" anchor="t">
+          <a:bodyPr wrap="square" lIns="45720" tIns="18288" rIns="45720" bIns="18288" anchor="t">
             <a:spAutoFit/>
           </a:bodyPr>
           <a:lstStyle/>
@@ -23762,7 +24078,7 @@
           <a:noFill/>
         </p:spPr>
         <p:txBody>
-          <a:bodyPr wrap="square" lIns="45720" rIns="45720" tIns="18288" bIns="18288" anchor="t">
+          <a:bodyPr wrap="square" lIns="45720" tIns="18288" rIns="45720" bIns="18288" anchor="t">
             <a:spAutoFit/>
           </a:bodyPr>
           <a:lstStyle/>
@@ -23826,7 +24142,9 @@
         <p:txBody>
           <a:bodyPr rtlCol="0" anchor="ctr"/>
           <a:lstStyle/>
-          <a:p/>
+          <a:p>
+            <a:endParaRPr/>
+          </a:p>
         </p:txBody>
       </p:sp>
       <p:sp>
@@ -23846,7 +24164,7 @@
           <a:noFill/>
         </p:spPr>
         <p:txBody>
-          <a:bodyPr wrap="square" lIns="45720" rIns="45720" tIns="18288" bIns="18288" anchor="t">
+          <a:bodyPr wrap="square" lIns="45720" tIns="18288" rIns="45720" bIns="18288" anchor="t">
             <a:spAutoFit/>
           </a:bodyPr>
           <a:lstStyle/>
@@ -23910,7 +24228,9 @@
         <p:txBody>
           <a:bodyPr rtlCol="0" anchor="ctr"/>
           <a:lstStyle/>
-          <a:p/>
+          <a:p>
+            <a:endParaRPr/>
+          </a:p>
         </p:txBody>
       </p:sp>
       <p:sp>
@@ -23953,6 +24273,7 @@
           <a:lstStyle/>
           <a:p>
             <a:pPr algn="ctr"/>
+            <a:endParaRPr/>
           </a:p>
         </p:txBody>
       </p:sp>
@@ -23973,7 +24294,7 @@
           <a:noFill/>
         </p:spPr>
         <p:txBody>
-          <a:bodyPr wrap="square" lIns="45720" rIns="45720" tIns="18288" bIns="18288" anchor="t">
+          <a:bodyPr wrap="square" lIns="45720" tIns="18288" rIns="45720" bIns="18288" anchor="t">
             <a:spAutoFit/>
           </a:bodyPr>
           <a:lstStyle/>
@@ -24015,7 +24336,7 @@
           <a:noFill/>
         </p:spPr>
         <p:txBody>
-          <a:bodyPr wrap="square" lIns="45720" rIns="45720" tIns="18288" bIns="18288" anchor="t">
+          <a:bodyPr wrap="square" lIns="45720" tIns="18288" rIns="45720" bIns="18288" anchor="t">
             <a:spAutoFit/>
           </a:bodyPr>
           <a:lstStyle/>
@@ -24079,7 +24400,9 @@
         <p:txBody>
           <a:bodyPr rtlCol="0" anchor="ctr"/>
           <a:lstStyle/>
-          <a:p/>
+          <a:p>
+            <a:endParaRPr/>
+          </a:p>
         </p:txBody>
       </p:sp>
       <p:sp>
@@ -24099,7 +24422,7 @@
           <a:noFill/>
         </p:spPr>
         <p:txBody>
-          <a:bodyPr wrap="square" lIns="45720" rIns="45720" tIns="18288" bIns="18288" anchor="t">
+          <a:bodyPr wrap="square" lIns="45720" tIns="18288" rIns="45720" bIns="18288" anchor="t">
             <a:spAutoFit/>
           </a:bodyPr>
           <a:lstStyle/>
@@ -24167,6 +24490,7 @@
           <a:lstStyle/>
           <a:p>
             <a:pPr algn="ctr"/>
+            <a:endParaRPr/>
           </a:p>
         </p:txBody>
       </p:sp>
@@ -24187,7 +24511,7 @@
           <a:noFill/>
         </p:spPr>
         <p:txBody>
-          <a:bodyPr wrap="square" lIns="45720" rIns="45720" tIns="18288" bIns="18288" anchor="t">
+          <a:bodyPr wrap="square" lIns="45720" tIns="18288" rIns="45720" bIns="18288" anchor="t">
             <a:spAutoFit/>
           </a:bodyPr>
           <a:lstStyle/>
@@ -24251,7 +24575,9 @@
         <p:txBody>
           <a:bodyPr rtlCol="0" anchor="ctr"/>
           <a:lstStyle/>
-          <a:p/>
+          <a:p>
+            <a:endParaRPr/>
+          </a:p>
         </p:txBody>
       </p:sp>
       <p:sp>
@@ -24271,7 +24597,7 @@
           <a:noFill/>
         </p:spPr>
         <p:txBody>
-          <a:bodyPr wrap="square" lIns="45720" rIns="45720" tIns="18288" bIns="18288" anchor="t">
+          <a:bodyPr wrap="square" lIns="45720" tIns="18288" rIns="45720" bIns="18288" anchor="t">
             <a:spAutoFit/>
           </a:bodyPr>
           <a:lstStyle/>
@@ -24313,7 +24639,7 @@
           <a:noFill/>
         </p:spPr>
         <p:txBody>
-          <a:bodyPr wrap="square" lIns="45720" rIns="45720" tIns="18288" bIns="18288" anchor="t">
+          <a:bodyPr wrap="square" lIns="45720" tIns="18288" rIns="45720" bIns="18288" anchor="t">
             <a:spAutoFit/>
           </a:bodyPr>
           <a:lstStyle/>
@@ -24347,7 +24673,7 @@
 </file>
 
 <file path=ppt/slides/slide7.xml><?xml version="1.0" encoding="utf-8"?>
-<p:sld xmlns:a="http://schemas.openxmlformats.org/drawingml/2006/main" xmlns:p="http://schemas.openxmlformats.org/presentationml/2006/main" xmlns:r="http://schemas.openxmlformats.org/officeDocument/2006/relationships">
+<p:sld xmlns:a="http://schemas.openxmlformats.org/drawingml/2006/main" xmlns:r="http://schemas.openxmlformats.org/officeDocument/2006/relationships" xmlns:p="http://schemas.openxmlformats.org/presentationml/2006/main">
   <p:cSld>
     <p:spTree>
       <p:nvGrpSpPr>
@@ -24355,7 +24681,14 @@
         <p:cNvGrpSpPr/>
         <p:nvPr/>
       </p:nvGrpSpPr>
-      <p:grpSpPr/>
+      <p:grpSpPr>
+        <a:xfrm>
+          <a:off x="0" y="0"/>
+          <a:ext cx="0" cy="0"/>
+          <a:chOff x="0" y="0"/>
+          <a:chExt cx="0" cy="0"/>
+        </a:xfrm>
+      </p:grpSpPr>
       <p:sp>
         <p:nvSpPr>
           <p:cNvPr id="2" name="Rectangle 1"/>
@@ -24395,7 +24728,9 @@
         <p:txBody>
           <a:bodyPr rtlCol="0" anchor="ctr"/>
           <a:lstStyle/>
-          <a:p/>
+          <a:p>
+            <a:endParaRPr/>
+          </a:p>
         </p:txBody>
       </p:sp>
       <p:sp>
@@ -24415,7 +24750,7 @@
           <a:noFill/>
         </p:spPr>
         <p:txBody>
-          <a:bodyPr wrap="square" lIns="45720" rIns="45720" tIns="18288" bIns="18288" anchor="t">
+          <a:bodyPr wrap="square" lIns="45720" tIns="18288" rIns="45720" bIns="18288" anchor="t">
             <a:spAutoFit/>
           </a:bodyPr>
           <a:lstStyle/>
@@ -24457,7 +24792,7 @@
           <a:noFill/>
         </p:spPr>
         <p:txBody>
-          <a:bodyPr wrap="square" lIns="45720" rIns="45720" tIns="18288" bIns="18288" anchor="t">
+          <a:bodyPr wrap="square" lIns="45720" tIns="18288" rIns="45720" bIns="18288" anchor="t">
             <a:spAutoFit/>
           </a:bodyPr>
           <a:lstStyle/>
@@ -24499,7 +24834,7 @@
           <a:noFill/>
         </p:spPr>
         <p:txBody>
-          <a:bodyPr wrap="square" lIns="45720" rIns="45720" tIns="18288" bIns="18288" anchor="t">
+          <a:bodyPr wrap="square" lIns="45720" tIns="18288" rIns="45720" bIns="18288" anchor="t">
             <a:spAutoFit/>
           </a:bodyPr>
           <a:lstStyle/>
@@ -24567,6 +24902,7 @@
           <a:lstStyle/>
           <a:p>
             <a:pPr algn="ctr"/>
+            <a:endParaRPr/>
           </a:p>
         </p:txBody>
       </p:sp>
@@ -24613,6 +24949,7 @@
           <a:lstStyle/>
           <a:p>
             <a:pPr algn="ctr"/>
+            <a:endParaRPr/>
           </a:p>
         </p:txBody>
       </p:sp>
@@ -24633,7 +24970,7 @@
           <a:noFill/>
         </p:spPr>
         <p:txBody>
-          <a:bodyPr wrap="square" lIns="45720" rIns="45720" tIns="18288" bIns="18288" anchor="t">
+          <a:bodyPr wrap="square" lIns="45720" tIns="18288" rIns="45720" bIns="18288" anchor="t">
             <a:spAutoFit/>
           </a:bodyPr>
           <a:lstStyle/>
@@ -24698,6 +25035,7 @@
           <a:lstStyle/>
           <a:p>
             <a:pPr algn="ctr"/>
+            <a:endParaRPr/>
           </a:p>
         </p:txBody>
       </p:sp>
@@ -24718,7 +25056,7 @@
           <a:noFill/>
         </p:spPr>
         <p:txBody>
-          <a:bodyPr wrap="square" lIns="45720" rIns="45720" tIns="18288" bIns="18288" anchor="t">
+          <a:bodyPr wrap="square" lIns="45720" tIns="18288" rIns="45720" bIns="18288" anchor="t">
             <a:spAutoFit/>
           </a:bodyPr>
           <a:lstStyle/>
@@ -24786,6 +25124,7 @@
           <a:lstStyle/>
           <a:p>
             <a:pPr algn="ctr"/>
+            <a:endParaRPr/>
           </a:p>
         </p:txBody>
       </p:sp>
@@ -24806,7 +25145,7 @@
           <a:noFill/>
         </p:spPr>
         <p:txBody>
-          <a:bodyPr wrap="square" lIns="45720" rIns="45720" tIns="18288" bIns="18288" anchor="t">
+          <a:bodyPr wrap="square" lIns="45720" tIns="18288" rIns="45720" bIns="18288" anchor="t">
             <a:spAutoFit/>
           </a:bodyPr>
           <a:lstStyle/>
@@ -24848,7 +25187,7 @@
           <a:noFill/>
         </p:spPr>
         <p:txBody>
-          <a:bodyPr wrap="square" lIns="45720" rIns="45720" tIns="18288" bIns="18288" anchor="t">
+          <a:bodyPr wrap="square" lIns="45720" tIns="18288" rIns="45720" bIns="18288" anchor="t">
             <a:spAutoFit/>
           </a:bodyPr>
           <a:lstStyle/>
@@ -24913,6 +25252,7 @@
           <a:lstStyle/>
           <a:p>
             <a:pPr algn="ctr"/>
+            <a:endParaRPr/>
           </a:p>
         </p:txBody>
       </p:sp>
@@ -24933,7 +25273,7 @@
           <a:noFill/>
         </p:spPr>
         <p:txBody>
-          <a:bodyPr wrap="square" lIns="45720" rIns="45720" tIns="18288" bIns="18288" anchor="t">
+          <a:bodyPr wrap="square" lIns="45720" tIns="18288" rIns="45720" bIns="18288" anchor="t">
             <a:spAutoFit/>
           </a:bodyPr>
           <a:lstStyle/>
@@ -25003,6 +25343,7 @@
           <a:lstStyle/>
           <a:p>
             <a:pPr algn="ctr"/>
+            <a:endParaRPr/>
           </a:p>
         </p:txBody>
       </p:sp>
@@ -25023,7 +25364,7 @@
           <a:noFill/>
         </p:spPr>
         <p:txBody>
-          <a:bodyPr wrap="square" lIns="45720" rIns="45720" tIns="18288" bIns="18288" anchor="t">
+          <a:bodyPr wrap="square" lIns="45720" tIns="18288" rIns="45720" bIns="18288" anchor="t">
             <a:spAutoFit/>
           </a:bodyPr>
           <a:lstStyle/>
@@ -25093,6 +25434,7 @@
           <a:lstStyle/>
           <a:p>
             <a:pPr algn="ctr"/>
+            <a:endParaRPr/>
           </a:p>
         </p:txBody>
       </p:sp>
@@ -25113,7 +25455,7 @@
           <a:noFill/>
         </p:spPr>
         <p:txBody>
-          <a:bodyPr wrap="square" lIns="45720" rIns="45720" tIns="18288" bIns="18288" anchor="t">
+          <a:bodyPr wrap="square" lIns="45720" tIns="18288" rIns="45720" bIns="18288" anchor="t">
             <a:spAutoFit/>
           </a:bodyPr>
           <a:lstStyle/>
@@ -25155,7 +25497,7 @@
           <a:noFill/>
         </p:spPr>
         <p:txBody>
-          <a:bodyPr wrap="square" lIns="45720" rIns="45720" tIns="18288" bIns="18288" anchor="t">
+          <a:bodyPr wrap="square" lIns="45720" tIns="18288" rIns="45720" bIns="18288" anchor="t">
             <a:spAutoFit/>
           </a:bodyPr>
           <a:lstStyle/>
@@ -25223,6 +25565,7 @@
           <a:lstStyle/>
           <a:p>
             <a:pPr algn="ctr"/>
+            <a:endParaRPr/>
           </a:p>
         </p:txBody>
       </p:sp>
@@ -25265,7 +25608,9 @@
         <p:txBody>
           <a:bodyPr rtlCol="0" anchor="ctr"/>
           <a:lstStyle/>
-          <a:p/>
+          <a:p>
+            <a:endParaRPr/>
+          </a:p>
         </p:txBody>
       </p:sp>
       <p:sp>
@@ -25285,7 +25630,7 @@
           <a:noFill/>
         </p:spPr>
         <p:txBody>
-          <a:bodyPr wrap="square" lIns="45720" rIns="45720" tIns="18288" bIns="18288" anchor="t">
+          <a:bodyPr wrap="square" lIns="45720" tIns="18288" rIns="45720" bIns="18288" anchor="t">
             <a:spAutoFit/>
           </a:bodyPr>
           <a:lstStyle/>
@@ -25327,7 +25672,7 @@
           <a:noFill/>
         </p:spPr>
         <p:txBody>
-          <a:bodyPr wrap="square" lIns="45720" rIns="45720" tIns="18288" bIns="18288" anchor="t">
+          <a:bodyPr wrap="square" lIns="45720" tIns="18288" rIns="45720" bIns="18288" anchor="t">
             <a:spAutoFit/>
           </a:bodyPr>
           <a:lstStyle/>
@@ -25395,6 +25740,7 @@
           <a:lstStyle/>
           <a:p>
             <a:pPr algn="ctr"/>
+            <a:endParaRPr/>
           </a:p>
         </p:txBody>
       </p:sp>
@@ -25437,7 +25783,9 @@
         <p:txBody>
           <a:bodyPr rtlCol="0" anchor="ctr"/>
           <a:lstStyle/>
-          <a:p/>
+          <a:p>
+            <a:endParaRPr/>
+          </a:p>
         </p:txBody>
       </p:sp>
       <p:sp>
@@ -25457,7 +25805,7 @@
           <a:noFill/>
         </p:spPr>
         <p:txBody>
-          <a:bodyPr wrap="square" lIns="45720" rIns="45720" tIns="18288" bIns="18288" anchor="t">
+          <a:bodyPr wrap="square" lIns="45720" tIns="18288" rIns="45720" bIns="18288" anchor="t">
             <a:spAutoFit/>
           </a:bodyPr>
           <a:lstStyle/>
@@ -25499,7 +25847,7 @@
           <a:noFill/>
         </p:spPr>
         <p:txBody>
-          <a:bodyPr wrap="square" lIns="45720" rIns="45720" tIns="18288" bIns="18288" anchor="t">
+          <a:bodyPr wrap="square" lIns="45720" tIns="18288" rIns="45720" bIns="18288" anchor="t">
             <a:spAutoFit/>
           </a:bodyPr>
           <a:lstStyle/>
@@ -25567,6 +25915,7 @@
           <a:lstStyle/>
           <a:p>
             <a:pPr algn="ctr"/>
+            <a:endParaRPr/>
           </a:p>
         </p:txBody>
       </p:sp>
@@ -25609,7 +25958,9 @@
         <p:txBody>
           <a:bodyPr rtlCol="0" anchor="ctr"/>
           <a:lstStyle/>
-          <a:p/>
+          <a:p>
+            <a:endParaRPr/>
+          </a:p>
         </p:txBody>
       </p:sp>
       <p:sp>
@@ -25629,7 +25980,7 @@
           <a:noFill/>
         </p:spPr>
         <p:txBody>
-          <a:bodyPr wrap="square" lIns="45720" rIns="45720" tIns="18288" bIns="18288" anchor="t">
+          <a:bodyPr wrap="square" lIns="45720" tIns="18288" rIns="45720" bIns="18288" anchor="t">
             <a:spAutoFit/>
           </a:bodyPr>
           <a:lstStyle/>
@@ -25671,7 +26022,7 @@
           <a:noFill/>
         </p:spPr>
         <p:txBody>
-          <a:bodyPr wrap="square" lIns="45720" rIns="45720" tIns="18288" bIns="18288" anchor="t">
+          <a:bodyPr wrap="square" lIns="45720" tIns="18288" rIns="45720" bIns="18288" anchor="t">
             <a:spAutoFit/>
           </a:bodyPr>
           <a:lstStyle/>
@@ -25739,6 +26090,7 @@
           <a:lstStyle/>
           <a:p>
             <a:pPr algn="ctr"/>
+            <a:endParaRPr/>
           </a:p>
         </p:txBody>
       </p:sp>
@@ -25781,7 +26133,9 @@
         <p:txBody>
           <a:bodyPr rtlCol="0" anchor="ctr"/>
           <a:lstStyle/>
-          <a:p/>
+          <a:p>
+            <a:endParaRPr/>
+          </a:p>
         </p:txBody>
       </p:sp>
       <p:sp>
@@ -25801,7 +26155,7 @@
           <a:noFill/>
         </p:spPr>
         <p:txBody>
-          <a:bodyPr wrap="square" lIns="45720" rIns="45720" tIns="18288" bIns="18288" anchor="t">
+          <a:bodyPr wrap="square" lIns="45720" tIns="18288" rIns="45720" bIns="18288" anchor="t">
             <a:spAutoFit/>
           </a:bodyPr>
           <a:lstStyle/>
@@ -25843,7 +26197,7 @@
           <a:noFill/>
         </p:spPr>
         <p:txBody>
-          <a:bodyPr wrap="square" lIns="45720" rIns="45720" tIns="18288" bIns="18288" anchor="t">
+          <a:bodyPr wrap="square" lIns="45720" tIns="18288" rIns="45720" bIns="18288" anchor="t">
             <a:spAutoFit/>
           </a:bodyPr>
           <a:lstStyle/>
@@ -25907,7 +26261,9 @@
         <p:txBody>
           <a:bodyPr rtlCol="0" anchor="ctr"/>
           <a:lstStyle/>
-          <a:p/>
+          <a:p>
+            <a:endParaRPr/>
+          </a:p>
         </p:txBody>
       </p:sp>
       <p:sp>
@@ -25927,7 +26283,7 @@
           <a:noFill/>
         </p:spPr>
         <p:txBody>
-          <a:bodyPr wrap="square" lIns="45720" rIns="45720" tIns="18288" bIns="18288" anchor="t">
+          <a:bodyPr wrap="square" lIns="45720" tIns="18288" rIns="45720" bIns="18288" anchor="t">
             <a:spAutoFit/>
           </a:bodyPr>
           <a:lstStyle/>
@@ -25969,7 +26325,7 @@
           <a:noFill/>
         </p:spPr>
         <p:txBody>
-          <a:bodyPr wrap="square" lIns="45720" rIns="45720" tIns="18288" bIns="18288" anchor="t">
+          <a:bodyPr wrap="square" lIns="45720" tIns="18288" rIns="45720" bIns="18288" anchor="t">
             <a:spAutoFit/>
           </a:bodyPr>
           <a:lstStyle/>
@@ -26003,7 +26359,7 @@
 </file>
 
 <file path=ppt/slides/slide8.xml><?xml version="1.0" encoding="utf-8"?>
-<p:sld xmlns:a="http://schemas.openxmlformats.org/drawingml/2006/main" xmlns:p="http://schemas.openxmlformats.org/presentationml/2006/main" xmlns:r="http://schemas.openxmlformats.org/officeDocument/2006/relationships">
+<p:sld xmlns:a="http://schemas.openxmlformats.org/drawingml/2006/main" xmlns:r="http://schemas.openxmlformats.org/officeDocument/2006/relationships" xmlns:p="http://schemas.openxmlformats.org/presentationml/2006/main">
   <p:cSld>
     <p:spTree>
       <p:nvGrpSpPr>
@@ -26011,7 +26367,14 @@
         <p:cNvGrpSpPr/>
         <p:nvPr/>
       </p:nvGrpSpPr>
-      <p:grpSpPr/>
+      <p:grpSpPr>
+        <a:xfrm>
+          <a:off x="0" y="0"/>
+          <a:ext cx="0" cy="0"/>
+          <a:chOff x="0" y="0"/>
+          <a:chExt cx="0" cy="0"/>
+        </a:xfrm>
+      </p:grpSpPr>
       <p:sp>
         <p:nvSpPr>
           <p:cNvPr id="2" name="Rectangle 1"/>
@@ -26051,7 +26414,9 @@
         <p:txBody>
           <a:bodyPr rtlCol="0" anchor="ctr"/>
           <a:lstStyle/>
-          <a:p/>
+          <a:p>
+            <a:endParaRPr/>
+          </a:p>
         </p:txBody>
       </p:sp>
       <p:sp>
@@ -26071,7 +26436,7 @@
           <a:noFill/>
         </p:spPr>
         <p:txBody>
-          <a:bodyPr wrap="square" lIns="45720" rIns="45720" tIns="18288" bIns="18288" anchor="t">
+          <a:bodyPr wrap="square" lIns="45720" tIns="18288" rIns="45720" bIns="18288" anchor="t">
             <a:spAutoFit/>
           </a:bodyPr>
           <a:lstStyle/>
@@ -26113,7 +26478,7 @@
           <a:noFill/>
         </p:spPr>
         <p:txBody>
-          <a:bodyPr wrap="square" lIns="45720" rIns="45720" tIns="18288" bIns="18288" anchor="t">
+          <a:bodyPr wrap="square" lIns="45720" tIns="18288" rIns="45720" bIns="18288" anchor="t">
             <a:spAutoFit/>
           </a:bodyPr>
           <a:lstStyle/>
@@ -26181,6 +26546,7 @@
           <a:lstStyle/>
           <a:p>
             <a:pPr algn="ctr"/>
+            <a:endParaRPr/>
           </a:p>
         </p:txBody>
       </p:sp>
@@ -26223,7 +26589,9 @@
         <p:txBody>
           <a:bodyPr rtlCol="0" anchor="ctr"/>
           <a:lstStyle/>
-          <a:p/>
+          <a:p>
+            <a:endParaRPr/>
+          </a:p>
         </p:txBody>
       </p:sp>
       <p:sp>
@@ -26243,7 +26611,7 @@
           <a:noFill/>
         </p:spPr>
         <p:txBody>
-          <a:bodyPr wrap="square" lIns="45720" rIns="45720" tIns="18288" bIns="18288" anchor="t">
+          <a:bodyPr wrap="square" lIns="45720" tIns="18288" rIns="45720" bIns="18288" anchor="t">
             <a:spAutoFit/>
           </a:bodyPr>
           <a:lstStyle/>
@@ -26285,7 +26653,7 @@
           <a:noFill/>
         </p:spPr>
         <p:txBody>
-          <a:bodyPr wrap="square" lIns="45720" rIns="45720" tIns="18288" bIns="18288" anchor="t">
+          <a:bodyPr wrap="square" lIns="45720" tIns="18288" rIns="45720" bIns="18288" anchor="t">
             <a:spAutoFit/>
           </a:bodyPr>
           <a:lstStyle/>
@@ -26327,7 +26695,7 @@
           <a:noFill/>
         </p:spPr>
         <p:txBody>
-          <a:bodyPr wrap="square" lIns="45720" rIns="45720" tIns="18288" bIns="18288" anchor="t">
+          <a:bodyPr wrap="square" lIns="45720" tIns="18288" rIns="45720" bIns="18288" anchor="t">
             <a:spAutoFit/>
           </a:bodyPr>
           <a:lstStyle/>
@@ -26395,6 +26763,7 @@
           <a:lstStyle/>
           <a:p>
             <a:pPr algn="ctr"/>
+            <a:endParaRPr/>
           </a:p>
         </p:txBody>
       </p:sp>
@@ -26437,7 +26806,9 @@
         <p:txBody>
           <a:bodyPr rtlCol="0" anchor="ctr"/>
           <a:lstStyle/>
-          <a:p/>
+          <a:p>
+            <a:endParaRPr/>
+          </a:p>
         </p:txBody>
       </p:sp>
       <p:sp>
@@ -26457,7 +26828,7 @@
           <a:noFill/>
         </p:spPr>
         <p:txBody>
-          <a:bodyPr wrap="square" lIns="45720" rIns="45720" tIns="18288" bIns="18288" anchor="t">
+          <a:bodyPr wrap="square" lIns="45720" tIns="18288" rIns="45720" bIns="18288" anchor="t">
             <a:spAutoFit/>
           </a:bodyPr>
           <a:lstStyle/>
@@ -26499,7 +26870,7 @@
           <a:noFill/>
         </p:spPr>
         <p:txBody>
-          <a:bodyPr wrap="square" lIns="45720" rIns="45720" tIns="18288" bIns="18288" anchor="t">
+          <a:bodyPr wrap="square" lIns="45720" tIns="18288" rIns="45720" bIns="18288" anchor="t">
             <a:spAutoFit/>
           </a:bodyPr>
           <a:lstStyle/>
@@ -26541,7 +26912,7 @@
           <a:noFill/>
         </p:spPr>
         <p:txBody>
-          <a:bodyPr wrap="square" lIns="45720" rIns="45720" tIns="18288" bIns="18288" anchor="t">
+          <a:bodyPr wrap="square" lIns="45720" tIns="18288" rIns="45720" bIns="18288" anchor="t">
             <a:spAutoFit/>
           </a:bodyPr>
           <a:lstStyle/>
@@ -26609,6 +26980,7 @@
           <a:lstStyle/>
           <a:p>
             <a:pPr algn="ctr"/>
+            <a:endParaRPr/>
           </a:p>
         </p:txBody>
       </p:sp>
@@ -26651,7 +27023,9 @@
         <p:txBody>
           <a:bodyPr rtlCol="0" anchor="ctr"/>
           <a:lstStyle/>
-          <a:p/>
+          <a:p>
+            <a:endParaRPr/>
+          </a:p>
         </p:txBody>
       </p:sp>
       <p:sp>
@@ -26671,7 +27045,7 @@
           <a:noFill/>
         </p:spPr>
         <p:txBody>
-          <a:bodyPr wrap="square" lIns="45720" rIns="45720" tIns="18288" bIns="18288" anchor="t">
+          <a:bodyPr wrap="square" lIns="45720" tIns="18288" rIns="45720" bIns="18288" anchor="t">
             <a:spAutoFit/>
           </a:bodyPr>
           <a:lstStyle/>
@@ -26713,7 +27087,7 @@
           <a:noFill/>
         </p:spPr>
         <p:txBody>
-          <a:bodyPr wrap="square" lIns="45720" rIns="45720" tIns="18288" bIns="18288" anchor="t">
+          <a:bodyPr wrap="square" lIns="45720" tIns="18288" rIns="45720" bIns="18288" anchor="t">
             <a:spAutoFit/>
           </a:bodyPr>
           <a:lstStyle/>
@@ -26755,7 +27129,7 @@
           <a:noFill/>
         </p:spPr>
         <p:txBody>
-          <a:bodyPr wrap="square" lIns="45720" rIns="45720" tIns="18288" bIns="18288" anchor="t">
+          <a:bodyPr wrap="square" lIns="45720" tIns="18288" rIns="45720" bIns="18288" anchor="t">
             <a:spAutoFit/>
           </a:bodyPr>
           <a:lstStyle/>
@@ -26797,7 +27171,7 @@
           <a:noFill/>
         </p:spPr>
         <p:txBody>
-          <a:bodyPr wrap="square" lIns="45720" rIns="45720" tIns="18288" bIns="18288" anchor="t">
+          <a:bodyPr wrap="square" lIns="45720" tIns="18288" rIns="45720" bIns="18288" anchor="t">
             <a:spAutoFit/>
           </a:bodyPr>
           <a:lstStyle/>
@@ -26865,6 +27239,7 @@
           <a:lstStyle/>
           <a:p>
             <a:pPr algn="ctr"/>
+            <a:endParaRPr/>
           </a:p>
         </p:txBody>
       </p:sp>
@@ -26885,7 +27260,7 @@
           <a:noFill/>
         </p:spPr>
         <p:txBody>
-          <a:bodyPr wrap="square" lIns="45720" rIns="45720" tIns="18288" bIns="18288">
+          <a:bodyPr wrap="square" lIns="45720" tIns="18288" rIns="45720" bIns="18288">
             <a:spAutoFit/>
           </a:bodyPr>
           <a:lstStyle/>
@@ -26992,7 +27367,7 @@
           <a:noFill/>
         </p:spPr>
         <p:txBody>
-          <a:bodyPr wrap="square" lIns="45720" rIns="45720" tIns="18288" bIns="18288">
+          <a:bodyPr wrap="square" lIns="45720" tIns="18288" rIns="45720" bIns="18288">
             <a:spAutoFit/>
           </a:bodyPr>
           <a:lstStyle/>
@@ -27121,7 +27496,9 @@
         <p:txBody>
           <a:bodyPr rtlCol="0" anchor="ctr"/>
           <a:lstStyle/>
-          <a:p/>
+          <a:p>
+            <a:endParaRPr/>
+          </a:p>
         </p:txBody>
       </p:sp>
       <p:sp>
@@ -27141,7 +27518,7 @@
           <a:noFill/>
         </p:spPr>
         <p:txBody>
-          <a:bodyPr wrap="square" lIns="45720" rIns="45720" tIns="18288" bIns="18288" anchor="t">
+          <a:bodyPr wrap="square" lIns="45720" tIns="18288" rIns="45720" bIns="18288" anchor="t">
             <a:spAutoFit/>
           </a:bodyPr>
           <a:lstStyle/>
@@ -27183,7 +27560,7 @@
           <a:noFill/>
         </p:spPr>
         <p:txBody>
-          <a:bodyPr wrap="square" lIns="45720" rIns="45720" tIns="18288" bIns="18288" anchor="t">
+          <a:bodyPr wrap="square" lIns="45720" tIns="18288" rIns="45720" bIns="18288" anchor="t">
             <a:spAutoFit/>
           </a:bodyPr>
           <a:lstStyle/>
@@ -27217,7 +27594,7 @@
 </file>
 
 <file path=ppt/slides/slide9.xml><?xml version="1.0" encoding="utf-8"?>
-<p:sld xmlns:a="http://schemas.openxmlformats.org/drawingml/2006/main" xmlns:p="http://schemas.openxmlformats.org/presentationml/2006/main" xmlns:r="http://schemas.openxmlformats.org/officeDocument/2006/relationships">
+<p:sld xmlns:a="http://schemas.openxmlformats.org/drawingml/2006/main" xmlns:r="http://schemas.openxmlformats.org/officeDocument/2006/relationships" xmlns:p="http://schemas.openxmlformats.org/presentationml/2006/main">
   <p:cSld>
     <p:spTree>
       <p:nvGrpSpPr>
@@ -27225,7 +27602,14 @@
         <p:cNvGrpSpPr/>
         <p:nvPr/>
       </p:nvGrpSpPr>
-      <p:grpSpPr/>
+      <p:grpSpPr>
+        <a:xfrm>
+          <a:off x="0" y="0"/>
+          <a:ext cx="0" cy="0"/>
+          <a:chOff x="0" y="0"/>
+          <a:chExt cx="0" cy="0"/>
+        </a:xfrm>
+      </p:grpSpPr>
       <p:sp>
         <p:nvSpPr>
           <p:cNvPr id="2" name="Rectangle 1"/>
@@ -27265,7 +27649,9 @@
         <p:txBody>
           <a:bodyPr rtlCol="0" anchor="ctr"/>
           <a:lstStyle/>
-          <a:p/>
+          <a:p>
+            <a:endParaRPr/>
+          </a:p>
         </p:txBody>
       </p:sp>
       <p:sp>
@@ -27285,7 +27671,7 @@
           <a:noFill/>
         </p:spPr>
         <p:txBody>
-          <a:bodyPr wrap="square" lIns="45720" rIns="45720" tIns="18288" bIns="18288" anchor="t">
+          <a:bodyPr wrap="square" lIns="45720" tIns="18288" rIns="45720" bIns="18288" anchor="t">
             <a:spAutoFit/>
           </a:bodyPr>
           <a:lstStyle/>
@@ -27327,7 +27713,7 @@
           <a:noFill/>
         </p:spPr>
         <p:txBody>
-          <a:bodyPr wrap="square" lIns="45720" rIns="45720" tIns="18288" bIns="18288" anchor="t">
+          <a:bodyPr wrap="square" lIns="45720" tIns="18288" rIns="45720" bIns="18288" anchor="t">
             <a:spAutoFit/>
           </a:bodyPr>
           <a:lstStyle/>
@@ -27369,7 +27755,7 @@
           <a:noFill/>
         </p:spPr>
         <p:txBody>
-          <a:bodyPr wrap="square" lIns="45720" rIns="45720" tIns="18288" bIns="18288" anchor="t">
+          <a:bodyPr wrap="square" lIns="45720" tIns="18288" rIns="45720" bIns="18288" anchor="t">
             <a:spAutoFit/>
           </a:bodyPr>
           <a:lstStyle/>
@@ -27439,6 +27825,7 @@
           <a:lstStyle/>
           <a:p>
             <a:pPr algn="ctr"/>
+            <a:endParaRPr/>
           </a:p>
         </p:txBody>
       </p:sp>
@@ -27481,7 +27868,9 @@
         <p:txBody>
           <a:bodyPr rtlCol="0" anchor="ctr"/>
           <a:lstStyle/>
-          <a:p/>
+          <a:p>
+            <a:endParaRPr/>
+          </a:p>
         </p:txBody>
       </p:sp>
       <p:sp>
@@ -27501,7 +27890,7 @@
           <a:noFill/>
         </p:spPr>
         <p:txBody>
-          <a:bodyPr wrap="square" lIns="45720" rIns="45720" tIns="18288" bIns="18288" anchor="t">
+          <a:bodyPr wrap="square" lIns="45720" tIns="18288" rIns="45720" bIns="18288" anchor="t">
             <a:spAutoFit/>
           </a:bodyPr>
           <a:lstStyle/>
@@ -27543,7 +27932,7 @@
           <a:noFill/>
         </p:spPr>
         <p:txBody>
-          <a:bodyPr wrap="square" lIns="45720" rIns="45720" tIns="18288" bIns="18288" anchor="t">
+          <a:bodyPr wrap="square" lIns="45720" tIns="18288" rIns="45720" bIns="18288" anchor="t">
             <a:spAutoFit/>
           </a:bodyPr>
           <a:lstStyle/>
@@ -27585,7 +27974,7 @@
           <a:noFill/>
         </p:spPr>
         <p:txBody>
-          <a:bodyPr wrap="square" lIns="45720" rIns="45720" tIns="18288" bIns="18288" anchor="t">
+          <a:bodyPr wrap="square" lIns="45720" tIns="18288" rIns="45720" bIns="18288" anchor="t">
             <a:spAutoFit/>
           </a:bodyPr>
           <a:lstStyle/>
@@ -27627,7 +28016,7 @@
           <a:noFill/>
         </p:spPr>
         <p:txBody>
-          <a:bodyPr wrap="square" lIns="45720" rIns="45720" tIns="18288" bIns="18288" anchor="t">
+          <a:bodyPr wrap="square" lIns="45720" tIns="18288" rIns="45720" bIns="18288" anchor="t">
             <a:spAutoFit/>
           </a:bodyPr>
           <a:lstStyle/>
@@ -27669,7 +28058,7 @@
           <a:noFill/>
         </p:spPr>
         <p:txBody>
-          <a:bodyPr wrap="square" lIns="45720" rIns="45720" tIns="18288" bIns="18288" anchor="t">
+          <a:bodyPr wrap="square" lIns="45720" tIns="18288" rIns="45720" bIns="18288" anchor="t">
             <a:spAutoFit/>
           </a:bodyPr>
           <a:lstStyle/>
@@ -27711,7 +28100,7 @@
           <a:noFill/>
         </p:spPr>
         <p:txBody>
-          <a:bodyPr wrap="square" lIns="45720" rIns="45720" tIns="18288" bIns="18288" anchor="t">
+          <a:bodyPr wrap="square" lIns="45720" tIns="18288" rIns="45720" bIns="18288" anchor="t">
             <a:spAutoFit/>
           </a:bodyPr>
           <a:lstStyle/>
@@ -27753,7 +28142,7 @@
           <a:noFill/>
         </p:spPr>
         <p:txBody>
-          <a:bodyPr wrap="square" lIns="45720" rIns="45720" tIns="18288" bIns="18288" anchor="t">
+          <a:bodyPr wrap="square" lIns="45720" tIns="18288" rIns="45720" bIns="18288" anchor="t">
             <a:spAutoFit/>
           </a:bodyPr>
           <a:lstStyle/>
@@ -27795,7 +28184,7 @@
           <a:noFill/>
         </p:spPr>
         <p:txBody>
-          <a:bodyPr wrap="square" lIns="45720" rIns="45720" tIns="18288" bIns="18288" anchor="t">
+          <a:bodyPr wrap="square" lIns="45720" tIns="18288" rIns="45720" bIns="18288" anchor="t">
             <a:spAutoFit/>
           </a:bodyPr>
           <a:lstStyle/>
@@ -27859,7 +28248,9 @@
         <p:txBody>
           <a:bodyPr rtlCol="0" anchor="ctr"/>
           <a:lstStyle/>
-          <a:p/>
+          <a:p>
+            <a:endParaRPr/>
+          </a:p>
         </p:txBody>
       </p:sp>
       <p:sp>
@@ -27879,7 +28270,7 @@
           <a:noFill/>
         </p:spPr>
         <p:txBody>
-          <a:bodyPr wrap="square" lIns="45720" rIns="45720" tIns="18288" bIns="18288" anchor="t">
+          <a:bodyPr wrap="square" lIns="45720" tIns="18288" rIns="45720" bIns="18288" anchor="t">
             <a:spAutoFit/>
           </a:bodyPr>
           <a:lstStyle/>
@@ -27921,7 +28312,7 @@
           <a:noFill/>
         </p:spPr>
         <p:txBody>
-          <a:bodyPr wrap="square" lIns="45720" rIns="45720" tIns="18288" bIns="18288" anchor="t">
+          <a:bodyPr wrap="square" lIns="45720" tIns="18288" rIns="45720" bIns="18288" anchor="t">
             <a:spAutoFit/>
           </a:bodyPr>
           <a:lstStyle/>
@@ -27991,6 +28382,7 @@
           <a:lstStyle/>
           <a:p>
             <a:pPr algn="ctr"/>
+            <a:endParaRPr/>
           </a:p>
         </p:txBody>
       </p:sp>
@@ -28033,7 +28425,9 @@
         <p:txBody>
           <a:bodyPr rtlCol="0" anchor="ctr"/>
           <a:lstStyle/>
-          <a:p/>
+          <a:p>
+            <a:endParaRPr/>
+          </a:p>
         </p:txBody>
       </p:sp>
       <p:sp>
@@ -28053,7 +28447,7 @@
           <a:noFill/>
         </p:spPr>
         <p:txBody>
-          <a:bodyPr wrap="square" lIns="45720" rIns="45720" tIns="18288" bIns="18288" anchor="t">
+          <a:bodyPr wrap="square" lIns="45720" tIns="18288" rIns="45720" bIns="18288" anchor="t">
             <a:spAutoFit/>
           </a:bodyPr>
           <a:lstStyle/>
@@ -28095,7 +28489,7 @@
           <a:noFill/>
         </p:spPr>
         <p:txBody>
-          <a:bodyPr wrap="square" lIns="45720" rIns="45720" tIns="18288" bIns="18288" anchor="t">
+          <a:bodyPr wrap="square" lIns="45720" tIns="18288" rIns="45720" bIns="18288" anchor="t">
             <a:spAutoFit/>
           </a:bodyPr>
           <a:lstStyle/>
@@ -28137,7 +28531,7 @@
           <a:noFill/>
         </p:spPr>
         <p:txBody>
-          <a:bodyPr wrap="square" lIns="45720" rIns="45720" tIns="18288" bIns="18288" anchor="t">
+          <a:bodyPr wrap="square" lIns="45720" tIns="18288" rIns="45720" bIns="18288" anchor="t">
             <a:spAutoFit/>
           </a:bodyPr>
           <a:lstStyle/>
@@ -28179,7 +28573,7 @@
           <a:noFill/>
         </p:spPr>
         <p:txBody>
-          <a:bodyPr wrap="square" lIns="45720" rIns="45720" tIns="18288" bIns="18288" anchor="t">
+          <a:bodyPr wrap="square" lIns="45720" tIns="18288" rIns="45720" bIns="18288" anchor="t">
             <a:spAutoFit/>
           </a:bodyPr>
           <a:lstStyle/>
@@ -28221,7 +28615,7 @@
           <a:noFill/>
         </p:spPr>
         <p:txBody>
-          <a:bodyPr wrap="square" lIns="45720" rIns="45720" tIns="18288" bIns="18288" anchor="t">
+          <a:bodyPr wrap="square" lIns="45720" tIns="18288" rIns="45720" bIns="18288" anchor="t">
             <a:spAutoFit/>
           </a:bodyPr>
           <a:lstStyle/>
@@ -28263,7 +28657,7 @@
           <a:noFill/>
         </p:spPr>
         <p:txBody>
-          <a:bodyPr wrap="square" lIns="45720" rIns="45720" tIns="18288" bIns="18288" anchor="t">
+          <a:bodyPr wrap="square" lIns="45720" tIns="18288" rIns="45720" bIns="18288" anchor="t">
             <a:spAutoFit/>
           </a:bodyPr>
           <a:lstStyle/>
@@ -28305,7 +28699,7 @@
           <a:noFill/>
         </p:spPr>
         <p:txBody>
-          <a:bodyPr wrap="square" lIns="45720" rIns="45720" tIns="18288" bIns="18288" anchor="t">
+          <a:bodyPr wrap="square" lIns="45720" tIns="18288" rIns="45720" bIns="18288" anchor="t">
             <a:spAutoFit/>
           </a:bodyPr>
           <a:lstStyle/>
@@ -28347,7 +28741,7 @@
           <a:noFill/>
         </p:spPr>
         <p:txBody>
-          <a:bodyPr wrap="square" lIns="45720" rIns="45720" tIns="18288" bIns="18288" anchor="t">
+          <a:bodyPr wrap="square" lIns="45720" tIns="18288" rIns="45720" bIns="18288" anchor="t">
             <a:spAutoFit/>
           </a:bodyPr>
           <a:lstStyle/>
@@ -28411,7 +28805,9 @@
         <p:txBody>
           <a:bodyPr rtlCol="0" anchor="ctr"/>
           <a:lstStyle/>
-          <a:p/>
+          <a:p>
+            <a:endParaRPr/>
+          </a:p>
         </p:txBody>
       </p:sp>
       <p:sp>
@@ -28431,7 +28827,7 @@
           <a:noFill/>
         </p:spPr>
         <p:txBody>
-          <a:bodyPr wrap="square" lIns="45720" rIns="45720" tIns="18288" bIns="18288" anchor="t">
+          <a:bodyPr wrap="square" lIns="45720" tIns="18288" rIns="45720" bIns="18288" anchor="t">
             <a:spAutoFit/>
           </a:bodyPr>
           <a:lstStyle/>
@@ -28473,7 +28869,7 @@
           <a:noFill/>
         </p:spPr>
         <p:txBody>
-          <a:bodyPr wrap="square" lIns="45720" rIns="45720" tIns="18288" bIns="18288" anchor="t">
+          <a:bodyPr wrap="square" lIns="45720" tIns="18288" rIns="45720" bIns="18288" anchor="t">
             <a:spAutoFit/>
           </a:bodyPr>
           <a:lstStyle/>
@@ -28543,6 +28939,7 @@
           <a:lstStyle/>
           <a:p>
             <a:pPr algn="ctr"/>
+            <a:endParaRPr/>
           </a:p>
         </p:txBody>
       </p:sp>
@@ -28585,7 +28982,9 @@
         <p:txBody>
           <a:bodyPr rtlCol="0" anchor="ctr"/>
           <a:lstStyle/>
-          <a:p/>
+          <a:p>
+            <a:endParaRPr/>
+          </a:p>
         </p:txBody>
       </p:sp>
       <p:sp>
@@ -28605,7 +29004,7 @@
           <a:noFill/>
         </p:spPr>
         <p:txBody>
-          <a:bodyPr wrap="square" lIns="45720" rIns="45720" tIns="18288" bIns="18288" anchor="t">
+          <a:bodyPr wrap="square" lIns="45720" tIns="18288" rIns="45720" bIns="18288" anchor="t">
             <a:spAutoFit/>
           </a:bodyPr>
           <a:lstStyle/>
@@ -28647,7 +29046,7 @@
           <a:noFill/>
         </p:spPr>
         <p:txBody>
-          <a:bodyPr wrap="square" lIns="45720" rIns="45720" tIns="18288" bIns="18288" anchor="t">
+          <a:bodyPr wrap="square" lIns="45720" tIns="18288" rIns="45720" bIns="18288" anchor="t">
             <a:spAutoFit/>
           </a:bodyPr>
           <a:lstStyle/>
@@ -28689,7 +29088,7 @@
           <a:noFill/>
         </p:spPr>
         <p:txBody>
-          <a:bodyPr wrap="square" lIns="45720" rIns="45720" tIns="18288" bIns="18288" anchor="t">
+          <a:bodyPr wrap="square" lIns="45720" tIns="18288" rIns="45720" bIns="18288" anchor="t">
             <a:spAutoFit/>
           </a:bodyPr>
           <a:lstStyle/>
@@ -28731,7 +29130,7 @@
           <a:noFill/>
         </p:spPr>
         <p:txBody>
-          <a:bodyPr wrap="square" lIns="45720" rIns="45720" tIns="18288" bIns="18288" anchor="t">
+          <a:bodyPr wrap="square" lIns="45720" tIns="18288" rIns="45720" bIns="18288" anchor="t">
             <a:spAutoFit/>
           </a:bodyPr>
           <a:lstStyle/>
@@ -28773,7 +29172,7 @@
           <a:noFill/>
         </p:spPr>
         <p:txBody>
-          <a:bodyPr wrap="square" lIns="45720" rIns="45720" tIns="18288" bIns="18288" anchor="t">
+          <a:bodyPr wrap="square" lIns="45720" tIns="18288" rIns="45720" bIns="18288" anchor="t">
             <a:spAutoFit/>
           </a:bodyPr>
           <a:lstStyle/>
@@ -28815,7 +29214,7 @@
           <a:noFill/>
         </p:spPr>
         <p:txBody>
-          <a:bodyPr wrap="square" lIns="45720" rIns="45720" tIns="18288" bIns="18288" anchor="t">
+          <a:bodyPr wrap="square" lIns="45720" tIns="18288" rIns="45720" bIns="18288" anchor="t">
             <a:spAutoFit/>
           </a:bodyPr>
           <a:lstStyle/>
@@ -28857,7 +29256,7 @@
           <a:noFill/>
         </p:spPr>
         <p:txBody>
-          <a:bodyPr wrap="square" lIns="45720" rIns="45720" tIns="18288" bIns="18288" anchor="t">
+          <a:bodyPr wrap="square" lIns="45720" tIns="18288" rIns="45720" bIns="18288" anchor="t">
             <a:spAutoFit/>
           </a:bodyPr>
           <a:lstStyle/>
@@ -28899,7 +29298,7 @@
           <a:noFill/>
         </p:spPr>
         <p:txBody>
-          <a:bodyPr wrap="square" lIns="45720" rIns="45720" tIns="18288" bIns="18288" anchor="t">
+          <a:bodyPr wrap="square" lIns="45720" tIns="18288" rIns="45720" bIns="18288" anchor="t">
             <a:spAutoFit/>
           </a:bodyPr>
           <a:lstStyle/>
@@ -28963,7 +29362,9 @@
         <p:txBody>
           <a:bodyPr rtlCol="0" anchor="ctr"/>
           <a:lstStyle/>
-          <a:p/>
+          <a:p>
+            <a:endParaRPr/>
+          </a:p>
         </p:txBody>
       </p:sp>
       <p:sp>
@@ -28983,7 +29384,7 @@
           <a:noFill/>
         </p:spPr>
         <p:txBody>
-          <a:bodyPr wrap="square" lIns="45720" rIns="45720" tIns="18288" bIns="18288" anchor="t">
+          <a:bodyPr wrap="square" lIns="45720" tIns="18288" rIns="45720" bIns="18288" anchor="t">
             <a:spAutoFit/>
           </a:bodyPr>
           <a:lstStyle/>
@@ -29025,7 +29426,7 @@
           <a:noFill/>
         </p:spPr>
         <p:txBody>
-          <a:bodyPr wrap="square" lIns="45720" rIns="45720" tIns="18288" bIns="18288" anchor="t">
+          <a:bodyPr wrap="square" lIns="45720" tIns="18288" rIns="45720" bIns="18288" anchor="t">
             <a:spAutoFit/>
           </a:bodyPr>
           <a:lstStyle/>
@@ -29089,7 +29490,9 @@
         <p:txBody>
           <a:bodyPr rtlCol="0" anchor="ctr"/>
           <a:lstStyle/>
-          <a:p/>
+          <a:p>
+            <a:endParaRPr/>
+          </a:p>
         </p:txBody>
       </p:sp>
       <p:sp>
@@ -29109,7 +29512,7 @@
           <a:noFill/>
         </p:spPr>
         <p:txBody>
-          <a:bodyPr wrap="square" lIns="45720" rIns="45720" tIns="18288" bIns="18288" anchor="t">
+          <a:bodyPr wrap="square" lIns="45720" tIns="18288" rIns="45720" bIns="18288" anchor="t">
             <a:spAutoFit/>
           </a:bodyPr>
           <a:lstStyle/>
@@ -29151,7 +29554,7 @@
           <a:noFill/>
         </p:spPr>
         <p:txBody>
-          <a:bodyPr wrap="square" lIns="45720" rIns="45720" tIns="18288" bIns="18288" anchor="t">
+          <a:bodyPr wrap="square" lIns="45720" tIns="18288" rIns="45720" bIns="18288" anchor="t">
             <a:spAutoFit/>
           </a:bodyPr>
           <a:lstStyle/>
@@ -29515,44 +29918,44 @@
         <a:sysClr val="window" lastClr="FFFFFF"/>
       </a:lt1>
       <a:dk2>
-        <a:srgbClr val="1F497D"/>
+        <a:srgbClr val="0E2841"/>
       </a:dk2>
       <a:lt2>
-        <a:srgbClr val="EEECE1"/>
+        <a:srgbClr val="E8E8E8"/>
       </a:lt2>
       <a:accent1>
-        <a:srgbClr val="4F81BD"/>
+        <a:srgbClr val="156082"/>
       </a:accent1>
       <a:accent2>
-        <a:srgbClr val="C0504D"/>
+        <a:srgbClr val="E97132"/>
       </a:accent2>
       <a:accent3>
-        <a:srgbClr val="9BBB59"/>
+        <a:srgbClr val="196B24"/>
       </a:accent3>
       <a:accent4>
-        <a:srgbClr val="8064A2"/>
+        <a:srgbClr val="0F9ED5"/>
       </a:accent4>
       <a:accent5>
-        <a:srgbClr val="4BACC6"/>
+        <a:srgbClr val="A02B93"/>
       </a:accent5>
       <a:accent6>
-        <a:srgbClr val="F79646"/>
+        <a:srgbClr val="4EA72E"/>
       </a:accent6>
       <a:hlink>
-        <a:srgbClr val="0000FF"/>
+        <a:srgbClr val="467886"/>
       </a:hlink>
       <a:folHlink>
-        <a:srgbClr val="800080"/>
+        <a:srgbClr val="96607D"/>
       </a:folHlink>
     </a:clrScheme>
     <a:fontScheme name="Office">
       <a:majorFont>
-        <a:latin typeface="Calibri"/>
+        <a:latin typeface="Aptos Display" panose="02110004020202020204"/>
         <a:ea typeface=""/>
         <a:cs typeface=""/>
-        <a:font script="Jpan" typeface="ＭＳ Ｐゴシック"/>
+        <a:font script="Jpan" typeface="游ゴシック Light"/>
         <a:font script="Hang" typeface="맑은 고딕"/>
-        <a:font script="Hans" typeface="宋体"/>
+        <a:font script="Hans" typeface="等线 Light"/>
         <a:font script="Hant" typeface="新細明體"/>
         <a:font script="Arab" typeface="Times New Roman"/>
         <a:font script="Hebr" typeface="Times New Roman"/>
@@ -29580,14 +29983,31 @@
         <a:font script="Viet" typeface="Times New Roman"/>
         <a:font script="Uigh" typeface="Microsoft Uighur"/>
         <a:font script="Geor" typeface="Sylfaen"/>
+        <a:font script="Armn" typeface="Arial"/>
+        <a:font script="Bugi" typeface="Leelawadee UI"/>
+        <a:font script="Bopo" typeface="Microsoft JhengHei"/>
+        <a:font script="Java" typeface="Javanese Text"/>
+        <a:font script="Lisu" typeface="Segoe UI"/>
+        <a:font script="Mymr" typeface="Myanmar Text"/>
+        <a:font script="Nkoo" typeface="Ebrima"/>
+        <a:font script="Olck" typeface="Nirmala UI"/>
+        <a:font script="Osma" typeface="Ebrima"/>
+        <a:font script="Phag" typeface="Phagspa"/>
+        <a:font script="Syrn" typeface="Estrangelo Edessa"/>
+        <a:font script="Syrj" typeface="Estrangelo Edessa"/>
+        <a:font script="Syre" typeface="Estrangelo Edessa"/>
+        <a:font script="Sora" typeface="Nirmala UI"/>
+        <a:font script="Tale" typeface="Microsoft Tai Le"/>
+        <a:font script="Talu" typeface="Microsoft New Tai Lue"/>
+        <a:font script="Tfng" typeface="Ebrima"/>
       </a:majorFont>
       <a:minorFont>
-        <a:latin typeface="Calibri"/>
+        <a:latin typeface="Aptos" panose="02110004020202020204"/>
         <a:ea typeface=""/>
         <a:cs typeface=""/>
-        <a:font script="Jpan" typeface="ＭＳ Ｐゴシック"/>
+        <a:font script="Jpan" typeface="游ゴシック"/>
         <a:font script="Hang" typeface="맑은 고딕"/>
-        <a:font script="Hans" typeface="宋体"/>
+        <a:font script="Hans" typeface="等线"/>
         <a:font script="Hant" typeface="新細明體"/>
         <a:font script="Arab" typeface="Arial"/>
         <a:font script="Hebr" typeface="Arial"/>
@@ -29615,6 +30035,23 @@
         <a:font script="Viet" typeface="Arial"/>
         <a:font script="Uigh" typeface="Microsoft Uighur"/>
         <a:font script="Geor" typeface="Sylfaen"/>
+        <a:font script="Armn" typeface="Arial"/>
+        <a:font script="Bugi" typeface="Leelawadee UI"/>
+        <a:font script="Bopo" typeface="Microsoft JhengHei"/>
+        <a:font script="Java" typeface="Javanese Text"/>
+        <a:font script="Lisu" typeface="Segoe UI"/>
+        <a:font script="Mymr" typeface="Myanmar Text"/>
+        <a:font script="Nkoo" typeface="Ebrima"/>
+        <a:font script="Olck" typeface="Nirmala UI"/>
+        <a:font script="Osma" typeface="Ebrima"/>
+        <a:font script="Phag" typeface="Phagspa"/>
+        <a:font script="Syrn" typeface="Estrangelo Edessa"/>
+        <a:font script="Syrj" typeface="Estrangelo Edessa"/>
+        <a:font script="Syre" typeface="Estrangelo Edessa"/>
+        <a:font script="Sora" typeface="Nirmala UI"/>
+        <a:font script="Tale" typeface="Microsoft Tai Le"/>
+        <a:font script="Talu" typeface="Microsoft New Tai Lue"/>
+        <a:font script="Tfng" typeface="Ebrima"/>
       </a:minorFont>
     </a:fontScheme>
     <a:fmtScheme name="Office">
@@ -29626,180 +30063,136 @@
           <a:gsLst>
             <a:gs pos="0">
               <a:schemeClr val="phClr">
-                <a:tint val="50000"/>
-                <a:satMod val="300000"/>
+                <a:lumMod val="110000"/>
+                <a:satMod val="105000"/>
+                <a:tint val="67000"/>
               </a:schemeClr>
             </a:gs>
-            <a:gs pos="35000">
+            <a:gs pos="50000">
               <a:schemeClr val="phClr">
-                <a:tint val="37000"/>
-                <a:satMod val="300000"/>
+                <a:lumMod val="105000"/>
+                <a:satMod val="103000"/>
+                <a:tint val="73000"/>
               </a:schemeClr>
             </a:gs>
             <a:gs pos="100000">
               <a:schemeClr val="phClr">
-                <a:tint val="15000"/>
-                <a:satMod val="350000"/>
+                <a:lumMod val="105000"/>
+                <a:satMod val="109000"/>
+                <a:tint val="81000"/>
               </a:schemeClr>
             </a:gs>
           </a:gsLst>
-          <a:lin ang="16200000" scaled="1"/>
+          <a:lin ang="5400000" scaled="0"/>
         </a:gradFill>
         <a:gradFill rotWithShape="1">
           <a:gsLst>
             <a:gs pos="0">
               <a:schemeClr val="phClr">
-                <a:tint val="100000"/>
+                <a:satMod val="103000"/>
+                <a:lumMod val="102000"/>
+                <a:tint val="94000"/>
+              </a:schemeClr>
+            </a:gs>
+            <a:gs pos="50000">
+              <a:schemeClr val="phClr">
+                <a:satMod val="110000"/>
+                <a:lumMod val="100000"/>
                 <a:shade val="100000"/>
-                <a:satMod val="130000"/>
               </a:schemeClr>
             </a:gs>
             <a:gs pos="100000">
               <a:schemeClr val="phClr">
-                <a:tint val="50000"/>
-                <a:shade val="100000"/>
-                <a:satMod val="350000"/>
+                <a:lumMod val="99000"/>
+                <a:satMod val="120000"/>
+                <a:shade val="78000"/>
               </a:schemeClr>
             </a:gs>
           </a:gsLst>
-          <a:lin ang="16200000" scaled="0"/>
+          <a:lin ang="5400000" scaled="0"/>
         </a:gradFill>
       </a:fillStyleLst>
       <a:lnStyleLst>
-        <a:ln w="9525" cap="flat" cmpd="sng" algn="ctr">
+        <a:ln w="12700" cap="flat" cmpd="sng" algn="ctr">
           <a:solidFill>
-            <a:schemeClr val="phClr">
-              <a:shade val="95000"/>
-              <a:satMod val="105000"/>
-            </a:schemeClr>
+            <a:schemeClr val="phClr"/>
           </a:solidFill>
           <a:prstDash val="solid"/>
+          <a:miter lim="800000"/>
+        </a:ln>
+        <a:ln w="19050" cap="flat" cmpd="sng" algn="ctr">
+          <a:solidFill>
+            <a:schemeClr val="phClr"/>
+          </a:solidFill>
+          <a:prstDash val="solid"/>
+          <a:miter lim="800000"/>
         </a:ln>
         <a:ln w="25400" cap="flat" cmpd="sng" algn="ctr">
           <a:solidFill>
             <a:schemeClr val="phClr"/>
           </a:solidFill>
           <a:prstDash val="solid"/>
-        </a:ln>
-        <a:ln w="38100" cap="flat" cmpd="sng" algn="ctr">
-          <a:solidFill>
-            <a:schemeClr val="phClr"/>
-          </a:solidFill>
-          <a:prstDash val="solid"/>
+          <a:miter lim="800000"/>
         </a:ln>
       </a:lnStyleLst>
       <a:effectStyleLst>
         <a:effectStyle>
+          <a:effectLst/>
+        </a:effectStyle>
+        <a:effectStyle>
+          <a:effectLst/>
+        </a:effectStyle>
+        <a:effectStyle>
           <a:effectLst>
-            <a:outerShdw blurRad="40000" dist="20000" dir="5400000" rotWithShape="0">
+            <a:outerShdw blurRad="57150" dist="19050" dir="5400000" algn="ctr" rotWithShape="0">
               <a:srgbClr val="000000">
-                <a:alpha val="38000"/>
+                <a:alpha val="63000"/>
               </a:srgbClr>
             </a:outerShdw>
           </a:effectLst>
-        </a:effectStyle>
-        <a:effectStyle>
-          <a:effectLst>
-            <a:outerShdw blurRad="40000" dist="23000" dir="5400000" rotWithShape="0">
-              <a:srgbClr val="000000">
-                <a:alpha val="35000"/>
-              </a:srgbClr>
-            </a:outerShdw>
-          </a:effectLst>
-        </a:effectStyle>
-        <a:effectStyle>
-          <a:effectLst>
-            <a:outerShdw blurRad="40000" dist="23000" dir="5400000" rotWithShape="0">
-              <a:srgbClr val="000000">
-                <a:alpha val="35000"/>
-              </a:srgbClr>
-            </a:outerShdw>
-          </a:effectLst>
-          <a:scene3d>
-            <a:camera prst="orthographicFront">
-              <a:rot lat="0" lon="0" rev="0"/>
-            </a:camera>
-            <a:lightRig rig="threePt" dir="t">
-              <a:rot lat="0" lon="0" rev="1200000"/>
-            </a:lightRig>
-          </a:scene3d>
-          <a:sp3d>
-            <a:bevelT w="63500" h="25400"/>
-          </a:sp3d>
         </a:effectStyle>
       </a:effectStyleLst>
       <a:bgFillStyleLst>
         <a:solidFill>
           <a:schemeClr val="phClr"/>
         </a:solidFill>
+        <a:solidFill>
+          <a:schemeClr val="phClr">
+            <a:tint val="95000"/>
+            <a:satMod val="170000"/>
+          </a:schemeClr>
+        </a:solidFill>
         <a:gradFill rotWithShape="1">
           <a:gsLst>
             <a:gs pos="0">
               <a:schemeClr val="phClr">
-                <a:tint val="40000"/>
-                <a:satMod val="350000"/>
+                <a:tint val="93000"/>
+                <a:satMod val="150000"/>
+                <a:shade val="98000"/>
+                <a:lumMod val="102000"/>
               </a:schemeClr>
             </a:gs>
-            <a:gs pos="40000">
+            <a:gs pos="50000">
               <a:schemeClr val="phClr">
-                <a:tint val="45000"/>
-                <a:shade val="99000"/>
-                <a:satMod val="350000"/>
+                <a:tint val="98000"/>
+                <a:satMod val="130000"/>
+                <a:shade val="90000"/>
+                <a:lumMod val="103000"/>
               </a:schemeClr>
             </a:gs>
             <a:gs pos="100000">
               <a:schemeClr val="phClr">
-                <a:shade val="20000"/>
-                <a:satMod val="255000"/>
+                <a:shade val="63000"/>
+                <a:satMod val="120000"/>
               </a:schemeClr>
             </a:gs>
           </a:gsLst>
-          <a:path path="circle">
-            <a:fillToRect l="50000" t="-80000" r="50000" b="180000"/>
-          </a:path>
-        </a:gradFill>
-        <a:gradFill rotWithShape="1">
-          <a:gsLst>
-            <a:gs pos="0">
-              <a:schemeClr val="phClr">
-                <a:tint val="80000"/>
-                <a:satMod val="300000"/>
-              </a:schemeClr>
-            </a:gs>
-            <a:gs pos="100000">
-              <a:schemeClr val="phClr">
-                <a:shade val="30000"/>
-                <a:satMod val="200000"/>
-              </a:schemeClr>
-            </a:gs>
-          </a:gsLst>
-          <a:path path="circle">
-            <a:fillToRect l="50000" t="50000" r="50000" b="50000"/>
-          </a:path>
+          <a:lin ang="5400000" scaled="0"/>
         </a:gradFill>
       </a:bgFillStyleLst>
     </a:fmtScheme>
   </a:themeElements>
   <a:objectDefaults>
-    <a:spDef>
-      <a:spPr/>
-      <a:bodyPr/>
-      <a:lstStyle/>
-      <a:style>
-        <a:lnRef idx="1">
-          <a:schemeClr val="accent1"/>
-        </a:lnRef>
-        <a:fillRef idx="3">
-          <a:schemeClr val="accent1"/>
-        </a:fillRef>
-        <a:effectRef idx="2">
-          <a:schemeClr val="accent1"/>
-        </a:effectRef>
-        <a:fontRef idx="minor">
-          <a:schemeClr val="lt1"/>
-        </a:fontRef>
-      </a:style>
-    </a:spDef>
     <a:lnDef>
       <a:spPr/>
       <a:bodyPr/>
@@ -29821,5 +30214,10 @@
     </a:lnDef>
   </a:objectDefaults>
   <a:extraClrSchemeLst/>
+  <a:extLst>
+    <a:ext uri="{05A4C25C-085E-4340-85A3-A5531E510DB2}">
+      <thm15:themeFamily xmlns:thm15="http://schemas.microsoft.com/office/thememl/2012/main" name="Office Theme" id="{2E142A2C-CD16-42D6-873A-C26D2A0506FA}" vid="{1BDDFF52-6CD6-40A5-AB3C-68EB2F1E4D0A}"/>
+    </a:ext>
+  </a:extLst>
 </a:theme>
 </file>